--- a/tox21-phase1/slides/tox21_phase1.pptx
+++ b/tox21-phase1/slides/tox21_phase1.pptx
@@ -514,7 +514,7 @@
           <a:lstStyle/>
           <a:p>
             <a:r>
-              <a:t>Opening. We predict the outcome of 12 Tox21 toxicity assays from a molecule's structure. Phase 1 is the classical machine learning baseline and the evaluation machinery; the graph neural network is Phase 2. Team: Raghav (data, splits, Logistic Regression), Ranajeet (features, Random Forest), Parrv (repository, evaluation harness, XGBoost, tuning and final test), Abhijeet (report and analysis); the fifth member's name is still to be added in the README. Source: README team table.</a:t>
+              <a:t>Opening. We predict the outcome of 12 Tox21 toxicity assays from a molecule's structure. Phase 1 is the classical machine learning baseline and the evaluation machinery; the graph neural network is Phase 2. Team: Raghav (data, splits, Logistic Regression), Ranajeet (features, Random Forest), Parrv (repository, evaluation harness, XGBoost, tuning and final test), Abhijeet (report and analysis); Malhar is Member 5 (QA and verification); the role is assigned and the QA tasks were completed by Parrv. Source: README team table.</a:t>
             </a:r>
           </a:p>
         </p:txBody>
@@ -794,7 +794,7 @@
           <a:lstStyle/>
           <a:p>
             <a:r>
-              <a:t>Roles follow the Phase 1 team handbook and the README. Raghav: data cleaning, deduplication, EDA, splits, Logistic Regression. Ranajeet: Morgan fingerprints, RDKit descriptors, leak-free preprocessing, Random Forest. Parrv: repository structure and contract, evaluation harness, XGBoost, tuning and final-test scripts, reproducibility. Abhijeet: literature review, theory, results analysis, Tanimoto study, report. The fifth member's name is still to be added in the README. Phase 2: a graph neural network trained on the same splits and protocol, compared against these baselines. Reproducibility: make final-test regenerates results_test.csv; we reproduced all 432 rows to 1e-9.</a:t>
+              <a:t>Roles follow the Phase 1 team handbook and the README. Raghav: data cleaning, deduplication, EDA, splits, Logistic Regression. Ranajeet: Morgan fingerprints, RDKit descriptors, leak-free preprocessing, Random Forest. Parrv: repository structure and contract, evaluation harness, XGBoost, tuning and final-test scripts, reproducibility. Abhijeet: literature review, theory, results analysis, Tanimoto study, report. Malhar is Member 5 (QA and verification). The role is assigned; the QA tasks listed in the README are in progress, and those completed so far were done by Parrv. Phase 2: a graph neural network trained on the same splits and protocol, compared against these baselines. Reproducibility: make final-test regenerates results_test.csv; we reproduced all 432 rows to 1e-9.</a:t>
             </a:r>
           </a:p>
         </p:txBody>
@@ -4516,7 +4516,7 @@
                 </a:solidFill>
                 <a:latin typeface="Calibri"/>
               </a:rPr>
-              <a:t>Raghav  |  Ranajeet  |  Parrv  |  Abhijeet  |  fifth member (name to be added)</a:t>
+              <a:t>Raghav  |  Ranajeet  |  Parrv  |  Abhijeet  |  Malhar</a:t>
             </a:r>
           </a:p>
         </p:txBody>
@@ -8030,7 +8030,7 @@
                           </a:solidFill>
                           <a:latin typeface="Calibri"/>
                         </a:rPr>
-                        <a:t>Fifth member</a:t>
+                        <a:t>Malhar (Member 5, QA and verification)</a:t>
                       </a:r>
                     </a:p>
                   </a:txBody>
@@ -8053,7 +8053,7 @@
                           </a:solidFill>
                           <a:latin typeface="Calibri"/>
                         </a:rPr>
-                        <a:t>Slides, README polish, tests, viva preparation (name to be added)</a:t>
+                        <a:t>Assigned role; the QA tasks below were completed by Parrv.</a:t>
                       </a:r>
                     </a:p>
                   </a:txBody>
@@ -8089,6 +8089,22 @@
             <a:spAutoFit/>
           </a:bodyPr>
           <a:lstStyle/>
+          <a:p>
+            <a:pPr algn="l">
+              <a:spcAft>
+                <a:spcPts val="800"/>
+              </a:spcAft>
+            </a:pPr>
+            <a:r>
+              <a:rPr sz="1800" b="0">
+                <a:solidFill>
+                  <a:srgbClr val="142B4D"/>
+                </a:solidFill>
+                <a:latin typeface="Calibri"/>
+              </a:rPr>
+              <a:t>•  QA and verification (Member 5 role): in progress</a:t>
+            </a:r>
+          </a:p>
           <a:p>
             <a:pPr algn="l">
               <a:spcAft>

--- a/tox21-phase1/slides/tox21_phase1.pptx
+++ b/tox21-phase1/slides/tox21_phase1.pptx
@@ -794,7 +794,7 @@
           <a:lstStyle/>
           <a:p>
             <a:r>
-              <a:t>Roles follow the Phase 1 team handbook and the README. Raghav: data cleaning, deduplication, EDA, splits, Logistic Regression. Ranajeet: Morgan fingerprints, RDKit descriptors, leak-free preprocessing, Random Forest. Parrv: repository structure and contract, evaluation harness, XGBoost, tuning and final-test scripts, reproducibility. Abhijeet: literature review, theory, results analysis, Tanimoto study, report. Malhar is Member 5 (QA and verification). The role is assigned; the QA tasks listed in the README are in progress, and those completed so far were done by Parrv. Phase 2: a graph neural network trained on the same splits and protocol, compared against these baselines. Reproducibility: make final-test regenerates results_test.csv; we reproduced all 432 rows to 1e-9.</a:t>
+              <a:t>Roles follow the Phase 1 team handbook and the README. Raghav: data cleaning, deduplication, EDA, splits, Logistic Regression. Ranajeet: Morgan fingerprints, RDKit descriptors, leak-free preprocessing, Random Forest. Parrv: repository structure and contract, evaluation harness, XGBoost, tuning and final-test scripts, reproducibility. Abhijeet: literature review, theory, results analysis, Tanimoto study, report. Malhar is Member 5. The team presentation lists README and slide polish, tests, and viva preparation; the README describes the role as QA and verification. The committed QA report says the 200-molecule smoke test and final-result reproduction were completed by Parrv, while the viva drill remains unrun. Known QA item: 01_eda.ipynb fails as committed because it expects a Google Colab path; the report proposes a portable-path fix. Phase 2 is a graph neural network evaluated on the same splits and protocol. Reproducibility: the QA report records that make final-test reproduced all 432 result rows to 1e-9.</a:t>
             </a:r>
           </a:p>
         </p:txBody>
@@ -4405,7 +4405,50 @@
       </p:sp>
       <p:sp>
         <p:nvSpPr>
-          <p:cNvPr id="3" name="TextBox 2"/>
+          <p:cNvPr id="3" name="Rectangle 2"/>
+          <p:cNvSpPr/>
+          <p:nvPr/>
+        </p:nvSpPr>
+        <p:spPr>
+          <a:xfrm>
+            <a:off x="566928" y="1755648"/>
+            <a:ext cx="73152" cy="3566160"/>
+          </a:xfrm>
+          <a:prstGeom prst="rect">
+            <a:avLst/>
+          </a:prstGeom>
+          <a:solidFill>
+            <a:srgbClr val="1B7F8C"/>
+          </a:solidFill>
+          <a:ln>
+            <a:noFill/>
+          </a:ln>
+        </p:spPr>
+        <p:style>
+          <a:lnRef idx="1">
+            <a:schemeClr val="accent1"/>
+          </a:lnRef>
+          <a:fillRef idx="3">
+            <a:schemeClr val="accent1"/>
+          </a:fillRef>
+          <a:effectRef idx="2">
+            <a:schemeClr val="accent1"/>
+          </a:effectRef>
+          <a:fontRef idx="minor">
+            <a:schemeClr val="lt1"/>
+          </a:fontRef>
+        </p:style>
+        <p:txBody>
+          <a:bodyPr rtlCol="0" anchor="ctr"/>
+          <a:lstStyle/>
+          <a:p>
+            <a:pPr algn="ctr"/>
+          </a:p>
+        </p:txBody>
+      </p:sp>
+      <p:sp>
+        <p:nvSpPr>
+          <p:cNvPr id="4" name="TextBox 3"/>
           <p:cNvSpPr txBox="1"/>
           <p:nvPr/>
         </p:nvSpPr>
@@ -4444,7 +4487,7 @@
       </p:sp>
       <p:sp>
         <p:nvSpPr>
-          <p:cNvPr id="4" name="TextBox 3"/>
+          <p:cNvPr id="5" name="TextBox 4"/>
           <p:cNvSpPr txBox="1"/>
           <p:nvPr/>
         </p:nvSpPr>
@@ -4484,14 +4527,14 @@
       </p:sp>
       <p:sp>
         <p:nvSpPr>
-          <p:cNvPr id="5" name="TextBox 4"/>
+          <p:cNvPr id="6" name="TextBox 5"/>
           <p:cNvSpPr txBox="1"/>
           <p:nvPr/>
         </p:nvSpPr>
         <p:spPr>
           <a:xfrm>
-            <a:off x="822960" y="5120640"/>
-            <a:ext cx="10515600" cy="822960"/>
+            <a:off x="822960" y="4709160"/>
+            <a:ext cx="10515600" cy="411480"/>
           </a:xfrm>
           <a:prstGeom prst="rect">
             <a:avLst/>
@@ -4510,9 +4553,48 @@
               </a:spcAft>
             </a:pPr>
             <a:r>
-              <a:rPr sz="1800" b="0">
+              <a:rPr sz="1700" b="1">
                 <a:solidFill>
                   <a:srgbClr val="FFFFFF"/>
+                </a:solidFill>
+                <a:latin typeface="Calibri"/>
+              </a:rPr>
+              <a:t>7,709 molecules     •     12 assay endpoints     •     3 model families</a:t>
+            </a:r>
+          </a:p>
+        </p:txBody>
+      </p:sp>
+      <p:sp>
+        <p:nvSpPr>
+          <p:cNvPr id="7" name="TextBox 6"/>
+          <p:cNvSpPr txBox="1"/>
+          <p:nvPr/>
+        </p:nvSpPr>
+        <p:spPr>
+          <a:xfrm>
+            <a:off x="822960" y="5440680"/>
+            <a:ext cx="10515600" cy="457200"/>
+          </a:xfrm>
+          <a:prstGeom prst="rect">
+            <a:avLst/>
+          </a:prstGeom>
+          <a:noFill/>
+        </p:spPr>
+        <p:txBody>
+          <a:bodyPr wrap="square" anchor="t" lIns="45720" rIns="45720">
+            <a:spAutoFit/>
+          </a:bodyPr>
+          <a:lstStyle/>
+          <a:p>
+            <a:pPr algn="l">
+              <a:spcAft>
+                <a:spcPts val="800"/>
+              </a:spcAft>
+            </a:pPr>
+            <a:r>
+              <a:rPr sz="1600" b="0">
+                <a:solidFill>
+                  <a:srgbClr val="BFE3E8"/>
                 </a:solidFill>
                 <a:latin typeface="Calibri"/>
               </a:rPr>
@@ -7628,7 +7710,7 @@
                 </a:solidFill>
                 <a:latin typeface="Calibri"/>
               </a:rPr>
-              <a:t>Team contributions and Phase 2</a:t>
+              <a:t>Team contributions, QA and next steps</a:t>
             </a:r>
           </a:p>
         </p:txBody>
@@ -8030,7 +8112,7 @@
                           </a:solidFill>
                           <a:latin typeface="Calibri"/>
                         </a:rPr>
-                        <a:t>Malhar (Member 5, QA and verification)</a:t>
+                        <a:t>Malhar (Member 5)</a:t>
                       </a:r>
                     </a:p>
                   </a:txBody>
@@ -8053,7 +8135,7 @@
                           </a:solidFill>
                           <a:latin typeface="Calibri"/>
                         </a:rPr>
-                        <a:t>Assigned role; the QA tasks below were completed by Parrv.</a:t>
+                        <a:t>README and slide polish, tests, QA communication, viva preparation</a:t>
                       </a:r>
                     </a:p>
                   </a:txBody>
@@ -8070,71 +8152,192 @@
       </p:graphicFrame>
       <p:sp>
         <p:nvSpPr>
-          <p:cNvPr id="7" name="TextBox 6"/>
-          <p:cNvSpPr txBox="1"/>
+          <p:cNvPr id="7" name="Rounded Rectangle 6"/>
+          <p:cNvSpPr/>
           <p:nvPr/>
         </p:nvSpPr>
         <p:spPr>
           <a:xfrm>
             <a:off x="548640" y="4663440"/>
-            <a:ext cx="11064240" cy="1645920"/>
+            <a:ext cx="3520440" cy="1325880"/>
           </a:xfrm>
-          <a:prstGeom prst="rect">
+          <a:prstGeom prst="roundRect">
             <a:avLst/>
           </a:prstGeom>
-          <a:noFill/>
+          <a:solidFill>
+            <a:srgbClr val="1B7F8C"/>
+          </a:solidFill>
+          <a:ln>
+            <a:noFill/>
+          </a:ln>
         </p:spPr>
-        <p:txBody>
-          <a:bodyPr wrap="square" anchor="t" lIns="45720" rIns="45720">
-            <a:spAutoFit/>
-          </a:bodyPr>
+        <p:style>
+          <a:lnRef idx="1">
+            <a:schemeClr val="accent1"/>
+          </a:lnRef>
+          <a:fillRef idx="3">
+            <a:schemeClr val="accent1"/>
+          </a:fillRef>
+          <a:effectRef idx="2">
+            <a:schemeClr val="accent1"/>
+          </a:effectRef>
+          <a:fontRef idx="minor">
+            <a:schemeClr val="lt1"/>
+          </a:fontRef>
+        </p:style>
+        <p:txBody>
+          <a:bodyPr rtlCol="0" anchor="ctr" wrap="square" lIns="73152" rIns="73152"/>
           <a:lstStyle/>
           <a:p>
-            <a:pPr algn="l">
-              <a:spcAft>
-                <a:spcPts val="800"/>
-              </a:spcAft>
-            </a:pPr>
-            <a:r>
-              <a:rPr sz="1800" b="0">
+            <a:pPr algn="ctr"/>
+            <a:r>
+              <a:rPr sz="1500" b="1">
                 <a:solidFill>
-                  <a:srgbClr val="142B4D"/>
+                  <a:srgbClr val="FFFFFF"/>
                 </a:solidFill>
                 <a:latin typeface="Calibri"/>
               </a:rPr>
-              <a:t>•  QA and verification (Member 5 role): in progress</a:t>
-            </a:r>
-          </a:p>
-          <a:p>
-            <a:pPr algn="l">
-              <a:spcAft>
-                <a:spcPts val="800"/>
-              </a:spcAft>
-            </a:pPr>
-            <a:r>
-              <a:rPr sz="1800" b="0">
+              <a:t>QA RECORD</a:t>
+            </a:r>
+          </a:p>
+          <a:p>
+            <a:pPr algn="ctr"/>
+            <a:r>
+              <a:rPr sz="1200" b="0">
                 <a:solidFill>
-                  <a:srgbClr val="142B4D"/>
+                  <a:srgbClr val="FFFFFF"/>
                 </a:solidFill>
                 <a:latin typeface="Calibri"/>
               </a:rPr>
-              <a:t>•  Phase 2: a graph neural network on the same splits and protocol, compared with these baselines</a:t>
-            </a:r>
-          </a:p>
-          <a:p>
-            <a:pPr algn="l">
-              <a:spcAft>
-                <a:spcPts val="800"/>
-              </a:spcAft>
-            </a:pPr>
-            <a:r>
-              <a:rPr sz="1800" b="0">
+              <a:t>Smoke test and 432-row reproduction documented by Parrv</a:t>
+            </a:r>
+          </a:p>
+        </p:txBody>
+      </p:sp>
+      <p:sp>
+        <p:nvSpPr>
+          <p:cNvPr id="8" name="Rounded Rectangle 7"/>
+          <p:cNvSpPr/>
+          <p:nvPr/>
+        </p:nvSpPr>
+        <p:spPr>
+          <a:xfrm>
+            <a:off x="4343400" y="4663440"/>
+            <a:ext cx="3520440" cy="1325880"/>
+          </a:xfrm>
+          <a:prstGeom prst="roundRect">
+            <a:avLst/>
+          </a:prstGeom>
+          <a:solidFill>
+            <a:srgbClr val="142B4D"/>
+          </a:solidFill>
+          <a:ln>
+            <a:noFill/>
+          </a:ln>
+        </p:spPr>
+        <p:style>
+          <a:lnRef idx="1">
+            <a:schemeClr val="accent1"/>
+          </a:lnRef>
+          <a:fillRef idx="3">
+            <a:schemeClr val="accent1"/>
+          </a:fillRef>
+          <a:effectRef idx="2">
+            <a:schemeClr val="accent1"/>
+          </a:effectRef>
+          <a:fontRef idx="minor">
+            <a:schemeClr val="lt1"/>
+          </a:fontRef>
+        </p:style>
+        <p:txBody>
+          <a:bodyPr rtlCol="0" anchor="ctr" wrap="square" lIns="73152" rIns="73152"/>
+          <a:lstStyle/>
+          <a:p>
+            <a:pPr algn="ctr"/>
+            <a:r>
+              <a:rPr sz="1500" b="1">
                 <a:solidFill>
-                  <a:srgbClr val="142B4D"/>
+                  <a:srgbClr val="FFFFFF"/>
                 </a:solidFill>
                 <a:latin typeface="Calibri"/>
               </a:rPr>
-              <a:t>•  Reproducible: make final-test regenerates results_test.csv (432 rows; matched the committed file to 1e-9)</a:t>
+              <a:t>MEMBER 5 FOCUS</a:t>
+            </a:r>
+          </a:p>
+          <a:p>
+            <a:pPr algn="ctr"/>
+            <a:r>
+              <a:rPr sz="1200" b="0">
+                <a:solidFill>
+                  <a:srgbClr val="FFFFFF"/>
+                </a:solidFill>
+                <a:latin typeface="Calibri"/>
+              </a:rPr>
+              <a:t>README and slides, verification notes, viva preparation</a:t>
+            </a:r>
+          </a:p>
+        </p:txBody>
+      </p:sp>
+      <p:sp>
+        <p:nvSpPr>
+          <p:cNvPr id="9" name="Rounded Rectangle 8"/>
+          <p:cNvSpPr/>
+          <p:nvPr/>
+        </p:nvSpPr>
+        <p:spPr>
+          <a:xfrm>
+            <a:off x="8138160" y="4663440"/>
+            <a:ext cx="3520440" cy="1325880"/>
+          </a:xfrm>
+          <a:prstGeom prst="roundRect">
+            <a:avLst/>
+          </a:prstGeom>
+          <a:solidFill>
+            <a:srgbClr val="B23A3A"/>
+          </a:solidFill>
+          <a:ln>
+            <a:noFill/>
+          </a:ln>
+        </p:spPr>
+        <p:style>
+          <a:lnRef idx="1">
+            <a:schemeClr val="accent1"/>
+          </a:lnRef>
+          <a:fillRef idx="3">
+            <a:schemeClr val="accent1"/>
+          </a:fillRef>
+          <a:effectRef idx="2">
+            <a:schemeClr val="accent1"/>
+          </a:effectRef>
+          <a:fontRef idx="minor">
+            <a:schemeClr val="lt1"/>
+          </a:fontRef>
+        </p:style>
+        <p:txBody>
+          <a:bodyPr rtlCol="0" anchor="ctr" wrap="square" lIns="73152" rIns="73152"/>
+          <a:lstStyle/>
+          <a:p>
+            <a:pPr algn="ctr"/>
+            <a:r>
+              <a:rPr sz="1500" b="1">
+                <a:solidFill>
+                  <a:srgbClr val="FFFFFF"/>
+                </a:solidFill>
+                <a:latin typeface="Calibri"/>
+              </a:rPr>
+              <a:t>OPEN ITEMS</a:t>
+            </a:r>
+          </a:p>
+          <a:p>
+            <a:pPr algn="ctr"/>
+            <a:r>
+              <a:rPr sz="1200" b="0">
+                <a:solidFill>
+                  <a:srgbClr val="FFFFFF"/>
+                </a:solidFill>
+                <a:latin typeface="Calibri"/>
+              </a:rPr>
+              <a:t>Viva drill pending; 01_eda notebook uses a Colab path</a:t>
             </a:r>
           </a:p>
         </p:txBody>

--- a/tox21-phase1/slides/tox21_phase1.pptx
+++ b/tox21-phase1/slides/tox21_phase1.pptx
@@ -4474,11 +4474,11 @@
               </a:spcAft>
             </a:pPr>
             <a:r>
-              <a:rPr sz="4400" b="1">
+              <a:rPr sz="4400" b="1" dirty="0">
                 <a:solidFill>
                   <a:srgbClr val="FFFFFF"/>
                 </a:solidFill>
-                <a:latin typeface="Calibri"/>
+                <a:latin typeface="Arial"/>
               </a:rPr>
               <a:t>Predicting Tox21 toxicity from molecular structure</a:t>
             </a:r>
@@ -4513,11 +4513,11 @@
               </a:spcAft>
             </a:pPr>
             <a:r>
-              <a:rPr sz="2200" b="0">
+              <a:rPr sz="2200" b="0" dirty="0">
                 <a:solidFill>
                   <a:srgbClr val="BFE3E8"/>
                 </a:solidFill>
-                <a:latin typeface="Calibri"/>
+                <a:latin typeface="Arial"/>
               </a:rPr>
               <a:t>Phase 1: Morgan fingerprints, RDKit descriptors and classical ML
 (Logistic Regression, Random Forest, XGBoost)</a:t>
@@ -4553,11 +4553,11 @@
               </a:spcAft>
             </a:pPr>
             <a:r>
-              <a:rPr sz="1700" b="1">
+              <a:rPr sz="1700" b="1" dirty="0">
                 <a:solidFill>
                   <a:srgbClr val="FFFFFF"/>
                 </a:solidFill>
-                <a:latin typeface="Calibri"/>
+                <a:latin typeface="Arial"/>
               </a:rPr>
               <a:t>7,709 molecules     •     12 assay endpoints     •     3 model families</a:t>
             </a:r>
@@ -4592,11 +4592,11 @@
               </a:spcAft>
             </a:pPr>
             <a:r>
-              <a:rPr sz="1600" b="0">
+              <a:rPr sz="1600" b="0" dirty="0">
                 <a:solidFill>
                   <a:srgbClr val="BFE3E8"/>
                 </a:solidFill>
-                <a:latin typeface="Calibri"/>
+                <a:latin typeface="Arial"/>
               </a:rPr>
               <a:t>Raghav  |  Ranajeet  |  Parrv  |  Abhijeet  |  Malhar</a:t>
             </a:r>
@@ -4649,11 +4649,11 @@
               </a:spcAft>
             </a:pPr>
             <a:r>
-              <a:rPr sz="3000" b="1">
+              <a:rPr sz="3000" b="1" dirty="0">
                 <a:solidFill>
                   <a:srgbClr val="142B4D"/>
                 </a:solidFill>
-                <a:latin typeface="Calibri"/>
+                <a:latin typeface="Arial"/>
               </a:rPr>
               <a:t>Per-endpoint results (scaffold test, Morgan+Desc)</a:t>
             </a:r>
@@ -4731,11 +4731,11 @@
               </a:spcAft>
             </a:pPr>
             <a:r>
-              <a:rPr sz="1000" b="0">
+              <a:rPr sz="1000" b="0" dirty="0">
                 <a:solidFill>
                   <a:srgbClr val="555F6B"/>
                 </a:solidFill>
-                <a:latin typeface="Calibri"/>
+                <a:latin typeface="Arial"/>
               </a:rPr>
               <a:t>Tox21 Phase 1  |  classical ML baseline</a:t>
             </a:r>
@@ -4770,11 +4770,11 @@
               </a:spcAft>
             </a:pPr>
             <a:r>
-              <a:rPr sz="1000" b="0">
+              <a:rPr sz="1000" b="0" dirty="0">
                 <a:solidFill>
                   <a:srgbClr val="555F6B"/>
                 </a:solidFill>
-                <a:latin typeface="Calibri"/>
+                <a:latin typeface="Arial"/>
               </a:rPr>
               <a:t>10</a:t>
             </a:r>
@@ -4816,11 +4816,11 @@
                     <a:p>
                       <a:pPr algn="l"/>
                       <a:r>
-                        <a:rPr sz="1200" b="1">
+                        <a:rPr sz="1200" b="1" dirty="0">
                           <a:solidFill>
                             <a:srgbClr val="FFFFFF"/>
                           </a:solidFill>
-                          <a:latin typeface="Calibri"/>
+                          <a:latin typeface="Arial"/>
                         </a:rPr>
                         <a:t>Endpoint</a:t>
                       </a:r>
@@ -4839,11 +4839,11 @@
                     <a:p>
                       <a:pPr algn="ctr"/>
                       <a:r>
-                        <a:rPr sz="1200" b="1">
+                        <a:rPr sz="1200" b="1" dirty="0">
                           <a:solidFill>
                             <a:srgbClr val="FFFFFF"/>
                           </a:solidFill>
-                          <a:latin typeface="Calibri"/>
+                          <a:latin typeface="Arial"/>
                         </a:rPr>
                         <a:t>LR
 ROC</a:t>
@@ -4863,11 +4863,11 @@
                     <a:p>
                       <a:pPr algn="ctr"/>
                       <a:r>
-                        <a:rPr sz="1200" b="1">
+                        <a:rPr sz="1200" b="1" dirty="0">
                           <a:solidFill>
                             <a:srgbClr val="FFFFFF"/>
                           </a:solidFill>
-                          <a:latin typeface="Calibri"/>
+                          <a:latin typeface="Arial"/>
                         </a:rPr>
                         <a:t>RF
 ROC</a:t>
@@ -4887,11 +4887,11 @@
                     <a:p>
                       <a:pPr algn="ctr"/>
                       <a:r>
-                        <a:rPr sz="1200" b="1">
+                        <a:rPr sz="1200" b="1" dirty="0">
                           <a:solidFill>
                             <a:srgbClr val="FFFFFF"/>
                           </a:solidFill>
-                          <a:latin typeface="Calibri"/>
+                          <a:latin typeface="Arial"/>
                         </a:rPr>
                         <a:t>XGB
 ROC</a:t>
@@ -4911,11 +4911,11 @@
                     <a:p>
                       <a:pPr algn="ctr"/>
                       <a:r>
-                        <a:rPr sz="1200" b="1">
+                        <a:rPr sz="1200" b="1" dirty="0">
                           <a:solidFill>
                             <a:srgbClr val="FFFFFF"/>
                           </a:solidFill>
-                          <a:latin typeface="Calibri"/>
+                          <a:latin typeface="Arial"/>
                         </a:rPr>
                         <a:t>LR
 PR</a:t>
@@ -4935,11 +4935,11 @@
                     <a:p>
                       <a:pPr algn="ctr"/>
                       <a:r>
-                        <a:rPr sz="1200" b="1">
+                        <a:rPr sz="1200" b="1" dirty="0">
                           <a:solidFill>
                             <a:srgbClr val="FFFFFF"/>
                           </a:solidFill>
-                          <a:latin typeface="Calibri"/>
+                          <a:latin typeface="Arial"/>
                         </a:rPr>
                         <a:t>RF
 PR</a:t>
@@ -4959,11 +4959,11 @@
                     <a:p>
                       <a:pPr algn="ctr"/>
                       <a:r>
-                        <a:rPr sz="1200" b="1">
+                        <a:rPr sz="1200" b="1" dirty="0">
                           <a:solidFill>
                             <a:srgbClr val="FFFFFF"/>
                           </a:solidFill>
-                          <a:latin typeface="Calibri"/>
+                          <a:latin typeface="Arial"/>
                         </a:rPr>
                         <a:t>XGB
 PR</a:t>
@@ -4985,11 +4985,11 @@
                     <a:p>
                       <a:pPr algn="l"/>
                       <a:r>
-                        <a:rPr sz="1200" b="0">
-                          <a:solidFill>
-                            <a:srgbClr val="142B4D"/>
-                          </a:solidFill>
-                          <a:latin typeface="Calibri"/>
+                        <a:rPr sz="1200" b="0" dirty="0">
+                          <a:solidFill>
+                            <a:srgbClr val="142B4D"/>
+                          </a:solidFill>
+                          <a:latin typeface="Arial"/>
                         </a:rPr>
                         <a:t>NR-AR</a:t>
                       </a:r>
@@ -5008,11 +5008,11 @@
                     <a:p>
                       <a:pPr algn="ctr"/>
                       <a:r>
-                        <a:rPr sz="1200" b="0">
-                          <a:solidFill>
-                            <a:srgbClr val="142B4D"/>
-                          </a:solidFill>
-                          <a:latin typeface="Calibri"/>
+                        <a:rPr sz="1200" b="0" dirty="0">
+                          <a:solidFill>
+                            <a:srgbClr val="142B4D"/>
+                          </a:solidFill>
+                          <a:latin typeface="Arial"/>
                         </a:rPr>
                         <a:t>0.691</a:t>
                       </a:r>
@@ -5031,11 +5031,11 @@
                     <a:p>
                       <a:pPr algn="ctr"/>
                       <a:r>
-                        <a:rPr sz="1200" b="1">
-                          <a:solidFill>
-                            <a:srgbClr val="142B4D"/>
-                          </a:solidFill>
-                          <a:latin typeface="Calibri"/>
+                        <a:rPr sz="1200" b="1" dirty="0">
+                          <a:solidFill>
+                            <a:srgbClr val="142B4D"/>
+                          </a:solidFill>
+                          <a:latin typeface="Arial"/>
                         </a:rPr>
                         <a:t>0.764</a:t>
                       </a:r>
@@ -5043,6 +5043,29 @@
                   </a:txBody>
                   <a:tcPr marL="54864" marR="54864" marT="18288" marB="18288" anchor="ctr">
                     <a:solidFill>
+                      <a:srgbClr val="D8EFEA"/>
+                    </a:solidFill>
+                  </a:tcPr>
+                </a:tc>
+                <a:tc>
+                  <a:txBody>
+                    <a:bodyPr wrap="square"/>
+                    <a:lstStyle/>
+                    <a:p>
+                      <a:pPr algn="ctr"/>
+                      <a:r>
+                        <a:rPr sz="1200" b="0" dirty="0">
+                          <a:solidFill>
+                            <a:srgbClr val="142B4D"/>
+                          </a:solidFill>
+                          <a:latin typeface="Arial"/>
+                        </a:rPr>
+                        <a:t>0.723</a:t>
+                      </a:r>
+                    </a:p>
+                  </a:txBody>
+                  <a:tcPr marL="54864" marR="54864" marT="18288" marB="18288" anchor="ctr">
+                    <a:solidFill>
                       <a:srgbClr val="EAF3F5"/>
                     </a:solidFill>
                   </a:tcPr>
@@ -5054,13 +5077,13 @@
                     <a:p>
                       <a:pPr algn="ctr"/>
                       <a:r>
-                        <a:rPr sz="1200" b="0">
-                          <a:solidFill>
-                            <a:srgbClr val="142B4D"/>
-                          </a:solidFill>
-                          <a:latin typeface="Calibri"/>
-                        </a:rPr>
-                        <a:t>0.723</a:t>
+                        <a:rPr sz="1200" b="0" dirty="0">
+                          <a:solidFill>
+                            <a:srgbClr val="142B4D"/>
+                          </a:solidFill>
+                          <a:latin typeface="Arial"/>
+                        </a:rPr>
+                        <a:t>0.374</a:t>
                       </a:r>
                     </a:p>
                   </a:txBody>
@@ -5077,13 +5100,13 @@
                     <a:p>
                       <a:pPr algn="ctr"/>
                       <a:r>
-                        <a:rPr sz="1200" b="0">
-                          <a:solidFill>
-                            <a:srgbClr val="142B4D"/>
-                          </a:solidFill>
-                          <a:latin typeface="Calibri"/>
-                        </a:rPr>
-                        <a:t>0.374</a:t>
+                        <a:rPr sz="1200" b="0" dirty="0">
+                          <a:solidFill>
+                            <a:srgbClr val="142B4D"/>
+                          </a:solidFill>
+                          <a:latin typeface="Arial"/>
+                        </a:rPr>
+                        <a:t>0.456</a:t>
                       </a:r>
                     </a:p>
                   </a:txBody>
@@ -5100,34 +5123,11 @@
                     <a:p>
                       <a:pPr algn="ctr"/>
                       <a:r>
-                        <a:rPr sz="1200" b="0">
-                          <a:solidFill>
-                            <a:srgbClr val="142B4D"/>
-                          </a:solidFill>
-                          <a:latin typeface="Calibri"/>
-                        </a:rPr>
-                        <a:t>0.456</a:t>
-                      </a:r>
-                    </a:p>
-                  </a:txBody>
-                  <a:tcPr marL="54864" marR="54864" marT="18288" marB="18288" anchor="ctr">
-                    <a:solidFill>
-                      <a:srgbClr val="EAF3F5"/>
-                    </a:solidFill>
-                  </a:tcPr>
-                </a:tc>
-                <a:tc>
-                  <a:txBody>
-                    <a:bodyPr wrap="square"/>
-                    <a:lstStyle/>
-                    <a:p>
-                      <a:pPr algn="ctr"/>
-                      <a:r>
-                        <a:rPr sz="1200" b="1">
-                          <a:solidFill>
-                            <a:srgbClr val="142B4D"/>
-                          </a:solidFill>
-                          <a:latin typeface="Calibri"/>
+                        <a:rPr sz="1200" b="1" dirty="0">
+                          <a:solidFill>
+                            <a:srgbClr val="142B4D"/>
+                          </a:solidFill>
+                          <a:latin typeface="Arial"/>
                         </a:rPr>
                         <a:t>0.464</a:t>
                       </a:r>
@@ -5135,7 +5135,7 @@
                   </a:txBody>
                   <a:tcPr marL="54864" marR="54864" marT="18288" marB="18288" anchor="ctr">
                     <a:solidFill>
-                      <a:srgbClr val="EAF3F5"/>
+                      <a:srgbClr val="D8EFEA"/>
                     </a:solidFill>
                   </a:tcPr>
                 </a:tc>
@@ -5148,11 +5148,11 @@
                     <a:p>
                       <a:pPr algn="l"/>
                       <a:r>
-                        <a:rPr sz="1200" b="0">
-                          <a:solidFill>
-                            <a:srgbClr val="142B4D"/>
-                          </a:solidFill>
-                          <a:latin typeface="Calibri"/>
+                        <a:rPr sz="1200" b="0" dirty="0">
+                          <a:solidFill>
+                            <a:srgbClr val="142B4D"/>
+                          </a:solidFill>
+                          <a:latin typeface="Arial"/>
                         </a:rPr>
                         <a:t>NR-AR-LBD</a:t>
                       </a:r>
@@ -5171,11 +5171,11 @@
                     <a:p>
                       <a:pPr algn="ctr"/>
                       <a:r>
-                        <a:rPr sz="1200" b="0">
-                          <a:solidFill>
-                            <a:srgbClr val="142B4D"/>
-                          </a:solidFill>
-                          <a:latin typeface="Calibri"/>
+                        <a:rPr sz="1200" b="0" dirty="0">
+                          <a:solidFill>
+                            <a:srgbClr val="142B4D"/>
+                          </a:solidFill>
+                          <a:latin typeface="Arial"/>
                         </a:rPr>
                         <a:t>0.775</a:t>
                       </a:r>
@@ -5194,11 +5194,11 @@
                     <a:p>
                       <a:pPr algn="ctr"/>
                       <a:r>
-                        <a:rPr sz="1200" b="0">
-                          <a:solidFill>
-                            <a:srgbClr val="142B4D"/>
-                          </a:solidFill>
-                          <a:latin typeface="Calibri"/>
+                        <a:rPr sz="1200" b="0" dirty="0">
+                          <a:solidFill>
+                            <a:srgbClr val="142B4D"/>
+                          </a:solidFill>
+                          <a:latin typeface="Arial"/>
                         </a:rPr>
                         <a:t>0.838</a:t>
                       </a:r>
@@ -5217,11 +5217,11 @@
                     <a:p>
                       <a:pPr algn="ctr"/>
                       <a:r>
-                        <a:rPr sz="1200" b="1">
-                          <a:solidFill>
-                            <a:srgbClr val="142B4D"/>
-                          </a:solidFill>
-                          <a:latin typeface="Calibri"/>
+                        <a:rPr sz="1200" b="1" dirty="0">
+                          <a:solidFill>
+                            <a:srgbClr val="142B4D"/>
+                          </a:solidFill>
+                          <a:latin typeface="Arial"/>
                         </a:rPr>
                         <a:t>0.857</a:t>
                       </a:r>
@@ -5229,6 +5229,29 @@
                   </a:txBody>
                   <a:tcPr marL="54864" marR="54864" marT="18288" marB="18288" anchor="ctr">
                     <a:solidFill>
+                      <a:srgbClr val="D8EFEA"/>
+                    </a:solidFill>
+                  </a:tcPr>
+                </a:tc>
+                <a:tc>
+                  <a:txBody>
+                    <a:bodyPr wrap="square"/>
+                    <a:lstStyle/>
+                    <a:p>
+                      <a:pPr algn="ctr"/>
+                      <a:r>
+                        <a:rPr sz="1200" b="0" dirty="0">
+                          <a:solidFill>
+                            <a:srgbClr val="142B4D"/>
+                          </a:solidFill>
+                          <a:latin typeface="Arial"/>
+                        </a:rPr>
+                        <a:t>0.342</a:t>
+                      </a:r>
+                    </a:p>
+                  </a:txBody>
+                  <a:tcPr marL="54864" marR="54864" marT="18288" marB="18288" anchor="ctr">
+                    <a:solidFill>
                       <a:srgbClr val="FFFFFF"/>
                     </a:solidFill>
                   </a:tcPr>
@@ -5240,34 +5263,11 @@
                     <a:p>
                       <a:pPr algn="ctr"/>
                       <a:r>
-                        <a:rPr sz="1200" b="0">
-                          <a:solidFill>
-                            <a:srgbClr val="142B4D"/>
-                          </a:solidFill>
-                          <a:latin typeface="Calibri"/>
-                        </a:rPr>
-                        <a:t>0.342</a:t>
-                      </a:r>
-                    </a:p>
-                  </a:txBody>
-                  <a:tcPr marL="54864" marR="54864" marT="18288" marB="18288" anchor="ctr">
-                    <a:solidFill>
-                      <a:srgbClr val="FFFFFF"/>
-                    </a:solidFill>
-                  </a:tcPr>
-                </a:tc>
-                <a:tc>
-                  <a:txBody>
-                    <a:bodyPr wrap="square"/>
-                    <a:lstStyle/>
-                    <a:p>
-                      <a:pPr algn="ctr"/>
-                      <a:r>
-                        <a:rPr sz="1200" b="1">
-                          <a:solidFill>
-                            <a:srgbClr val="142B4D"/>
-                          </a:solidFill>
-                          <a:latin typeface="Calibri"/>
+                        <a:rPr sz="1200" b="1" dirty="0">
+                          <a:solidFill>
+                            <a:srgbClr val="142B4D"/>
+                          </a:solidFill>
+                          <a:latin typeface="Arial"/>
                         </a:rPr>
                         <a:t>0.446</a:t>
                       </a:r>
@@ -5275,22 +5275,22 @@
                   </a:txBody>
                   <a:tcPr marL="54864" marR="54864" marT="18288" marB="18288" anchor="ctr">
                     <a:solidFill>
-                      <a:srgbClr val="FFFFFF"/>
-                    </a:solidFill>
-                  </a:tcPr>
-                </a:tc>
-                <a:tc>
-                  <a:txBody>
-                    <a:bodyPr wrap="square"/>
-                    <a:lstStyle/>
-                    <a:p>
-                      <a:pPr algn="ctr"/>
-                      <a:r>
-                        <a:rPr sz="1200" b="0">
-                          <a:solidFill>
-                            <a:srgbClr val="142B4D"/>
-                          </a:solidFill>
-                          <a:latin typeface="Calibri"/>
+                      <a:srgbClr val="D8EFEA"/>
+                    </a:solidFill>
+                  </a:tcPr>
+                </a:tc>
+                <a:tc>
+                  <a:txBody>
+                    <a:bodyPr wrap="square"/>
+                    <a:lstStyle/>
+                    <a:p>
+                      <a:pPr algn="ctr"/>
+                      <a:r>
+                        <a:rPr sz="1200" b="0" dirty="0">
+                          <a:solidFill>
+                            <a:srgbClr val="142B4D"/>
+                          </a:solidFill>
+                          <a:latin typeface="Arial"/>
                         </a:rPr>
                         <a:t>0.442</a:t>
                       </a:r>
@@ -5311,11 +5311,11 @@
                     <a:p>
                       <a:pPr algn="l"/>
                       <a:r>
-                        <a:rPr sz="1200" b="0">
-                          <a:solidFill>
-                            <a:srgbClr val="142B4D"/>
-                          </a:solidFill>
-                          <a:latin typeface="Calibri"/>
+                        <a:rPr sz="1200" b="0" dirty="0">
+                          <a:solidFill>
+                            <a:srgbClr val="142B4D"/>
+                          </a:solidFill>
+                          <a:latin typeface="Arial"/>
                         </a:rPr>
                         <a:t>NR-AhR</a:t>
                       </a:r>
@@ -5334,11 +5334,11 @@
                     <a:p>
                       <a:pPr algn="ctr"/>
                       <a:r>
-                        <a:rPr sz="1200" b="0">
-                          <a:solidFill>
-                            <a:srgbClr val="142B4D"/>
-                          </a:solidFill>
-                          <a:latin typeface="Calibri"/>
+                        <a:rPr sz="1200" b="0" dirty="0">
+                          <a:solidFill>
+                            <a:srgbClr val="142B4D"/>
+                          </a:solidFill>
+                          <a:latin typeface="Arial"/>
                         </a:rPr>
                         <a:t>0.806</a:t>
                       </a:r>
@@ -5357,11 +5357,11 @@
                     <a:p>
                       <a:pPr algn="ctr"/>
                       <a:r>
-                        <a:rPr sz="1200" b="1">
-                          <a:solidFill>
-                            <a:srgbClr val="142B4D"/>
-                          </a:solidFill>
-                          <a:latin typeface="Calibri"/>
+                        <a:rPr sz="1200" b="1" dirty="0">
+                          <a:solidFill>
+                            <a:srgbClr val="142B4D"/>
+                          </a:solidFill>
+                          <a:latin typeface="Arial"/>
                         </a:rPr>
                         <a:t>0.841</a:t>
                       </a:r>
@@ -5369,6 +5369,29 @@
                   </a:txBody>
                   <a:tcPr marL="54864" marR="54864" marT="18288" marB="18288" anchor="ctr">
                     <a:solidFill>
+                      <a:srgbClr val="D8EFEA"/>
+                    </a:solidFill>
+                  </a:tcPr>
+                </a:tc>
+                <a:tc>
+                  <a:txBody>
+                    <a:bodyPr wrap="square"/>
+                    <a:lstStyle/>
+                    <a:p>
+                      <a:pPr algn="ctr"/>
+                      <a:r>
+                        <a:rPr sz="1200" b="0" dirty="0">
+                          <a:solidFill>
+                            <a:srgbClr val="142B4D"/>
+                          </a:solidFill>
+                          <a:latin typeface="Arial"/>
+                        </a:rPr>
+                        <a:t>0.833</a:t>
+                      </a:r>
+                    </a:p>
+                  </a:txBody>
+                  <a:tcPr marL="54864" marR="54864" marT="18288" marB="18288" anchor="ctr">
+                    <a:solidFill>
                       <a:srgbClr val="EAF3F5"/>
                     </a:solidFill>
                   </a:tcPr>
@@ -5380,13 +5403,13 @@
                     <a:p>
                       <a:pPr algn="ctr"/>
                       <a:r>
-                        <a:rPr sz="1200" b="0">
-                          <a:solidFill>
-                            <a:srgbClr val="142B4D"/>
-                          </a:solidFill>
-                          <a:latin typeface="Calibri"/>
-                        </a:rPr>
-                        <a:t>0.833</a:t>
+                        <a:rPr sz="1200" b="0" dirty="0">
+                          <a:solidFill>
+                            <a:srgbClr val="142B4D"/>
+                          </a:solidFill>
+                          <a:latin typeface="Arial"/>
+                        </a:rPr>
+                        <a:t>0.445</a:t>
                       </a:r>
                     </a:p>
                   </a:txBody>
@@ -5403,34 +5426,11 @@
                     <a:p>
                       <a:pPr algn="ctr"/>
                       <a:r>
-                        <a:rPr sz="1200" b="0">
-                          <a:solidFill>
-                            <a:srgbClr val="142B4D"/>
-                          </a:solidFill>
-                          <a:latin typeface="Calibri"/>
-                        </a:rPr>
-                        <a:t>0.445</a:t>
-                      </a:r>
-                    </a:p>
-                  </a:txBody>
-                  <a:tcPr marL="54864" marR="54864" marT="18288" marB="18288" anchor="ctr">
-                    <a:solidFill>
-                      <a:srgbClr val="EAF3F5"/>
-                    </a:solidFill>
-                  </a:tcPr>
-                </a:tc>
-                <a:tc>
-                  <a:txBody>
-                    <a:bodyPr wrap="square"/>
-                    <a:lstStyle/>
-                    <a:p>
-                      <a:pPr algn="ctr"/>
-                      <a:r>
-                        <a:rPr sz="1200" b="1">
-                          <a:solidFill>
-                            <a:srgbClr val="142B4D"/>
-                          </a:solidFill>
-                          <a:latin typeface="Calibri"/>
+                        <a:rPr sz="1200" b="1" dirty="0">
+                          <a:solidFill>
+                            <a:srgbClr val="142B4D"/>
+                          </a:solidFill>
+                          <a:latin typeface="Arial"/>
                         </a:rPr>
                         <a:t>0.596</a:t>
                       </a:r>
@@ -5438,22 +5438,22 @@
                   </a:txBody>
                   <a:tcPr marL="54864" marR="54864" marT="18288" marB="18288" anchor="ctr">
                     <a:solidFill>
-                      <a:srgbClr val="EAF3F5"/>
-                    </a:solidFill>
-                  </a:tcPr>
-                </a:tc>
-                <a:tc>
-                  <a:txBody>
-                    <a:bodyPr wrap="square"/>
-                    <a:lstStyle/>
-                    <a:p>
-                      <a:pPr algn="ctr"/>
-                      <a:r>
-                        <a:rPr sz="1200" b="0">
-                          <a:solidFill>
-                            <a:srgbClr val="142B4D"/>
-                          </a:solidFill>
-                          <a:latin typeface="Calibri"/>
+                      <a:srgbClr val="D8EFEA"/>
+                    </a:solidFill>
+                  </a:tcPr>
+                </a:tc>
+                <a:tc>
+                  <a:txBody>
+                    <a:bodyPr wrap="square"/>
+                    <a:lstStyle/>
+                    <a:p>
+                      <a:pPr algn="ctr"/>
+                      <a:r>
+                        <a:rPr sz="1200" b="0" dirty="0">
+                          <a:solidFill>
+                            <a:srgbClr val="142B4D"/>
+                          </a:solidFill>
+                          <a:latin typeface="Arial"/>
                         </a:rPr>
                         <a:t>0.574</a:t>
                       </a:r>
@@ -5474,11 +5474,11 @@
                     <a:p>
                       <a:pPr algn="l"/>
                       <a:r>
-                        <a:rPr sz="1200" b="0">
-                          <a:solidFill>
-                            <a:srgbClr val="142B4D"/>
-                          </a:solidFill>
-                          <a:latin typeface="Calibri"/>
+                        <a:rPr sz="1200" b="0" dirty="0">
+                          <a:solidFill>
+                            <a:srgbClr val="142B4D"/>
+                          </a:solidFill>
+                          <a:latin typeface="Arial"/>
                         </a:rPr>
                         <a:t>NR-Aromatase</a:t>
                       </a:r>
@@ -5497,11 +5497,11 @@
                     <a:p>
                       <a:pPr algn="ctr"/>
                       <a:r>
-                        <a:rPr sz="1200" b="0">
-                          <a:solidFill>
-                            <a:srgbClr val="142B4D"/>
-                          </a:solidFill>
-                          <a:latin typeface="Calibri"/>
+                        <a:rPr sz="1200" b="0" dirty="0">
+                          <a:solidFill>
+                            <a:srgbClr val="142B4D"/>
+                          </a:solidFill>
+                          <a:latin typeface="Arial"/>
                         </a:rPr>
                         <a:t>0.695</a:t>
                       </a:r>
@@ -5520,11 +5520,11 @@
                     <a:p>
                       <a:pPr algn="ctr"/>
                       <a:r>
-                        <a:rPr sz="1200" b="1">
-                          <a:solidFill>
-                            <a:srgbClr val="142B4D"/>
-                          </a:solidFill>
-                          <a:latin typeface="Calibri"/>
+                        <a:rPr sz="1200" b="1" dirty="0">
+                          <a:solidFill>
+                            <a:srgbClr val="142B4D"/>
+                          </a:solidFill>
+                          <a:latin typeface="Arial"/>
                         </a:rPr>
                         <a:t>0.751</a:t>
                       </a:r>
@@ -5532,6 +5532,29 @@
                   </a:txBody>
                   <a:tcPr marL="54864" marR="54864" marT="18288" marB="18288" anchor="ctr">
                     <a:solidFill>
+                      <a:srgbClr val="D8EFEA"/>
+                    </a:solidFill>
+                  </a:tcPr>
+                </a:tc>
+                <a:tc>
+                  <a:txBody>
+                    <a:bodyPr wrap="square"/>
+                    <a:lstStyle/>
+                    <a:p>
+                      <a:pPr algn="ctr"/>
+                      <a:r>
+                        <a:rPr sz="1200" b="0" dirty="0">
+                          <a:solidFill>
+                            <a:srgbClr val="142B4D"/>
+                          </a:solidFill>
+                          <a:latin typeface="Arial"/>
+                        </a:rPr>
+                        <a:t>0.728</a:t>
+                      </a:r>
+                    </a:p>
+                  </a:txBody>
+                  <a:tcPr marL="54864" marR="54864" marT="18288" marB="18288" anchor="ctr">
+                    <a:solidFill>
                       <a:srgbClr val="FFFFFF"/>
                     </a:solidFill>
                   </a:tcPr>
@@ -5543,13 +5566,13 @@
                     <a:p>
                       <a:pPr algn="ctr"/>
                       <a:r>
-                        <a:rPr sz="1200" b="0">
-                          <a:solidFill>
-                            <a:srgbClr val="142B4D"/>
-                          </a:solidFill>
-                          <a:latin typeface="Calibri"/>
-                        </a:rPr>
-                        <a:t>0.728</a:t>
+                        <a:rPr sz="1200" b="0" dirty="0">
+                          <a:solidFill>
+                            <a:srgbClr val="142B4D"/>
+                          </a:solidFill>
+                          <a:latin typeface="Arial"/>
+                        </a:rPr>
+                        <a:t>0.216</a:t>
                       </a:r>
                     </a:p>
                   </a:txBody>
@@ -5566,34 +5589,11 @@
                     <a:p>
                       <a:pPr algn="ctr"/>
                       <a:r>
-                        <a:rPr sz="1200" b="0">
-                          <a:solidFill>
-                            <a:srgbClr val="142B4D"/>
-                          </a:solidFill>
-                          <a:latin typeface="Calibri"/>
-                        </a:rPr>
-                        <a:t>0.216</a:t>
-                      </a:r>
-                    </a:p>
-                  </a:txBody>
-                  <a:tcPr marL="54864" marR="54864" marT="18288" marB="18288" anchor="ctr">
-                    <a:solidFill>
-                      <a:srgbClr val="FFFFFF"/>
-                    </a:solidFill>
-                  </a:tcPr>
-                </a:tc>
-                <a:tc>
-                  <a:txBody>
-                    <a:bodyPr wrap="square"/>
-                    <a:lstStyle/>
-                    <a:p>
-                      <a:pPr algn="ctr"/>
-                      <a:r>
-                        <a:rPr sz="1200" b="1">
-                          <a:solidFill>
-                            <a:srgbClr val="142B4D"/>
-                          </a:solidFill>
-                          <a:latin typeface="Calibri"/>
+                        <a:rPr sz="1200" b="1" dirty="0">
+                          <a:solidFill>
+                            <a:srgbClr val="142B4D"/>
+                          </a:solidFill>
+                          <a:latin typeface="Arial"/>
                         </a:rPr>
                         <a:t>0.367</a:t>
                       </a:r>
@@ -5601,22 +5601,22 @@
                   </a:txBody>
                   <a:tcPr marL="54864" marR="54864" marT="18288" marB="18288" anchor="ctr">
                     <a:solidFill>
-                      <a:srgbClr val="FFFFFF"/>
-                    </a:solidFill>
-                  </a:tcPr>
-                </a:tc>
-                <a:tc>
-                  <a:txBody>
-                    <a:bodyPr wrap="square"/>
-                    <a:lstStyle/>
-                    <a:p>
-                      <a:pPr algn="ctr"/>
-                      <a:r>
-                        <a:rPr sz="1200" b="0">
-                          <a:solidFill>
-                            <a:srgbClr val="142B4D"/>
-                          </a:solidFill>
-                          <a:latin typeface="Calibri"/>
+                      <a:srgbClr val="D8EFEA"/>
+                    </a:solidFill>
+                  </a:tcPr>
+                </a:tc>
+                <a:tc>
+                  <a:txBody>
+                    <a:bodyPr wrap="square"/>
+                    <a:lstStyle/>
+                    <a:p>
+                      <a:pPr algn="ctr"/>
+                      <a:r>
+                        <a:rPr sz="1200" b="0" dirty="0">
+                          <a:solidFill>
+                            <a:srgbClr val="142B4D"/>
+                          </a:solidFill>
+                          <a:latin typeface="Arial"/>
                         </a:rPr>
                         <a:t>0.362</a:t>
                       </a:r>
@@ -5637,11 +5637,11 @@
                     <a:p>
                       <a:pPr algn="l"/>
                       <a:r>
-                        <a:rPr sz="1200" b="0">
-                          <a:solidFill>
-                            <a:srgbClr val="142B4D"/>
-                          </a:solidFill>
-                          <a:latin typeface="Calibri"/>
+                        <a:rPr sz="1200" b="0" dirty="0">
+                          <a:solidFill>
+                            <a:srgbClr val="142B4D"/>
+                          </a:solidFill>
+                          <a:latin typeface="Arial"/>
                         </a:rPr>
                         <a:t>NR-ER</a:t>
                       </a:r>
@@ -5660,11 +5660,11 @@
                     <a:p>
                       <a:pPr algn="ctr"/>
                       <a:r>
-                        <a:rPr sz="1200" b="0">
-                          <a:solidFill>
-                            <a:srgbClr val="142B4D"/>
-                          </a:solidFill>
-                          <a:latin typeface="Calibri"/>
+                        <a:rPr sz="1200" b="0" dirty="0">
+                          <a:solidFill>
+                            <a:srgbClr val="142B4D"/>
+                          </a:solidFill>
+                          <a:latin typeface="Arial"/>
                         </a:rPr>
                         <a:t>0.631</a:t>
                       </a:r>
@@ -5683,11 +5683,11 @@
                     <a:p>
                       <a:pPr algn="ctr"/>
                       <a:r>
-                        <a:rPr sz="1200" b="1">
-                          <a:solidFill>
-                            <a:srgbClr val="142B4D"/>
-                          </a:solidFill>
-                          <a:latin typeface="Calibri"/>
+                        <a:rPr sz="1200" b="1" dirty="0">
+                          <a:solidFill>
+                            <a:srgbClr val="142B4D"/>
+                          </a:solidFill>
+                          <a:latin typeface="Arial"/>
                         </a:rPr>
                         <a:t>0.685</a:t>
                       </a:r>
@@ -5695,6 +5695,29 @@
                   </a:txBody>
                   <a:tcPr marL="54864" marR="54864" marT="18288" marB="18288" anchor="ctr">
                     <a:solidFill>
+                      <a:srgbClr val="D8EFEA"/>
+                    </a:solidFill>
+                  </a:tcPr>
+                </a:tc>
+                <a:tc>
+                  <a:txBody>
+                    <a:bodyPr wrap="square"/>
+                    <a:lstStyle/>
+                    <a:p>
+                      <a:pPr algn="ctr"/>
+                      <a:r>
+                        <a:rPr sz="1200" b="0" dirty="0">
+                          <a:solidFill>
+                            <a:srgbClr val="142B4D"/>
+                          </a:solidFill>
+                          <a:latin typeface="Arial"/>
+                        </a:rPr>
+                        <a:t>0.674</a:t>
+                      </a:r>
+                    </a:p>
+                  </a:txBody>
+                  <a:tcPr marL="54864" marR="54864" marT="18288" marB="18288" anchor="ctr">
+                    <a:solidFill>
                       <a:srgbClr val="EAF3F5"/>
                     </a:solidFill>
                   </a:tcPr>
@@ -5706,13 +5729,13 @@
                     <a:p>
                       <a:pPr algn="ctr"/>
                       <a:r>
-                        <a:rPr sz="1200" b="0">
-                          <a:solidFill>
-                            <a:srgbClr val="142B4D"/>
-                          </a:solidFill>
-                          <a:latin typeface="Calibri"/>
-                        </a:rPr>
-                        <a:t>0.674</a:t>
+                        <a:rPr sz="1200" b="0" dirty="0">
+                          <a:solidFill>
+                            <a:srgbClr val="142B4D"/>
+                          </a:solidFill>
+                          <a:latin typeface="Arial"/>
+                        </a:rPr>
+                        <a:t>0.270</a:t>
                       </a:r>
                     </a:p>
                   </a:txBody>
@@ -5729,34 +5752,11 @@
                     <a:p>
                       <a:pPr algn="ctr"/>
                       <a:r>
-                        <a:rPr sz="1200" b="0">
-                          <a:solidFill>
-                            <a:srgbClr val="142B4D"/>
-                          </a:solidFill>
-                          <a:latin typeface="Calibri"/>
-                        </a:rPr>
-                        <a:t>0.270</a:t>
-                      </a:r>
-                    </a:p>
-                  </a:txBody>
-                  <a:tcPr marL="54864" marR="54864" marT="18288" marB="18288" anchor="ctr">
-                    <a:solidFill>
-                      <a:srgbClr val="EAF3F5"/>
-                    </a:solidFill>
-                  </a:tcPr>
-                </a:tc>
-                <a:tc>
-                  <a:txBody>
-                    <a:bodyPr wrap="square"/>
-                    <a:lstStyle/>
-                    <a:p>
-                      <a:pPr algn="ctr"/>
-                      <a:r>
-                        <a:rPr sz="1200" b="1">
-                          <a:solidFill>
-                            <a:srgbClr val="142B4D"/>
-                          </a:solidFill>
-                          <a:latin typeface="Calibri"/>
+                        <a:rPr sz="1200" b="1" dirty="0">
+                          <a:solidFill>
+                            <a:srgbClr val="142B4D"/>
+                          </a:solidFill>
+                          <a:latin typeface="Arial"/>
                         </a:rPr>
                         <a:t>0.407</a:t>
                       </a:r>
@@ -5764,22 +5764,22 @@
                   </a:txBody>
                   <a:tcPr marL="54864" marR="54864" marT="18288" marB="18288" anchor="ctr">
                     <a:solidFill>
-                      <a:srgbClr val="EAF3F5"/>
-                    </a:solidFill>
-                  </a:tcPr>
-                </a:tc>
-                <a:tc>
-                  <a:txBody>
-                    <a:bodyPr wrap="square"/>
-                    <a:lstStyle/>
-                    <a:p>
-                      <a:pPr algn="ctr"/>
-                      <a:r>
-                        <a:rPr sz="1200" b="0">
-                          <a:solidFill>
-                            <a:srgbClr val="142B4D"/>
-                          </a:solidFill>
-                          <a:latin typeface="Calibri"/>
+                      <a:srgbClr val="D8EFEA"/>
+                    </a:solidFill>
+                  </a:tcPr>
+                </a:tc>
+                <a:tc>
+                  <a:txBody>
+                    <a:bodyPr wrap="square"/>
+                    <a:lstStyle/>
+                    <a:p>
+                      <a:pPr algn="ctr"/>
+                      <a:r>
+                        <a:rPr sz="1200" b="0" dirty="0">
+                          <a:solidFill>
+                            <a:srgbClr val="142B4D"/>
+                          </a:solidFill>
+                          <a:latin typeface="Arial"/>
                         </a:rPr>
                         <a:t>0.404</a:t>
                       </a:r>
@@ -5800,11 +5800,11 @@
                     <a:p>
                       <a:pPr algn="l"/>
                       <a:r>
-                        <a:rPr sz="1200" b="0">
-                          <a:solidFill>
-                            <a:srgbClr val="142B4D"/>
-                          </a:solidFill>
-                          <a:latin typeface="Calibri"/>
+                        <a:rPr sz="1200" b="0" dirty="0">
+                          <a:solidFill>
+                            <a:srgbClr val="142B4D"/>
+                          </a:solidFill>
+                          <a:latin typeface="Arial"/>
                         </a:rPr>
                         <a:t>NR-ER-LBD</a:t>
                       </a:r>
@@ -5823,11 +5823,11 @@
                     <a:p>
                       <a:pPr algn="ctr"/>
                       <a:r>
-                        <a:rPr sz="1200" b="0">
-                          <a:solidFill>
-                            <a:srgbClr val="142B4D"/>
-                          </a:solidFill>
-                          <a:latin typeface="Calibri"/>
+                        <a:rPr sz="1200" b="0" dirty="0">
+                          <a:solidFill>
+                            <a:srgbClr val="142B4D"/>
+                          </a:solidFill>
+                          <a:latin typeface="Arial"/>
                         </a:rPr>
                         <a:t>0.705</a:t>
                       </a:r>
@@ -5846,11 +5846,11 @@
                     <a:p>
                       <a:pPr algn="ctr"/>
                       <a:r>
-                        <a:rPr sz="1200" b="1">
-                          <a:solidFill>
-                            <a:srgbClr val="142B4D"/>
-                          </a:solidFill>
-                          <a:latin typeface="Calibri"/>
+                        <a:rPr sz="1200" b="1" dirty="0">
+                          <a:solidFill>
+                            <a:srgbClr val="142B4D"/>
+                          </a:solidFill>
+                          <a:latin typeface="Arial"/>
                         </a:rPr>
                         <a:t>0.742</a:t>
                       </a:r>
@@ -5858,6 +5858,29 @@
                   </a:txBody>
                   <a:tcPr marL="54864" marR="54864" marT="18288" marB="18288" anchor="ctr">
                     <a:solidFill>
+                      <a:srgbClr val="D8EFEA"/>
+                    </a:solidFill>
+                  </a:tcPr>
+                </a:tc>
+                <a:tc>
+                  <a:txBody>
+                    <a:bodyPr wrap="square"/>
+                    <a:lstStyle/>
+                    <a:p>
+                      <a:pPr algn="ctr"/>
+                      <a:r>
+                        <a:rPr sz="1200" b="0" dirty="0">
+                          <a:solidFill>
+                            <a:srgbClr val="142B4D"/>
+                          </a:solidFill>
+                          <a:latin typeface="Arial"/>
+                        </a:rPr>
+                        <a:t>0.664</a:t>
+                      </a:r>
+                    </a:p>
+                  </a:txBody>
+                  <a:tcPr marL="54864" marR="54864" marT="18288" marB="18288" anchor="ctr">
+                    <a:solidFill>
                       <a:srgbClr val="FFFFFF"/>
                     </a:solidFill>
                   </a:tcPr>
@@ -5869,13 +5892,13 @@
                     <a:p>
                       <a:pPr algn="ctr"/>
                       <a:r>
-                        <a:rPr sz="1200" b="0">
-                          <a:solidFill>
-                            <a:srgbClr val="142B4D"/>
-                          </a:solidFill>
-                          <a:latin typeface="Calibri"/>
-                        </a:rPr>
-                        <a:t>0.664</a:t>
+                        <a:rPr sz="1200" b="0" dirty="0">
+                          <a:solidFill>
+                            <a:srgbClr val="142B4D"/>
+                          </a:solidFill>
+                          <a:latin typeface="Arial"/>
+                        </a:rPr>
+                        <a:t>0.246</a:t>
                       </a:r>
                     </a:p>
                   </a:txBody>
@@ -5892,34 +5915,11 @@
                     <a:p>
                       <a:pPr algn="ctr"/>
                       <a:r>
-                        <a:rPr sz="1200" b="0">
-                          <a:solidFill>
-                            <a:srgbClr val="142B4D"/>
-                          </a:solidFill>
-                          <a:latin typeface="Calibri"/>
-                        </a:rPr>
-                        <a:t>0.246</a:t>
-                      </a:r>
-                    </a:p>
-                  </a:txBody>
-                  <a:tcPr marL="54864" marR="54864" marT="18288" marB="18288" anchor="ctr">
-                    <a:solidFill>
-                      <a:srgbClr val="FFFFFF"/>
-                    </a:solidFill>
-                  </a:tcPr>
-                </a:tc>
-                <a:tc>
-                  <a:txBody>
-                    <a:bodyPr wrap="square"/>
-                    <a:lstStyle/>
-                    <a:p>
-                      <a:pPr algn="ctr"/>
-                      <a:r>
-                        <a:rPr sz="1200" b="1">
-                          <a:solidFill>
-                            <a:srgbClr val="142B4D"/>
-                          </a:solidFill>
-                          <a:latin typeface="Calibri"/>
+                        <a:rPr sz="1200" b="1" dirty="0">
+                          <a:solidFill>
+                            <a:srgbClr val="142B4D"/>
+                          </a:solidFill>
+                          <a:latin typeface="Arial"/>
                         </a:rPr>
                         <a:t>0.310</a:t>
                       </a:r>
@@ -5927,22 +5927,22 @@
                   </a:txBody>
                   <a:tcPr marL="54864" marR="54864" marT="18288" marB="18288" anchor="ctr">
                     <a:solidFill>
-                      <a:srgbClr val="FFFFFF"/>
-                    </a:solidFill>
-                  </a:tcPr>
-                </a:tc>
-                <a:tc>
-                  <a:txBody>
-                    <a:bodyPr wrap="square"/>
-                    <a:lstStyle/>
-                    <a:p>
-                      <a:pPr algn="ctr"/>
-                      <a:r>
-                        <a:rPr sz="1200" b="0">
-                          <a:solidFill>
-                            <a:srgbClr val="142B4D"/>
-                          </a:solidFill>
-                          <a:latin typeface="Calibri"/>
+                      <a:srgbClr val="D8EFEA"/>
+                    </a:solidFill>
+                  </a:tcPr>
+                </a:tc>
+                <a:tc>
+                  <a:txBody>
+                    <a:bodyPr wrap="square"/>
+                    <a:lstStyle/>
+                    <a:p>
+                      <a:pPr algn="ctr"/>
+                      <a:r>
+                        <a:rPr sz="1200" b="0" dirty="0">
+                          <a:solidFill>
+                            <a:srgbClr val="142B4D"/>
+                          </a:solidFill>
+                          <a:latin typeface="Arial"/>
                         </a:rPr>
                         <a:t>0.299</a:t>
                       </a:r>
@@ -5963,11 +5963,11 @@
                     <a:p>
                       <a:pPr algn="l"/>
                       <a:r>
-                        <a:rPr sz="1200" b="0">
-                          <a:solidFill>
-                            <a:srgbClr val="142B4D"/>
-                          </a:solidFill>
-                          <a:latin typeface="Calibri"/>
+                        <a:rPr sz="1200" b="0" dirty="0">
+                          <a:solidFill>
+                            <a:srgbClr val="142B4D"/>
+                          </a:solidFill>
+                          <a:latin typeface="Arial"/>
                         </a:rPr>
                         <a:t>NR-PPAR-gamma</a:t>
                       </a:r>
@@ -5986,11 +5986,11 @@
                     <a:p>
                       <a:pPr algn="ctr"/>
                       <a:r>
-                        <a:rPr sz="1200" b="0">
-                          <a:solidFill>
-                            <a:srgbClr val="142B4D"/>
-                          </a:solidFill>
-                          <a:latin typeface="Calibri"/>
+                        <a:rPr sz="1200" b="0" dirty="0">
+                          <a:solidFill>
+                            <a:srgbClr val="142B4D"/>
+                          </a:solidFill>
+                          <a:latin typeface="Arial"/>
                         </a:rPr>
                         <a:t>0.708</a:t>
                       </a:r>
@@ -6009,11 +6009,11 @@
                     <a:p>
                       <a:pPr algn="ctr"/>
                       <a:r>
-                        <a:rPr sz="1200" b="1">
-                          <a:solidFill>
-                            <a:srgbClr val="142B4D"/>
-                          </a:solidFill>
-                          <a:latin typeface="Calibri"/>
+                        <a:rPr sz="1200" b="1" dirty="0">
+                          <a:solidFill>
+                            <a:srgbClr val="142B4D"/>
+                          </a:solidFill>
+                          <a:latin typeface="Arial"/>
                         </a:rPr>
                         <a:t>0.753</a:t>
                       </a:r>
@@ -6021,6 +6021,29 @@
                   </a:txBody>
                   <a:tcPr marL="54864" marR="54864" marT="18288" marB="18288" anchor="ctr">
                     <a:solidFill>
+                      <a:srgbClr val="D8EFEA"/>
+                    </a:solidFill>
+                  </a:tcPr>
+                </a:tc>
+                <a:tc>
+                  <a:txBody>
+                    <a:bodyPr wrap="square"/>
+                    <a:lstStyle/>
+                    <a:p>
+                      <a:pPr algn="ctr"/>
+                      <a:r>
+                        <a:rPr sz="1200" b="0" dirty="0">
+                          <a:solidFill>
+                            <a:srgbClr val="142B4D"/>
+                          </a:solidFill>
+                          <a:latin typeface="Arial"/>
+                        </a:rPr>
+                        <a:t>0.739</a:t>
+                      </a:r>
+                    </a:p>
+                  </a:txBody>
+                  <a:tcPr marL="54864" marR="54864" marT="18288" marB="18288" anchor="ctr">
+                    <a:solidFill>
                       <a:srgbClr val="EAF3F5"/>
                     </a:solidFill>
                   </a:tcPr>
@@ -6032,13 +6055,13 @@
                     <a:p>
                       <a:pPr algn="ctr"/>
                       <a:r>
-                        <a:rPr sz="1200" b="0">
-                          <a:solidFill>
-                            <a:srgbClr val="142B4D"/>
-                          </a:solidFill>
-                          <a:latin typeface="Calibri"/>
-                        </a:rPr>
-                        <a:t>0.739</a:t>
+                        <a:rPr sz="1200" b="0" dirty="0">
+                          <a:solidFill>
+                            <a:srgbClr val="142B4D"/>
+                          </a:solidFill>
+                          <a:latin typeface="Arial"/>
+                        </a:rPr>
+                        <a:t>0.209</a:t>
                       </a:r>
                     </a:p>
                   </a:txBody>
@@ -6055,34 +6078,11 @@
                     <a:p>
                       <a:pPr algn="ctr"/>
                       <a:r>
-                        <a:rPr sz="1200" b="0">
-                          <a:solidFill>
-                            <a:srgbClr val="142B4D"/>
-                          </a:solidFill>
-                          <a:latin typeface="Calibri"/>
-                        </a:rPr>
-                        <a:t>0.209</a:t>
-                      </a:r>
-                    </a:p>
-                  </a:txBody>
-                  <a:tcPr marL="54864" marR="54864" marT="18288" marB="18288" anchor="ctr">
-                    <a:solidFill>
-                      <a:srgbClr val="EAF3F5"/>
-                    </a:solidFill>
-                  </a:tcPr>
-                </a:tc>
-                <a:tc>
-                  <a:txBody>
-                    <a:bodyPr wrap="square"/>
-                    <a:lstStyle/>
-                    <a:p>
-                      <a:pPr algn="ctr"/>
-                      <a:r>
-                        <a:rPr sz="1200" b="1">
-                          <a:solidFill>
-                            <a:srgbClr val="142B4D"/>
-                          </a:solidFill>
-                          <a:latin typeface="Calibri"/>
+                        <a:rPr sz="1200" b="1" dirty="0">
+                          <a:solidFill>
+                            <a:srgbClr val="142B4D"/>
+                          </a:solidFill>
+                          <a:latin typeface="Arial"/>
                         </a:rPr>
                         <a:t>0.339</a:t>
                       </a:r>
@@ -6090,22 +6090,22 @@
                   </a:txBody>
                   <a:tcPr marL="54864" marR="54864" marT="18288" marB="18288" anchor="ctr">
                     <a:solidFill>
-                      <a:srgbClr val="EAF3F5"/>
-                    </a:solidFill>
-                  </a:tcPr>
-                </a:tc>
-                <a:tc>
-                  <a:txBody>
-                    <a:bodyPr wrap="square"/>
-                    <a:lstStyle/>
-                    <a:p>
-                      <a:pPr algn="ctr"/>
-                      <a:r>
-                        <a:rPr sz="1200" b="0">
-                          <a:solidFill>
-                            <a:srgbClr val="142B4D"/>
-                          </a:solidFill>
-                          <a:latin typeface="Calibri"/>
+                      <a:srgbClr val="D8EFEA"/>
+                    </a:solidFill>
+                  </a:tcPr>
+                </a:tc>
+                <a:tc>
+                  <a:txBody>
+                    <a:bodyPr wrap="square"/>
+                    <a:lstStyle/>
+                    <a:p>
+                      <a:pPr algn="ctr"/>
+                      <a:r>
+                        <a:rPr sz="1200" b="0" dirty="0">
+                          <a:solidFill>
+                            <a:srgbClr val="142B4D"/>
+                          </a:solidFill>
+                          <a:latin typeface="Arial"/>
                         </a:rPr>
                         <a:t>0.253</a:t>
                       </a:r>
@@ -6126,11 +6126,11 @@
                     <a:p>
                       <a:pPr algn="l"/>
                       <a:r>
-                        <a:rPr sz="1200" b="0">
-                          <a:solidFill>
-                            <a:srgbClr val="142B4D"/>
-                          </a:solidFill>
-                          <a:latin typeface="Calibri"/>
+                        <a:rPr sz="1200" b="0" dirty="0">
+                          <a:solidFill>
+                            <a:srgbClr val="142B4D"/>
+                          </a:solidFill>
+                          <a:latin typeface="Arial"/>
                         </a:rPr>
                         <a:t>SR-ARE</a:t>
                       </a:r>
@@ -6149,11 +6149,11 @@
                     <a:p>
                       <a:pPr algn="ctr"/>
                       <a:r>
-                        <a:rPr sz="1200" b="0">
-                          <a:solidFill>
-                            <a:srgbClr val="142B4D"/>
-                          </a:solidFill>
-                          <a:latin typeface="Calibri"/>
+                        <a:rPr sz="1200" b="0" dirty="0">
+                          <a:solidFill>
+                            <a:srgbClr val="142B4D"/>
+                          </a:solidFill>
+                          <a:latin typeface="Arial"/>
                         </a:rPr>
                         <a:t>0.702</a:t>
                       </a:r>
@@ -6172,11 +6172,11 @@
                     <a:p>
                       <a:pPr algn="ctr"/>
                       <a:r>
-                        <a:rPr sz="1200" b="1">
-                          <a:solidFill>
-                            <a:srgbClr val="142B4D"/>
-                          </a:solidFill>
-                          <a:latin typeface="Calibri"/>
+                        <a:rPr sz="1200" b="1" dirty="0">
+                          <a:solidFill>
+                            <a:srgbClr val="142B4D"/>
+                          </a:solidFill>
+                          <a:latin typeface="Arial"/>
                         </a:rPr>
                         <a:t>0.764</a:t>
                       </a:r>
@@ -6184,6 +6184,29 @@
                   </a:txBody>
                   <a:tcPr marL="54864" marR="54864" marT="18288" marB="18288" anchor="ctr">
                     <a:solidFill>
+                      <a:srgbClr val="D8EFEA"/>
+                    </a:solidFill>
+                  </a:tcPr>
+                </a:tc>
+                <a:tc>
+                  <a:txBody>
+                    <a:bodyPr wrap="square"/>
+                    <a:lstStyle/>
+                    <a:p>
+                      <a:pPr algn="ctr"/>
+                      <a:r>
+                        <a:rPr sz="1200" b="0" dirty="0">
+                          <a:solidFill>
+                            <a:srgbClr val="142B4D"/>
+                          </a:solidFill>
+                          <a:latin typeface="Arial"/>
+                        </a:rPr>
+                        <a:t>0.742</a:t>
+                      </a:r>
+                    </a:p>
+                  </a:txBody>
+                  <a:tcPr marL="54864" marR="54864" marT="18288" marB="18288" anchor="ctr">
+                    <a:solidFill>
                       <a:srgbClr val="FFFFFF"/>
                     </a:solidFill>
                   </a:tcPr>
@@ -6195,13 +6218,13 @@
                     <a:p>
                       <a:pPr algn="ctr"/>
                       <a:r>
-                        <a:rPr sz="1200" b="0">
-                          <a:solidFill>
-                            <a:srgbClr val="142B4D"/>
-                          </a:solidFill>
-                          <a:latin typeface="Calibri"/>
-                        </a:rPr>
-                        <a:t>0.742</a:t>
+                        <a:rPr sz="1200" b="0" dirty="0">
+                          <a:solidFill>
+                            <a:srgbClr val="142B4D"/>
+                          </a:solidFill>
+                          <a:latin typeface="Arial"/>
+                        </a:rPr>
+                        <a:t>0.440</a:t>
                       </a:r>
                     </a:p>
                   </a:txBody>
@@ -6218,34 +6241,11 @@
                     <a:p>
                       <a:pPr algn="ctr"/>
                       <a:r>
-                        <a:rPr sz="1200" b="0">
-                          <a:solidFill>
-                            <a:srgbClr val="142B4D"/>
-                          </a:solidFill>
-                          <a:latin typeface="Calibri"/>
-                        </a:rPr>
-                        <a:t>0.440</a:t>
-                      </a:r>
-                    </a:p>
-                  </a:txBody>
-                  <a:tcPr marL="54864" marR="54864" marT="18288" marB="18288" anchor="ctr">
-                    <a:solidFill>
-                      <a:srgbClr val="FFFFFF"/>
-                    </a:solidFill>
-                  </a:tcPr>
-                </a:tc>
-                <a:tc>
-                  <a:txBody>
-                    <a:bodyPr wrap="square"/>
-                    <a:lstStyle/>
-                    <a:p>
-                      <a:pPr algn="ctr"/>
-                      <a:r>
-                        <a:rPr sz="1200" b="1">
-                          <a:solidFill>
-                            <a:srgbClr val="142B4D"/>
-                          </a:solidFill>
-                          <a:latin typeface="Calibri"/>
+                        <a:rPr sz="1200" b="1" dirty="0">
+                          <a:solidFill>
+                            <a:srgbClr val="142B4D"/>
+                          </a:solidFill>
+                          <a:latin typeface="Arial"/>
                         </a:rPr>
                         <a:t>0.526</a:t>
                       </a:r>
@@ -6253,22 +6253,22 @@
                   </a:txBody>
                   <a:tcPr marL="54864" marR="54864" marT="18288" marB="18288" anchor="ctr">
                     <a:solidFill>
-                      <a:srgbClr val="FFFFFF"/>
-                    </a:solidFill>
-                  </a:tcPr>
-                </a:tc>
-                <a:tc>
-                  <a:txBody>
-                    <a:bodyPr wrap="square"/>
-                    <a:lstStyle/>
-                    <a:p>
-                      <a:pPr algn="ctr"/>
-                      <a:r>
-                        <a:rPr sz="1200" b="0">
-                          <a:solidFill>
-                            <a:srgbClr val="142B4D"/>
-                          </a:solidFill>
-                          <a:latin typeface="Calibri"/>
+                      <a:srgbClr val="D8EFEA"/>
+                    </a:solidFill>
+                  </a:tcPr>
+                </a:tc>
+                <a:tc>
+                  <a:txBody>
+                    <a:bodyPr wrap="square"/>
+                    <a:lstStyle/>
+                    <a:p>
+                      <a:pPr algn="ctr"/>
+                      <a:r>
+                        <a:rPr sz="1200" b="0" dirty="0">
+                          <a:solidFill>
+                            <a:srgbClr val="142B4D"/>
+                          </a:solidFill>
+                          <a:latin typeface="Arial"/>
                         </a:rPr>
                         <a:t>0.499</a:t>
                       </a:r>
@@ -6289,11 +6289,11 @@
                     <a:p>
                       <a:pPr algn="l"/>
                       <a:r>
-                        <a:rPr sz="1200" b="0">
-                          <a:solidFill>
-                            <a:srgbClr val="142B4D"/>
-                          </a:solidFill>
-                          <a:latin typeface="Calibri"/>
+                        <a:rPr sz="1200" b="0" dirty="0">
+                          <a:solidFill>
+                            <a:srgbClr val="142B4D"/>
+                          </a:solidFill>
+                          <a:latin typeface="Arial"/>
                         </a:rPr>
                         <a:t>SR-ATAD5</a:t>
                       </a:r>
@@ -6312,11 +6312,11 @@
                     <a:p>
                       <a:pPr algn="ctr"/>
                       <a:r>
-                        <a:rPr sz="1200" b="0">
-                          <a:solidFill>
-                            <a:srgbClr val="142B4D"/>
-                          </a:solidFill>
-                          <a:latin typeface="Calibri"/>
+                        <a:rPr sz="1200" b="0" dirty="0">
+                          <a:solidFill>
+                            <a:srgbClr val="142B4D"/>
+                          </a:solidFill>
+                          <a:latin typeface="Arial"/>
                         </a:rPr>
                         <a:t>0.776</a:t>
                       </a:r>
@@ -6335,11 +6335,11 @@
                     <a:p>
                       <a:pPr algn="ctr"/>
                       <a:r>
-                        <a:rPr sz="1200" b="1">
-                          <a:solidFill>
-                            <a:srgbClr val="142B4D"/>
-                          </a:solidFill>
-                          <a:latin typeface="Calibri"/>
+                        <a:rPr sz="1200" b="1" dirty="0">
+                          <a:solidFill>
+                            <a:srgbClr val="142B4D"/>
+                          </a:solidFill>
+                          <a:latin typeface="Arial"/>
                         </a:rPr>
                         <a:t>0.777</a:t>
                       </a:r>
@@ -6347,6 +6347,29 @@
                   </a:txBody>
                   <a:tcPr marL="54864" marR="54864" marT="18288" marB="18288" anchor="ctr">
                     <a:solidFill>
+                      <a:srgbClr val="D8EFEA"/>
+                    </a:solidFill>
+                  </a:tcPr>
+                </a:tc>
+                <a:tc>
+                  <a:txBody>
+                    <a:bodyPr wrap="square"/>
+                    <a:lstStyle/>
+                    <a:p>
+                      <a:pPr algn="ctr"/>
+                      <a:r>
+                        <a:rPr sz="1200" b="0" dirty="0">
+                          <a:solidFill>
+                            <a:srgbClr val="142B4D"/>
+                          </a:solidFill>
+                          <a:latin typeface="Arial"/>
+                        </a:rPr>
+                        <a:t>0.757</a:t>
+                      </a:r>
+                    </a:p>
+                  </a:txBody>
+                  <a:tcPr marL="54864" marR="54864" marT="18288" marB="18288" anchor="ctr">
+                    <a:solidFill>
                       <a:srgbClr val="EAF3F5"/>
                     </a:solidFill>
                   </a:tcPr>
@@ -6358,13 +6381,13 @@
                     <a:p>
                       <a:pPr algn="ctr"/>
                       <a:r>
-                        <a:rPr sz="1200" b="0">
-                          <a:solidFill>
-                            <a:srgbClr val="142B4D"/>
-                          </a:solidFill>
-                          <a:latin typeface="Calibri"/>
-                        </a:rPr>
-                        <a:t>0.757</a:t>
+                        <a:rPr sz="1200" b="0" dirty="0">
+                          <a:solidFill>
+                            <a:srgbClr val="142B4D"/>
+                          </a:solidFill>
+                          <a:latin typeface="Arial"/>
+                        </a:rPr>
+                        <a:t>0.187</a:t>
                       </a:r>
                     </a:p>
                   </a:txBody>
@@ -6381,13 +6404,13 @@
                     <a:p>
                       <a:pPr algn="ctr"/>
                       <a:r>
-                        <a:rPr sz="1200" b="0">
-                          <a:solidFill>
-                            <a:srgbClr val="142B4D"/>
-                          </a:solidFill>
-                          <a:latin typeface="Calibri"/>
-                        </a:rPr>
-                        <a:t>0.187</a:t>
+                        <a:rPr sz="1200" b="0" dirty="0">
+                          <a:solidFill>
+                            <a:srgbClr val="142B4D"/>
+                          </a:solidFill>
+                          <a:latin typeface="Arial"/>
+                        </a:rPr>
+                        <a:t>0.230</a:t>
                       </a:r>
                     </a:p>
                   </a:txBody>
@@ -6404,34 +6427,11 @@
                     <a:p>
                       <a:pPr algn="ctr"/>
                       <a:r>
-                        <a:rPr sz="1200" b="0">
-                          <a:solidFill>
-                            <a:srgbClr val="142B4D"/>
-                          </a:solidFill>
-                          <a:latin typeface="Calibri"/>
-                        </a:rPr>
-                        <a:t>0.230</a:t>
-                      </a:r>
-                    </a:p>
-                  </a:txBody>
-                  <a:tcPr marL="54864" marR="54864" marT="18288" marB="18288" anchor="ctr">
-                    <a:solidFill>
-                      <a:srgbClr val="EAF3F5"/>
-                    </a:solidFill>
-                  </a:tcPr>
-                </a:tc>
-                <a:tc>
-                  <a:txBody>
-                    <a:bodyPr wrap="square"/>
-                    <a:lstStyle/>
-                    <a:p>
-                      <a:pPr algn="ctr"/>
-                      <a:r>
-                        <a:rPr sz="1200" b="1">
-                          <a:solidFill>
-                            <a:srgbClr val="142B4D"/>
-                          </a:solidFill>
-                          <a:latin typeface="Calibri"/>
+                        <a:rPr sz="1200" b="1" dirty="0">
+                          <a:solidFill>
+                            <a:srgbClr val="142B4D"/>
+                          </a:solidFill>
+                          <a:latin typeface="Arial"/>
                         </a:rPr>
                         <a:t>0.247</a:t>
                       </a:r>
@@ -6439,7 +6439,7 @@
                   </a:txBody>
                   <a:tcPr marL="54864" marR="54864" marT="18288" marB="18288" anchor="ctr">
                     <a:solidFill>
-                      <a:srgbClr val="EAF3F5"/>
+                      <a:srgbClr val="D8EFEA"/>
                     </a:solidFill>
                   </a:tcPr>
                 </a:tc>
@@ -6452,11 +6452,11 @@
                     <a:p>
                       <a:pPr algn="l"/>
                       <a:r>
-                        <a:rPr sz="1200" b="0">
-                          <a:solidFill>
-                            <a:srgbClr val="142B4D"/>
-                          </a:solidFill>
-                          <a:latin typeface="Calibri"/>
+                        <a:rPr sz="1200" b="0" dirty="0">
+                          <a:solidFill>
+                            <a:srgbClr val="142B4D"/>
+                          </a:solidFill>
+                          <a:latin typeface="Arial"/>
                         </a:rPr>
                         <a:t>SR-HSE</a:t>
                       </a:r>
@@ -6475,11 +6475,11 @@
                     <a:p>
                       <a:pPr algn="ctr"/>
                       <a:r>
-                        <a:rPr sz="1200" b="0">
-                          <a:solidFill>
-                            <a:srgbClr val="142B4D"/>
-                          </a:solidFill>
-                          <a:latin typeface="Calibri"/>
+                        <a:rPr sz="1200" b="0" dirty="0">
+                          <a:solidFill>
+                            <a:srgbClr val="142B4D"/>
+                          </a:solidFill>
+                          <a:latin typeface="Arial"/>
                         </a:rPr>
                         <a:t>0.726</a:t>
                       </a:r>
@@ -6498,11 +6498,11 @@
                     <a:p>
                       <a:pPr algn="ctr"/>
                       <a:r>
-                        <a:rPr sz="1200" b="1">
-                          <a:solidFill>
-                            <a:srgbClr val="142B4D"/>
-                          </a:solidFill>
-                          <a:latin typeface="Calibri"/>
+                        <a:rPr sz="1200" b="1" dirty="0">
+                          <a:solidFill>
+                            <a:srgbClr val="142B4D"/>
+                          </a:solidFill>
+                          <a:latin typeface="Arial"/>
                         </a:rPr>
                         <a:t>0.739</a:t>
                       </a:r>
@@ -6510,6 +6510,29 @@
                   </a:txBody>
                   <a:tcPr marL="54864" marR="54864" marT="18288" marB="18288" anchor="ctr">
                     <a:solidFill>
+                      <a:srgbClr val="D8EFEA"/>
+                    </a:solidFill>
+                  </a:tcPr>
+                </a:tc>
+                <a:tc>
+                  <a:txBody>
+                    <a:bodyPr wrap="square"/>
+                    <a:lstStyle/>
+                    <a:p>
+                      <a:pPr algn="ctr"/>
+                      <a:r>
+                        <a:rPr sz="1200" b="0" dirty="0">
+                          <a:solidFill>
+                            <a:srgbClr val="142B4D"/>
+                          </a:solidFill>
+                          <a:latin typeface="Arial"/>
+                        </a:rPr>
+                        <a:t>0.727</a:t>
+                      </a:r>
+                    </a:p>
+                  </a:txBody>
+                  <a:tcPr marL="54864" marR="54864" marT="18288" marB="18288" anchor="ctr">
+                    <a:solidFill>
                       <a:srgbClr val="FFFFFF"/>
                     </a:solidFill>
                   </a:tcPr>
@@ -6521,13 +6544,13 @@
                     <a:p>
                       <a:pPr algn="ctr"/>
                       <a:r>
-                        <a:rPr sz="1200" b="0">
-                          <a:solidFill>
-                            <a:srgbClr val="142B4D"/>
-                          </a:solidFill>
-                          <a:latin typeface="Calibri"/>
-                        </a:rPr>
-                        <a:t>0.727</a:t>
+                        <a:rPr sz="1200" b="0" dirty="0">
+                          <a:solidFill>
+                            <a:srgbClr val="142B4D"/>
+                          </a:solidFill>
+                          <a:latin typeface="Arial"/>
+                        </a:rPr>
+                        <a:t>0.165</a:t>
                       </a:r>
                     </a:p>
                   </a:txBody>
@@ -6544,34 +6567,11 @@
                     <a:p>
                       <a:pPr algn="ctr"/>
                       <a:r>
-                        <a:rPr sz="1200" b="0">
-                          <a:solidFill>
-                            <a:srgbClr val="142B4D"/>
-                          </a:solidFill>
-                          <a:latin typeface="Calibri"/>
-                        </a:rPr>
-                        <a:t>0.165</a:t>
-                      </a:r>
-                    </a:p>
-                  </a:txBody>
-                  <a:tcPr marL="54864" marR="54864" marT="18288" marB="18288" anchor="ctr">
-                    <a:solidFill>
-                      <a:srgbClr val="FFFFFF"/>
-                    </a:solidFill>
-                  </a:tcPr>
-                </a:tc>
-                <a:tc>
-                  <a:txBody>
-                    <a:bodyPr wrap="square"/>
-                    <a:lstStyle/>
-                    <a:p>
-                      <a:pPr algn="ctr"/>
-                      <a:r>
-                        <a:rPr sz="1200" b="1">
-                          <a:solidFill>
-                            <a:srgbClr val="142B4D"/>
-                          </a:solidFill>
-                          <a:latin typeface="Calibri"/>
+                        <a:rPr sz="1200" b="1" dirty="0">
+                          <a:solidFill>
+                            <a:srgbClr val="142B4D"/>
+                          </a:solidFill>
+                          <a:latin typeface="Arial"/>
                         </a:rPr>
                         <a:t>0.267</a:t>
                       </a:r>
@@ -6579,22 +6579,22 @@
                   </a:txBody>
                   <a:tcPr marL="54864" marR="54864" marT="18288" marB="18288" anchor="ctr">
                     <a:solidFill>
-                      <a:srgbClr val="FFFFFF"/>
-                    </a:solidFill>
-                  </a:tcPr>
-                </a:tc>
-                <a:tc>
-                  <a:txBody>
-                    <a:bodyPr wrap="square"/>
-                    <a:lstStyle/>
-                    <a:p>
-                      <a:pPr algn="ctr"/>
-                      <a:r>
-                        <a:rPr sz="1200" b="0">
-                          <a:solidFill>
-                            <a:srgbClr val="142B4D"/>
-                          </a:solidFill>
-                          <a:latin typeface="Calibri"/>
+                      <a:srgbClr val="D8EFEA"/>
+                    </a:solidFill>
+                  </a:tcPr>
+                </a:tc>
+                <a:tc>
+                  <a:txBody>
+                    <a:bodyPr wrap="square"/>
+                    <a:lstStyle/>
+                    <a:p>
+                      <a:pPr algn="ctr"/>
+                      <a:r>
+                        <a:rPr sz="1200" b="0" dirty="0">
+                          <a:solidFill>
+                            <a:srgbClr val="142B4D"/>
+                          </a:solidFill>
+                          <a:latin typeface="Arial"/>
                         </a:rPr>
                         <a:t>0.266</a:t>
                       </a:r>
@@ -6615,11 +6615,11 @@
                     <a:p>
                       <a:pPr algn="l"/>
                       <a:r>
-                        <a:rPr sz="1200" b="0">
-                          <a:solidFill>
-                            <a:srgbClr val="142B4D"/>
-                          </a:solidFill>
-                          <a:latin typeface="Calibri"/>
+                        <a:rPr sz="1200" b="0" dirty="0">
+                          <a:solidFill>
+                            <a:srgbClr val="142B4D"/>
+                          </a:solidFill>
+                          <a:latin typeface="Arial"/>
                         </a:rPr>
                         <a:t>SR-MMP</a:t>
                       </a:r>
@@ -6638,11 +6638,11 @@
                     <a:p>
                       <a:pPr algn="ctr"/>
                       <a:r>
-                        <a:rPr sz="1200" b="0">
-                          <a:solidFill>
-                            <a:srgbClr val="142B4D"/>
-                          </a:solidFill>
-                          <a:latin typeface="Calibri"/>
+                        <a:rPr sz="1200" b="0" dirty="0">
+                          <a:solidFill>
+                            <a:srgbClr val="142B4D"/>
+                          </a:solidFill>
+                          <a:latin typeface="Arial"/>
                         </a:rPr>
                         <a:t>0.836</a:t>
                       </a:r>
@@ -6661,11 +6661,11 @@
                     <a:p>
                       <a:pPr algn="ctr"/>
                       <a:r>
-                        <a:rPr sz="1200" b="0">
-                          <a:solidFill>
-                            <a:srgbClr val="142B4D"/>
-                          </a:solidFill>
-                          <a:latin typeface="Calibri"/>
+                        <a:rPr sz="1200" b="0" dirty="0">
+                          <a:solidFill>
+                            <a:srgbClr val="142B4D"/>
+                          </a:solidFill>
+                          <a:latin typeface="Arial"/>
                         </a:rPr>
                         <a:t>0.863</a:t>
                       </a:r>
@@ -6684,11 +6684,11 @@
                     <a:p>
                       <a:pPr algn="ctr"/>
                       <a:r>
-                        <a:rPr sz="1200" b="1">
-                          <a:solidFill>
-                            <a:srgbClr val="142B4D"/>
-                          </a:solidFill>
-                          <a:latin typeface="Calibri"/>
+                        <a:rPr sz="1200" b="1" dirty="0">
+                          <a:solidFill>
+                            <a:srgbClr val="142B4D"/>
+                          </a:solidFill>
+                          <a:latin typeface="Arial"/>
                         </a:rPr>
                         <a:t>0.879</a:t>
                       </a:r>
@@ -6696,6 +6696,29 @@
                   </a:txBody>
                   <a:tcPr marL="54864" marR="54864" marT="18288" marB="18288" anchor="ctr">
                     <a:solidFill>
+                      <a:srgbClr val="D8EFEA"/>
+                    </a:solidFill>
+                  </a:tcPr>
+                </a:tc>
+                <a:tc>
+                  <a:txBody>
+                    <a:bodyPr wrap="square"/>
+                    <a:lstStyle/>
+                    <a:p>
+                      <a:pPr algn="ctr"/>
+                      <a:r>
+                        <a:rPr sz="1200" b="0" dirty="0">
+                          <a:solidFill>
+                            <a:srgbClr val="142B4D"/>
+                          </a:solidFill>
+                          <a:latin typeface="Arial"/>
+                        </a:rPr>
+                        <a:t>0.604</a:t>
+                      </a:r>
+                    </a:p>
+                  </a:txBody>
+                  <a:tcPr marL="54864" marR="54864" marT="18288" marB="18288" anchor="ctr">
+                    <a:solidFill>
                       <a:srgbClr val="EAF3F5"/>
                     </a:solidFill>
                   </a:tcPr>
@@ -6707,13 +6730,13 @@
                     <a:p>
                       <a:pPr algn="ctr"/>
                       <a:r>
-                        <a:rPr sz="1200" b="0">
-                          <a:solidFill>
-                            <a:srgbClr val="142B4D"/>
-                          </a:solidFill>
-                          <a:latin typeface="Calibri"/>
-                        </a:rPr>
-                        <a:t>0.604</a:t>
+                        <a:rPr sz="1200" b="0" dirty="0">
+                          <a:solidFill>
+                            <a:srgbClr val="142B4D"/>
+                          </a:solidFill>
+                          <a:latin typeface="Arial"/>
+                        </a:rPr>
+                        <a:t>0.583</a:t>
                       </a:r>
                     </a:p>
                   </a:txBody>
@@ -6730,34 +6753,11 @@
                     <a:p>
                       <a:pPr algn="ctr"/>
                       <a:r>
-                        <a:rPr sz="1200" b="0">
-                          <a:solidFill>
-                            <a:srgbClr val="142B4D"/>
-                          </a:solidFill>
-                          <a:latin typeface="Calibri"/>
-                        </a:rPr>
-                        <a:t>0.583</a:t>
-                      </a:r>
-                    </a:p>
-                  </a:txBody>
-                  <a:tcPr marL="54864" marR="54864" marT="18288" marB="18288" anchor="ctr">
-                    <a:solidFill>
-                      <a:srgbClr val="EAF3F5"/>
-                    </a:solidFill>
-                  </a:tcPr>
-                </a:tc>
-                <a:tc>
-                  <a:txBody>
-                    <a:bodyPr wrap="square"/>
-                    <a:lstStyle/>
-                    <a:p>
-                      <a:pPr algn="ctr"/>
-                      <a:r>
-                        <a:rPr sz="1200" b="1">
-                          <a:solidFill>
-                            <a:srgbClr val="142B4D"/>
-                          </a:solidFill>
-                          <a:latin typeface="Calibri"/>
+                        <a:rPr sz="1200" b="1" dirty="0">
+                          <a:solidFill>
+                            <a:srgbClr val="142B4D"/>
+                          </a:solidFill>
+                          <a:latin typeface="Arial"/>
                         </a:rPr>
                         <a:t>0.640</a:t>
                       </a:r>
@@ -6765,7 +6765,7 @@
                   </a:txBody>
                   <a:tcPr marL="54864" marR="54864" marT="18288" marB="18288" anchor="ctr">
                     <a:solidFill>
-                      <a:srgbClr val="EAF3F5"/>
+                      <a:srgbClr val="D8EFEA"/>
                     </a:solidFill>
                   </a:tcPr>
                 </a:tc>
@@ -6778,11 +6778,11 @@
                     <a:p>
                       <a:pPr algn="l"/>
                       <a:r>
-                        <a:rPr sz="1200" b="0">
-                          <a:solidFill>
-                            <a:srgbClr val="142B4D"/>
-                          </a:solidFill>
-                          <a:latin typeface="Calibri"/>
+                        <a:rPr sz="1200" b="0" dirty="0">
+                          <a:solidFill>
+                            <a:srgbClr val="142B4D"/>
+                          </a:solidFill>
+                          <a:latin typeface="Arial"/>
                         </a:rPr>
                         <a:t>SR-p53</a:t>
                       </a:r>
@@ -6801,11 +6801,11 @@
                     <a:p>
                       <a:pPr algn="ctr"/>
                       <a:r>
-                        <a:rPr sz="1200" b="0">
-                          <a:solidFill>
-                            <a:srgbClr val="142B4D"/>
-                          </a:solidFill>
-                          <a:latin typeface="Calibri"/>
+                        <a:rPr sz="1200" b="0" dirty="0">
+                          <a:solidFill>
+                            <a:srgbClr val="142B4D"/>
+                          </a:solidFill>
+                          <a:latin typeface="Arial"/>
                         </a:rPr>
                         <a:t>0.730</a:t>
                       </a:r>
@@ -6824,11 +6824,11 @@
                     <a:p>
                       <a:pPr algn="ctr"/>
                       <a:r>
-                        <a:rPr sz="1200" b="0">
-                          <a:solidFill>
-                            <a:srgbClr val="142B4D"/>
-                          </a:solidFill>
-                          <a:latin typeface="Calibri"/>
+                        <a:rPr sz="1200" b="0" dirty="0">
+                          <a:solidFill>
+                            <a:srgbClr val="142B4D"/>
+                          </a:solidFill>
+                          <a:latin typeface="Arial"/>
                         </a:rPr>
                         <a:t>0.796</a:t>
                       </a:r>
@@ -6847,11 +6847,11 @@
                     <a:p>
                       <a:pPr algn="ctr"/>
                       <a:r>
-                        <a:rPr sz="1200" b="1">
-                          <a:solidFill>
-                            <a:srgbClr val="142B4D"/>
-                          </a:solidFill>
-                          <a:latin typeface="Calibri"/>
+                        <a:rPr sz="1200" b="1" dirty="0">
+                          <a:solidFill>
+                            <a:srgbClr val="142B4D"/>
+                          </a:solidFill>
+                          <a:latin typeface="Arial"/>
                         </a:rPr>
                         <a:t>0.806</a:t>
                       </a:r>
@@ -6859,6 +6859,29 @@
                   </a:txBody>
                   <a:tcPr marL="54864" marR="54864" marT="18288" marB="18288" anchor="ctr">
                     <a:solidFill>
+                      <a:srgbClr val="D8EFEA"/>
+                    </a:solidFill>
+                  </a:tcPr>
+                </a:tc>
+                <a:tc>
+                  <a:txBody>
+                    <a:bodyPr wrap="square"/>
+                    <a:lstStyle/>
+                    <a:p>
+                      <a:pPr algn="ctr"/>
+                      <a:r>
+                        <a:rPr sz="1200" b="0" dirty="0">
+                          <a:solidFill>
+                            <a:srgbClr val="142B4D"/>
+                          </a:solidFill>
+                          <a:latin typeface="Arial"/>
+                        </a:rPr>
+                        <a:t>0.249</a:t>
+                      </a:r>
+                    </a:p>
+                  </a:txBody>
+                  <a:tcPr marL="54864" marR="54864" marT="18288" marB="18288" anchor="ctr">
+                    <a:solidFill>
                       <a:srgbClr val="FFFFFF"/>
                     </a:solidFill>
                   </a:tcPr>
@@ -6870,13 +6893,13 @@
                     <a:p>
                       <a:pPr algn="ctr"/>
                       <a:r>
-                        <a:rPr sz="1200" b="0">
-                          <a:solidFill>
-                            <a:srgbClr val="142B4D"/>
-                          </a:solidFill>
-                          <a:latin typeface="Calibri"/>
-                        </a:rPr>
-                        <a:t>0.249</a:t>
+                        <a:rPr sz="1200" b="0" dirty="0">
+                          <a:solidFill>
+                            <a:srgbClr val="142B4D"/>
+                          </a:solidFill>
+                          <a:latin typeface="Arial"/>
+                        </a:rPr>
+                        <a:t>0.315</a:t>
                       </a:r>
                     </a:p>
                   </a:txBody>
@@ -6893,34 +6916,11 @@
                     <a:p>
                       <a:pPr algn="ctr"/>
                       <a:r>
-                        <a:rPr sz="1200" b="0">
-                          <a:solidFill>
-                            <a:srgbClr val="142B4D"/>
-                          </a:solidFill>
-                          <a:latin typeface="Calibri"/>
-                        </a:rPr>
-                        <a:t>0.315</a:t>
-                      </a:r>
-                    </a:p>
-                  </a:txBody>
-                  <a:tcPr marL="54864" marR="54864" marT="18288" marB="18288" anchor="ctr">
-                    <a:solidFill>
-                      <a:srgbClr val="FFFFFF"/>
-                    </a:solidFill>
-                  </a:tcPr>
-                </a:tc>
-                <a:tc>
-                  <a:txBody>
-                    <a:bodyPr wrap="square"/>
-                    <a:lstStyle/>
-                    <a:p>
-                      <a:pPr algn="ctr"/>
-                      <a:r>
-                        <a:rPr sz="1200" b="1">
-                          <a:solidFill>
-                            <a:srgbClr val="142B4D"/>
-                          </a:solidFill>
-                          <a:latin typeface="Calibri"/>
+                        <a:rPr sz="1200" b="1" dirty="0">
+                          <a:solidFill>
+                            <a:srgbClr val="142B4D"/>
+                          </a:solidFill>
+                          <a:latin typeface="Arial"/>
                         </a:rPr>
                         <a:t>0.361</a:t>
                       </a:r>
@@ -6928,7 +6928,7 @@
                   </a:txBody>
                   <a:tcPr marL="54864" marR="54864" marT="18288" marB="18288" anchor="ctr">
                     <a:solidFill>
-                      <a:srgbClr val="FFFFFF"/>
+                      <a:srgbClr val="D8EFEA"/>
                     </a:solidFill>
                   </a:tcPr>
                 </a:tc>
@@ -6965,13 +6965,13 @@
               </a:spcAft>
             </a:pPr>
             <a:r>
-              <a:rPr sz="1400" b="0">
+              <a:rPr sz="1400" b="0" dirty="0">
                 <a:solidFill>
                   <a:srgbClr val="555F6B"/>
                 </a:solidFill>
-                <a:latin typeface="Calibri"/>
+                <a:latin typeface="Arial"/>
               </a:rPr>
-              <a:t>Bold = highest in the row</a:t>
+              <a:t>Bold + teal highlight = highest in the row</a:t>
             </a:r>
           </a:p>
           <a:p>
@@ -6981,11 +6981,11 @@
               </a:spcAft>
             </a:pPr>
             <a:r>
-              <a:rPr sz="1600" b="0">
+              <a:rPr sz="1600" b="0" dirty="0">
                 <a:solidFill>
                   <a:srgbClr val="142B4D"/>
                 </a:solidFill>
-                <a:latin typeface="Calibri"/>
+                <a:latin typeface="Arial"/>
               </a:rPr>
               <a:t>•  RF has the highest ROC on 9 of 12 endpoints, XGBoost on 3</a:t>
             </a:r>
@@ -6997,11 +6997,11 @@
               </a:spcAft>
             </a:pPr>
             <a:r>
-              <a:rPr sz="1600" b="0">
+              <a:rPr sz="1600" b="0" dirty="0">
                 <a:solidFill>
                   <a:srgbClr val="142B4D"/>
                 </a:solidFill>
-                <a:latin typeface="Calibri"/>
+                <a:latin typeface="Arial"/>
               </a:rPr>
               <a:t>•  PR AUC: RF highest on 8, XGBoost on 4, LR on none</a:t>
             </a:r>
@@ -7013,11 +7013,11 @@
               </a:spcAft>
             </a:pPr>
             <a:r>
-              <a:rPr sz="1600" b="0">
+              <a:rPr sz="1600" b="0" dirty="0">
                 <a:solidFill>
                   <a:srgbClr val="142B4D"/>
                 </a:solidFill>
-                <a:latin typeface="Calibri"/>
+                <a:latin typeface="Arial"/>
               </a:rPr>
               <a:t>•  Lowest best PR AUC: SR-ATAD5 (0.247) and SR-HSE (0.267)</a:t>
             </a:r>
@@ -7029,11 +7029,11 @@
               </a:spcAft>
             </a:pPr>
             <a:r>
-              <a:rPr sz="1600" b="0">
+              <a:rPr sz="1600" b="0" dirty="0">
                 <a:solidFill>
                   <a:srgbClr val="142B4D"/>
                 </a:solidFill>
-                <a:latin typeface="Calibri"/>
+                <a:latin typeface="Arial"/>
               </a:rPr>
               <a:t>•  Only 20 to 109 test positives per endpoint: single-endpoint differences are noisy</a:t>
             </a:r>
@@ -7086,11 +7086,11 @@
               </a:spcAft>
             </a:pPr>
             <a:r>
-              <a:rPr sz="3000" b="1">
+              <a:rPr sz="3000" b="1" dirty="0">
                 <a:solidFill>
                   <a:srgbClr val="142B4D"/>
                 </a:solidFill>
-                <a:latin typeface="Calibri"/>
+                <a:latin typeface="Arial"/>
               </a:rPr>
               <a:t>How novel is the scaffold test set? Tanimoto similarity</a:t>
             </a:r>
@@ -7168,11 +7168,11 @@
               </a:spcAft>
             </a:pPr>
             <a:r>
-              <a:rPr sz="1000" b="0">
+              <a:rPr sz="1000" b="0" dirty="0">
                 <a:solidFill>
                   <a:srgbClr val="555F6B"/>
                 </a:solidFill>
-                <a:latin typeface="Calibri"/>
+                <a:latin typeface="Arial"/>
               </a:rPr>
               <a:t>Tox21 Phase 1  |  classical ML baseline</a:t>
             </a:r>
@@ -7207,11 +7207,11 @@
               </a:spcAft>
             </a:pPr>
             <a:r>
-              <a:rPr sz="1000" b="0">
+              <a:rPr sz="1000" b="0" dirty="0">
                 <a:solidFill>
                   <a:srgbClr val="555F6B"/>
                 </a:solidFill>
-                <a:latin typeface="Calibri"/>
+                <a:latin typeface="Arial"/>
               </a:rPr>
               <a:t>11</a:t>
             </a:r>
@@ -7270,11 +7270,11 @@
               </a:spcAft>
             </a:pPr>
             <a:r>
-              <a:rPr sz="1900" b="1">
+              <a:rPr sz="1900" b="1" dirty="0">
                 <a:solidFill>
                   <a:srgbClr val="142B4D"/>
                 </a:solidFill>
-                <a:latin typeface="Calibri"/>
+                <a:latin typeface="Arial"/>
               </a:rPr>
               <a:t>Mean max Tanimoto, test → train</a:t>
             </a:r>
@@ -7286,11 +7286,11 @@
               </a:spcAft>
             </a:pPr>
             <a:r>
-              <a:rPr sz="2000" b="0">
+              <a:rPr sz="2000" b="0" dirty="0">
                 <a:solidFill>
                   <a:srgbClr val="142B4D"/>
                 </a:solidFill>
-                <a:latin typeface="Calibri"/>
+                <a:latin typeface="Arial"/>
               </a:rPr>
               <a:t>•  Scaffold split: 0.428</a:t>
             </a:r>
@@ -7302,11 +7302,11 @@
               </a:spcAft>
             </a:pPr>
             <a:r>
-              <a:rPr sz="2000" b="0">
+              <a:rPr sz="2000" b="0" dirty="0">
                 <a:solidFill>
                   <a:srgbClr val="142B4D"/>
                 </a:solidFill>
-                <a:latin typeface="Calibri"/>
+                <a:latin typeface="Arial"/>
               </a:rPr>
               <a:t>•  Random split: 0.584</a:t>
             </a:r>
@@ -7318,11 +7318,11 @@
               </a:spcAft>
             </a:pPr>
             <a:r>
-              <a:rPr sz="1700" b="0">
+              <a:rPr sz="1700" b="0" dirty="0">
                 <a:solidFill>
                   <a:srgbClr val="142B4D"/>
                 </a:solidFill>
-                <a:latin typeface="Calibri"/>
+                <a:latin typeface="Arial"/>
               </a:rPr>
               <a:t>•  Analog with T ≥ 0.85: 13 of 771 scaffold test molecules vs 72 of 771 random</a:t>
             </a:r>
@@ -7334,11 +7334,11 @@
               </a:spcAft>
             </a:pPr>
             <a:r>
-              <a:rPr sz="1700" b="0">
+              <a:rPr sz="1700" b="0" dirty="0">
                 <a:solidFill>
                   <a:srgbClr val="142B4D"/>
                 </a:solidFill>
-                <a:latin typeface="Calibri"/>
+                <a:latin typeface="Arial"/>
               </a:rPr>
               <a:t>•  The scaffold test is less similar to training, but not free of close analogs</a:t>
             </a:r>
@@ -7391,11 +7391,11 @@
               </a:spcAft>
             </a:pPr>
             <a:r>
-              <a:rPr sz="3000" b="1">
+              <a:rPr sz="3000" b="1" dirty="0">
                 <a:solidFill>
                   <a:srgbClr val="142B4D"/>
                 </a:solidFill>
-                <a:latin typeface="Calibri"/>
+                <a:latin typeface="Arial"/>
               </a:rPr>
               <a:t>Limitations</a:t>
             </a:r>
@@ -7473,11 +7473,11 @@
               </a:spcAft>
             </a:pPr>
             <a:r>
-              <a:rPr sz="1000" b="0">
+              <a:rPr sz="1000" b="0" dirty="0">
                 <a:solidFill>
                   <a:srgbClr val="555F6B"/>
                 </a:solidFill>
-                <a:latin typeface="Calibri"/>
+                <a:latin typeface="Arial"/>
               </a:rPr>
               <a:t>Tox21 Phase 1  |  classical ML baseline</a:t>
             </a:r>
@@ -7512,11 +7512,11 @@
               </a:spcAft>
             </a:pPr>
             <a:r>
-              <a:rPr sz="1000" b="0">
+              <a:rPr sz="1000" b="0" dirty="0">
                 <a:solidFill>
                   <a:srgbClr val="555F6B"/>
                 </a:solidFill>
-                <a:latin typeface="Calibri"/>
+                <a:latin typeface="Arial"/>
               </a:rPr>
               <a:t>12</a:t>
             </a:r>
@@ -7551,11 +7551,11 @@
               </a:spcAft>
             </a:pPr>
             <a:r>
-              <a:rPr sz="1900" b="0">
+              <a:rPr sz="1900" b="0" dirty="0">
                 <a:solidFill>
                   <a:srgbClr val="142B4D"/>
                 </a:solidFill>
-                <a:latin typeface="Calibri"/>
+                <a:latin typeface="Arial"/>
               </a:rPr>
               <a:t>•  One fixed scaffold split and one fixed random split: seed sd covers model randomness only, not split variation</a:t>
             </a:r>
@@ -7567,11 +7567,11 @@
               </a:spcAft>
             </a:pPr>
             <a:r>
-              <a:rPr sz="1900" b="0">
+              <a:rPr sz="1900" b="0" dirty="0">
                 <a:solidFill>
                   <a:srgbClr val="142B4D"/>
                 </a:solidFill>
-                <a:latin typeface="Calibri"/>
+                <a:latin typeface="Arial"/>
               </a:rPr>
               <a:t>•  No significance tests; the RF–XGBoost PR AUC gap (about 0.003) is smaller than the seed sd</a:t>
             </a:r>
@@ -7583,11 +7583,11 @@
               </a:spcAft>
             </a:pPr>
             <a:r>
-              <a:rPr sz="1900" b="0">
+              <a:rPr sz="1900" b="0" dirty="0">
                 <a:solidFill>
                   <a:srgbClr val="142B4D"/>
                 </a:solidFill>
-                <a:latin typeface="Calibri"/>
+                <a:latin typeface="Arial"/>
               </a:rPr>
               <a:t>•  Only 20 to 109 test positives per endpoint: endpoint-level results are noisy</a:t>
             </a:r>
@@ -7599,11 +7599,11 @@
               </a:spcAft>
             </a:pPr>
             <a:r>
-              <a:rPr sz="1900" b="0">
+              <a:rPr sz="1900" b="0" dirty="0">
                 <a:solidFill>
                   <a:srgbClr val="142B4D"/>
                 </a:solidFill>
-                <a:latin typeface="Calibri"/>
+                <a:latin typeface="Arial"/>
               </a:rPr>
               <a:t>•  Random and scaffold test sets hold different molecules; the gap is not a controlled leakage measurement</a:t>
             </a:r>
@@ -7615,11 +7615,11 @@
               </a:spcAft>
             </a:pPr>
             <a:r>
-              <a:rPr sz="1900" b="0">
+              <a:rPr sz="1900" b="0" dirty="0">
                 <a:solidFill>
                   <a:srgbClr val="142B4D"/>
                 </a:solidFill>
-                <a:latin typeface="Calibri"/>
+                <a:latin typeface="Arial"/>
               </a:rPr>
               <a:t>•  Scaffold validation and test contain no acyclic molecules (all 1,753 are in train)</a:t>
             </a:r>
@@ -7631,11 +7631,11 @@
               </a:spcAft>
             </a:pPr>
             <a:r>
-              <a:rPr sz="1900" b="0">
+              <a:rPr sz="1900" b="0" dirty="0">
                 <a:solidFill>
                   <a:srgbClr val="142B4D"/>
                 </a:solidFill>
-                <a:latin typeface="Calibri"/>
+                <a:latin typeface="Arial"/>
               </a:rPr>
               <a:t>•  Hyperparameters tuned on the scaffold split and reused unchanged on the random split</a:t>
             </a:r>
@@ -7647,11 +7647,11 @@
               </a:spcAft>
             </a:pPr>
             <a:r>
-              <a:rPr sz="1900" b="0">
+              <a:rPr sz="1900" b="0" dirty="0">
                 <a:solidFill>
                   <a:srgbClr val="142B4D"/>
                 </a:solidFill>
-                <a:latin typeface="Calibri"/>
+                <a:latin typeface="Arial"/>
               </a:rPr>
               <a:t>•  Fingerprints and 2D descriptors only; we did not test why descriptors help tree models</a:t>
             </a:r>
@@ -7704,11 +7704,11 @@
               </a:spcAft>
             </a:pPr>
             <a:r>
-              <a:rPr sz="3000" b="1">
+              <a:rPr sz="3000" b="1" dirty="0">
                 <a:solidFill>
                   <a:srgbClr val="142B4D"/>
                 </a:solidFill>
-                <a:latin typeface="Calibri"/>
+                <a:latin typeface="Arial"/>
               </a:rPr>
               <a:t>Team contributions, QA and next steps</a:t>
             </a:r>
@@ -7786,11 +7786,11 @@
               </a:spcAft>
             </a:pPr>
             <a:r>
-              <a:rPr sz="1000" b="0">
+              <a:rPr sz="1000" b="0" dirty="0">
                 <a:solidFill>
                   <a:srgbClr val="555F6B"/>
                 </a:solidFill>
-                <a:latin typeface="Calibri"/>
+                <a:latin typeface="Arial"/>
               </a:rPr>
               <a:t>Tox21 Phase 1  |  classical ML baseline</a:t>
             </a:r>
@@ -7825,11 +7825,11 @@
               </a:spcAft>
             </a:pPr>
             <a:r>
-              <a:rPr sz="1000" b="0">
+              <a:rPr sz="1000" b="0" dirty="0">
                 <a:solidFill>
                   <a:srgbClr val="555F6B"/>
                 </a:solidFill>
-                <a:latin typeface="Calibri"/>
+                <a:latin typeface="Arial"/>
               </a:rPr>
               <a:t>13</a:t>
             </a:r>
@@ -7866,11 +7866,11 @@
                     <a:p>
                       <a:pPr algn="l"/>
                       <a:r>
-                        <a:rPr sz="1600" b="1">
+                        <a:rPr sz="1600" b="1" dirty="0">
                           <a:solidFill>
                             <a:srgbClr val="FFFFFF"/>
                           </a:solidFill>
-                          <a:latin typeface="Calibri"/>
+                          <a:latin typeface="Arial"/>
                         </a:rPr>
                         <a:t>Member</a:t>
                       </a:r>
@@ -7889,11 +7889,11 @@
                     <a:p>
                       <a:pPr algn="ctr"/>
                       <a:r>
-                        <a:rPr sz="1600" b="1">
+                        <a:rPr sz="1600" b="1" dirty="0">
                           <a:solidFill>
                             <a:srgbClr val="FFFFFF"/>
                           </a:solidFill>
-                          <a:latin typeface="Calibri"/>
+                          <a:latin typeface="Arial"/>
                         </a:rPr>
                         <a:t>Contribution</a:t>
                       </a:r>
@@ -7914,11 +7914,11 @@
                     <a:p>
                       <a:pPr algn="l"/>
                       <a:r>
-                        <a:rPr sz="1600" b="0">
-                          <a:solidFill>
-                            <a:srgbClr val="142B4D"/>
-                          </a:solidFill>
-                          <a:latin typeface="Calibri"/>
+                        <a:rPr sz="1600" b="0" dirty="0">
+                          <a:solidFill>
+                            <a:srgbClr val="142B4D"/>
+                          </a:solidFill>
+                          <a:latin typeface="Arial"/>
                         </a:rPr>
                         <a:t>Raghav</a:t>
                       </a:r>
@@ -7937,11 +7937,11 @@
                     <a:p>
                       <a:pPr algn="ctr"/>
                       <a:r>
-                        <a:rPr sz="1600" b="0">
-                          <a:solidFill>
-                            <a:srgbClr val="142B4D"/>
-                          </a:solidFill>
-                          <a:latin typeface="Calibri"/>
+                        <a:rPr sz="1600" b="0" dirty="0">
+                          <a:solidFill>
+                            <a:srgbClr val="142B4D"/>
+                          </a:solidFill>
+                          <a:latin typeface="Arial"/>
                         </a:rPr>
                         <a:t>Data cleaning and deduplication, EDA, scaffold and random splits, Logistic Regression</a:t>
                       </a:r>
@@ -7962,11 +7962,11 @@
                     <a:p>
                       <a:pPr algn="l"/>
                       <a:r>
-                        <a:rPr sz="1600" b="0">
-                          <a:solidFill>
-                            <a:srgbClr val="142B4D"/>
-                          </a:solidFill>
-                          <a:latin typeface="Calibri"/>
+                        <a:rPr sz="1600" b="0" dirty="0">
+                          <a:solidFill>
+                            <a:srgbClr val="142B4D"/>
+                          </a:solidFill>
+                          <a:latin typeface="Arial"/>
                         </a:rPr>
                         <a:t>Ranajeet</a:t>
                       </a:r>
@@ -7985,11 +7985,11 @@
                     <a:p>
                       <a:pPr algn="ctr"/>
                       <a:r>
-                        <a:rPr sz="1600" b="0">
-                          <a:solidFill>
-                            <a:srgbClr val="142B4D"/>
-                          </a:solidFill>
-                          <a:latin typeface="Calibri"/>
+                        <a:rPr sz="1600" b="0" dirty="0">
+                          <a:solidFill>
+                            <a:srgbClr val="142B4D"/>
+                          </a:solidFill>
+                          <a:latin typeface="Arial"/>
                         </a:rPr>
                         <a:t>Morgan fingerprints, RDKit descriptors, leak-free preprocessing, Random Forest</a:t>
                       </a:r>
@@ -8010,11 +8010,11 @@
                     <a:p>
                       <a:pPr algn="l"/>
                       <a:r>
-                        <a:rPr sz="1600" b="0">
-                          <a:solidFill>
-                            <a:srgbClr val="142B4D"/>
-                          </a:solidFill>
-                          <a:latin typeface="Calibri"/>
+                        <a:rPr sz="1600" b="0" dirty="0">
+                          <a:solidFill>
+                            <a:srgbClr val="142B4D"/>
+                          </a:solidFill>
+                          <a:latin typeface="Arial"/>
                         </a:rPr>
                         <a:t>Parrv</a:t>
                       </a:r>
@@ -8033,11 +8033,11 @@
                     <a:p>
                       <a:pPr algn="ctr"/>
                       <a:r>
-                        <a:rPr sz="1600" b="0">
-                          <a:solidFill>
-                            <a:srgbClr val="142B4D"/>
-                          </a:solidFill>
-                          <a:latin typeface="Calibri"/>
+                        <a:rPr sz="1600" b="0" dirty="0">
+                          <a:solidFill>
+                            <a:srgbClr val="142B4D"/>
+                          </a:solidFill>
+                          <a:latin typeface="Arial"/>
                         </a:rPr>
                         <a:t>Repository and contract, evaluation harness, XGBoost, tuning and final-test scripts</a:t>
                       </a:r>
@@ -8058,11 +8058,11 @@
                     <a:p>
                       <a:pPr algn="l"/>
                       <a:r>
-                        <a:rPr sz="1600" b="0">
-                          <a:solidFill>
-                            <a:srgbClr val="142B4D"/>
-                          </a:solidFill>
-                          <a:latin typeface="Calibri"/>
+                        <a:rPr sz="1600" b="0" dirty="0">
+                          <a:solidFill>
+                            <a:srgbClr val="142B4D"/>
+                          </a:solidFill>
+                          <a:latin typeface="Arial"/>
                         </a:rPr>
                         <a:t>Abhijeet</a:t>
                       </a:r>
@@ -8081,11 +8081,11 @@
                     <a:p>
                       <a:pPr algn="ctr"/>
                       <a:r>
-                        <a:rPr sz="1600" b="0">
-                          <a:solidFill>
-                            <a:srgbClr val="142B4D"/>
-                          </a:solidFill>
-                          <a:latin typeface="Calibri"/>
+                        <a:rPr sz="1600" b="0" dirty="0">
+                          <a:solidFill>
+                            <a:srgbClr val="142B4D"/>
+                          </a:solidFill>
+                          <a:latin typeface="Arial"/>
                         </a:rPr>
                         <a:t>Literature review, theory, results analysis, Tanimoto study, report</a:t>
                       </a:r>
@@ -8106,11 +8106,11 @@
                     <a:p>
                       <a:pPr algn="l"/>
                       <a:r>
-                        <a:rPr sz="1600" b="0">
-                          <a:solidFill>
-                            <a:srgbClr val="142B4D"/>
-                          </a:solidFill>
-                          <a:latin typeface="Calibri"/>
+                        <a:rPr sz="1600" b="0" dirty="0">
+                          <a:solidFill>
+                            <a:srgbClr val="142B4D"/>
+                          </a:solidFill>
+                          <a:latin typeface="Arial"/>
                         </a:rPr>
                         <a:t>Malhar (Member 5)</a:t>
                       </a:r>
@@ -8129,11 +8129,11 @@
                     <a:p>
                       <a:pPr algn="ctr"/>
                       <a:r>
-                        <a:rPr sz="1600" b="0">
-                          <a:solidFill>
-                            <a:srgbClr val="142B4D"/>
-                          </a:solidFill>
-                          <a:latin typeface="Calibri"/>
+                        <a:rPr sz="1600" b="0" dirty="0">
+                          <a:solidFill>
+                            <a:srgbClr val="142B4D"/>
+                          </a:solidFill>
+                          <a:latin typeface="Arial"/>
                         </a:rPr>
                         <a:t>README and slide polish, tests, QA communication, viva preparation</a:t>
                       </a:r>
@@ -8191,11 +8191,11 @@
           <a:p>
             <a:pPr algn="ctr"/>
             <a:r>
-              <a:rPr sz="1500" b="1">
+              <a:rPr sz="1500" b="1" dirty="0">
                 <a:solidFill>
                   <a:srgbClr val="FFFFFF"/>
                 </a:solidFill>
-                <a:latin typeface="Calibri"/>
+                <a:latin typeface="Arial"/>
               </a:rPr>
               <a:t>QA RECORD</a:t>
             </a:r>
@@ -8203,11 +8203,11 @@
           <a:p>
             <a:pPr algn="ctr"/>
             <a:r>
-              <a:rPr sz="1200" b="0">
+              <a:rPr sz="1200" b="0" dirty="0">
                 <a:solidFill>
                   <a:srgbClr val="FFFFFF"/>
                 </a:solidFill>
-                <a:latin typeface="Calibri"/>
+                <a:latin typeface="Arial"/>
               </a:rPr>
               <a:t>Smoke test and 432-row reproduction documented by Parrv</a:t>
             </a:r>
@@ -8255,11 +8255,11 @@
           <a:p>
             <a:pPr algn="ctr"/>
             <a:r>
-              <a:rPr sz="1500" b="1">
+              <a:rPr sz="1500" b="1" dirty="0">
                 <a:solidFill>
                   <a:srgbClr val="FFFFFF"/>
                 </a:solidFill>
-                <a:latin typeface="Calibri"/>
+                <a:latin typeface="Arial"/>
               </a:rPr>
               <a:t>MEMBER 5 FOCUS</a:t>
             </a:r>
@@ -8267,11 +8267,11 @@
           <a:p>
             <a:pPr algn="ctr"/>
             <a:r>
-              <a:rPr sz="1200" b="0">
+              <a:rPr sz="1200" b="0" dirty="0">
                 <a:solidFill>
                   <a:srgbClr val="FFFFFF"/>
                 </a:solidFill>
-                <a:latin typeface="Calibri"/>
+                <a:latin typeface="Arial"/>
               </a:rPr>
               <a:t>README and slides, verification notes, viva preparation</a:t>
             </a:r>
@@ -8319,11 +8319,11 @@
           <a:p>
             <a:pPr algn="ctr"/>
             <a:r>
-              <a:rPr sz="1500" b="1">
+              <a:rPr sz="1500" b="1" dirty="0">
                 <a:solidFill>
                   <a:srgbClr val="FFFFFF"/>
                 </a:solidFill>
-                <a:latin typeface="Calibri"/>
+                <a:latin typeface="Arial"/>
               </a:rPr>
               <a:t>OPEN ITEMS</a:t>
             </a:r>
@@ -8331,11 +8331,11 @@
           <a:p>
             <a:pPr algn="ctr"/>
             <a:r>
-              <a:rPr sz="1200" b="0">
+              <a:rPr sz="1200" b="0" dirty="0">
                 <a:solidFill>
                   <a:srgbClr val="FFFFFF"/>
                 </a:solidFill>
-                <a:latin typeface="Calibri"/>
+                <a:latin typeface="Arial"/>
               </a:rPr>
               <a:t>Viva drill pending; 01_eda notebook uses a Colab path</a:t>
             </a:r>
@@ -8388,11 +8388,11 @@
               </a:spcAft>
             </a:pPr>
             <a:r>
-              <a:rPr sz="3000" b="1">
+              <a:rPr sz="3000" b="1" dirty="0">
                 <a:solidFill>
                   <a:srgbClr val="142B4D"/>
                 </a:solidFill>
-                <a:latin typeface="Calibri"/>
+                <a:latin typeface="Arial"/>
               </a:rPr>
               <a:t>Problem and dataset</a:t>
             </a:r>
@@ -8470,11 +8470,11 @@
               </a:spcAft>
             </a:pPr>
             <a:r>
-              <a:rPr sz="1000" b="0">
+              <a:rPr sz="1000" b="0" dirty="0">
                 <a:solidFill>
                   <a:srgbClr val="555F6B"/>
                 </a:solidFill>
-                <a:latin typeface="Calibri"/>
+                <a:latin typeface="Arial"/>
               </a:rPr>
               <a:t>Tox21 Phase 1  |  classical ML baseline</a:t>
             </a:r>
@@ -8509,11 +8509,11 @@
               </a:spcAft>
             </a:pPr>
             <a:r>
-              <a:rPr sz="1000" b="0">
+              <a:rPr sz="1000" b="0" dirty="0">
                 <a:solidFill>
                   <a:srgbClr val="555F6B"/>
                 </a:solidFill>
-                <a:latin typeface="Calibri"/>
+                <a:latin typeface="Arial"/>
               </a:rPr>
               <a:t>2</a:t>
             </a:r>
@@ -8548,11 +8548,11 @@
               </a:spcAft>
             </a:pPr>
             <a:r>
-              <a:rPr sz="1900" b="0">
+              <a:rPr sz="1900" b="0" dirty="0">
                 <a:solidFill>
                   <a:srgbClr val="142B4D"/>
                 </a:solidFill>
-                <a:latin typeface="Calibri"/>
+                <a:latin typeface="Arial"/>
               </a:rPr>
               <a:t>•  7,709 unique molecules after cleaning</a:t>
             </a:r>
@@ -8564,11 +8564,11 @@
               </a:spcAft>
             </a:pPr>
             <a:r>
-              <a:rPr sz="1900" b="0">
+              <a:rPr sz="1900" b="0" dirty="0">
                 <a:solidFill>
                   <a:srgbClr val="142B4D"/>
                 </a:solidFill>
-                <a:latin typeface="Calibri"/>
+                <a:latin typeface="Arial"/>
               </a:rPr>
               <a:t>•  12 toxicity endpoints (NR-* nuclear receptor, SR-* stress response), one binary classifier per endpoint</a:t>
             </a:r>
@@ -8580,11 +8580,11 @@
               </a:spcAft>
             </a:pPr>
             <a:r>
-              <a:rPr sz="1900" b="0">
+              <a:rPr sz="1900" b="0" dirty="0">
                 <a:solidFill>
                   <a:srgbClr val="142B4D"/>
                 </a:solidFill>
-                <a:latin typeface="Calibri"/>
+                <a:latin typeface="Arial"/>
               </a:rPr>
               <a:t>•  17.05% of label cells are missing: not tested, not non-toxic. Missing labels stay NaN; metrics use labeled rows only</a:t>
             </a:r>
@@ -8596,11 +8596,11 @@
               </a:spcAft>
             </a:pPr>
             <a:r>
-              <a:rPr sz="1900" b="0">
+              <a:rPr sz="1900" b="0" dirty="0">
                 <a:solidFill>
                   <a:srgbClr val="142B4D"/>
                 </a:solidFill>
-                <a:latin typeface="Calibri"/>
+                <a:latin typeface="Arial"/>
               </a:rPr>
               <a:t>•  Labeled molecules per endpoint: 5,718 to 7,141</a:t>
             </a:r>
@@ -8612,11 +8612,11 @@
               </a:spcAft>
             </a:pPr>
             <a:r>
-              <a:rPr sz="1900" b="0">
+              <a:rPr sz="1900" b="0" dirty="0">
                 <a:solidFill>
                   <a:srgbClr val="142B4D"/>
                 </a:solidFill>
-                <a:latin typeface="Calibri"/>
+                <a:latin typeface="Arial"/>
               </a:rPr>
               <a:t>•  Positive rate per endpoint: 2.91% (NR-PPAR-gamma) to 15.94% (SR-ARE)</a:t>
             </a:r>
@@ -8693,11 +8693,11 @@
               </a:spcAft>
             </a:pPr>
             <a:r>
-              <a:rPr sz="3000" b="1">
+              <a:rPr sz="3000" b="1" dirty="0">
                 <a:solidFill>
                   <a:srgbClr val="142B4D"/>
                 </a:solidFill>
-                <a:latin typeface="Calibri"/>
+                <a:latin typeface="Arial"/>
               </a:rPr>
               <a:t>Pipeline</a:t>
             </a:r>
@@ -8775,11 +8775,11 @@
               </a:spcAft>
             </a:pPr>
             <a:r>
-              <a:rPr sz="1000" b="0">
+              <a:rPr sz="1000" b="0" dirty="0">
                 <a:solidFill>
                   <a:srgbClr val="555F6B"/>
                 </a:solidFill>
-                <a:latin typeface="Calibri"/>
+                <a:latin typeface="Arial"/>
               </a:rPr>
               <a:t>Tox21 Phase 1  |  classical ML baseline</a:t>
             </a:r>
@@ -8814,11 +8814,11 @@
               </a:spcAft>
             </a:pPr>
             <a:r>
-              <a:rPr sz="1000" b="0">
+              <a:rPr sz="1000" b="0" dirty="0">
                 <a:solidFill>
                   <a:srgbClr val="555F6B"/>
                 </a:solidFill>
-                <a:latin typeface="Calibri"/>
+                <a:latin typeface="Arial"/>
               </a:rPr>
               <a:t>3</a:t>
             </a:r>
@@ -8866,11 +8866,11 @@
           <a:p>
             <a:pPr algn="ctr"/>
             <a:r>
-              <a:rPr sz="1500" b="1">
+              <a:rPr sz="1500" b="1" dirty="0">
                 <a:solidFill>
                   <a:srgbClr val="FFFFFF"/>
                 </a:solidFill>
-                <a:latin typeface="Calibri"/>
+                <a:latin typeface="Arial"/>
               </a:rPr>
               <a:t>Raw Tox21 CSV</a:t>
             </a:r>
@@ -8878,11 +8878,11 @@
           <a:p>
             <a:pPr algn="ctr"/>
             <a:r>
-              <a:rPr sz="1200" b="0">
+              <a:rPr sz="1200" b="0" dirty="0">
                 <a:solidFill>
                   <a:srgbClr val="FFFFFF"/>
                 </a:solidFill>
-                <a:latin typeface="Calibri"/>
+                <a:latin typeface="Arial"/>
               </a:rPr>
               <a:t>12 labels, SMILES</a:t>
             </a:r>
@@ -8973,11 +8973,11 @@
           <a:p>
             <a:pPr algn="ctr"/>
             <a:r>
-              <a:rPr sz="1500" b="1">
+              <a:rPr sz="1500" b="1" dirty="0">
                 <a:solidFill>
                   <a:srgbClr val="FFFFFF"/>
                 </a:solidFill>
-                <a:latin typeface="Calibri"/>
+                <a:latin typeface="Arial"/>
               </a:rPr>
               <a:t>Clean + deduplicate</a:t>
             </a:r>
@@ -8985,11 +8985,11 @@
           <a:p>
             <a:pPr algn="ctr"/>
             <a:r>
-              <a:rPr sz="1200" b="0">
+              <a:rPr sz="1200" b="0" dirty="0">
                 <a:solidFill>
                   <a:srgbClr val="FFFFFF"/>
                 </a:solidFill>
-                <a:latin typeface="Calibri"/>
+                <a:latin typeface="Arial"/>
               </a:rPr>
               <a:t>7,709 molecules</a:t>
             </a:r>
@@ -9080,11 +9080,11 @@
           <a:p>
             <a:pPr algn="ctr"/>
             <a:r>
-              <a:rPr sz="1500" b="1">
+              <a:rPr sz="1500" b="1" dirty="0">
                 <a:solidFill>
                   <a:srgbClr val="FFFFFF"/>
                 </a:solidFill>
-                <a:latin typeface="Calibri"/>
+                <a:latin typeface="Arial"/>
               </a:rPr>
               <a:t>Split 80/10/10</a:t>
             </a:r>
@@ -9092,11 +9092,11 @@
           <a:p>
             <a:pPr algn="ctr"/>
             <a:r>
-              <a:rPr sz="1200" b="0">
+              <a:rPr sz="1200" b="0" dirty="0">
                 <a:solidFill>
                   <a:srgbClr val="FFFFFF"/>
                 </a:solidFill>
-                <a:latin typeface="Calibri"/>
+                <a:latin typeface="Arial"/>
               </a:rPr>
               <a:t>6,167 / 771 / 771</a:t>
             </a:r>
@@ -9104,11 +9104,11 @@
           <a:p>
             <a:pPr algn="ctr"/>
             <a:r>
-              <a:rPr sz="1200" b="0">
+              <a:rPr sz="1200" b="0" dirty="0">
                 <a:solidFill>
                   <a:srgbClr val="FFFFFF"/>
                 </a:solidFill>
-                <a:latin typeface="Calibri"/>
+                <a:latin typeface="Arial"/>
               </a:rPr>
               <a:t>scaffold + random</a:t>
             </a:r>
@@ -9199,11 +9199,11 @@
           <a:p>
             <a:pPr algn="ctr"/>
             <a:r>
-              <a:rPr sz="1500" b="1">
+              <a:rPr sz="1500" b="1" dirty="0">
                 <a:solidFill>
                   <a:srgbClr val="FFFFFF"/>
                 </a:solidFill>
-                <a:latin typeface="Calibri"/>
+                <a:latin typeface="Arial"/>
               </a:rPr>
               <a:t>Features</a:t>
             </a:r>
@@ -9211,11 +9211,11 @@
           <a:p>
             <a:pPr algn="ctr"/>
             <a:r>
-              <a:rPr sz="1200" b="0">
+              <a:rPr sz="1200" b="0" dirty="0">
                 <a:solidFill>
                   <a:srgbClr val="FFFFFF"/>
                 </a:solidFill>
-                <a:latin typeface="Calibri"/>
+                <a:latin typeface="Arial"/>
               </a:rPr>
               <a:t>Morgan 2,048 bits</a:t>
             </a:r>
@@ -9223,11 +9223,11 @@
           <a:p>
             <a:pPr algn="ctr"/>
             <a:r>
-              <a:rPr sz="1200" b="0">
+              <a:rPr sz="1200" b="0" dirty="0">
                 <a:solidFill>
                   <a:srgbClr val="FFFFFF"/>
                 </a:solidFill>
-                <a:latin typeface="Calibri"/>
+                <a:latin typeface="Arial"/>
               </a:rPr>
               <a:t>+ 213 descriptors</a:t>
             </a:r>
@@ -9275,11 +9275,11 @@
           <a:p>
             <a:pPr algn="ctr"/>
             <a:r>
-              <a:rPr sz="1500" b="1">
+              <a:rPr sz="1500" b="1" dirty="0">
                 <a:solidFill>
                   <a:srgbClr val="FFFFFF"/>
                 </a:solidFill>
-                <a:latin typeface="Calibri"/>
+                <a:latin typeface="Arial"/>
               </a:rPr>
               <a:t>Tune on validation</a:t>
             </a:r>
@@ -9287,11 +9287,11 @@
           <a:p>
             <a:pPr algn="ctr"/>
             <a:r>
-              <a:rPr sz="1200" b="0">
+              <a:rPr sz="1200" b="0" dirty="0">
                 <a:solidFill>
                   <a:srgbClr val="FFFFFF"/>
                 </a:solidFill>
-                <a:latin typeface="Calibri"/>
+                <a:latin typeface="Arial"/>
               </a:rPr>
               <a:t>8 configs per model</a:t>
             </a:r>
@@ -9299,11 +9299,11 @@
           <a:p>
             <a:pPr algn="ctr"/>
             <a:r>
-              <a:rPr sz="1200" b="0">
+              <a:rPr sz="1200" b="0" dirty="0">
                 <a:solidFill>
                   <a:srgbClr val="FFFFFF"/>
                 </a:solidFill>
-                <a:latin typeface="Calibri"/>
+                <a:latin typeface="Arial"/>
               </a:rPr>
               <a:t>per feature set</a:t>
             </a:r>
@@ -9394,11 +9394,11 @@
           <a:p>
             <a:pPr algn="ctr"/>
             <a:r>
-              <a:rPr sz="1500" b="1">
+              <a:rPr sz="1500" b="1" dirty="0">
                 <a:solidFill>
                   <a:srgbClr val="FFFFFF"/>
                 </a:solidFill>
-                <a:latin typeface="Calibri"/>
+                <a:latin typeface="Arial"/>
               </a:rPr>
               <a:t>Freeze configs</a:t>
             </a:r>
@@ -9406,11 +9406,11 @@
           <a:p>
             <a:pPr algn="ctr"/>
             <a:r>
-              <a:rPr sz="1200" b="0">
+              <a:rPr sz="1200" b="0" dirty="0">
                 <a:solidFill>
                   <a:srgbClr val="FFFFFF"/>
                 </a:solidFill>
-                <a:latin typeface="Calibri"/>
+                <a:latin typeface="Arial"/>
               </a:rPr>
               <a:t>best_configs.json</a:t>
             </a:r>
@@ -9418,11 +9418,11 @@
           <a:p>
             <a:pPr algn="ctr"/>
             <a:r>
-              <a:rPr sz="1200" b="0">
+              <a:rPr sz="1200" b="0" dirty="0">
                 <a:solidFill>
                   <a:srgbClr val="FFFFFF"/>
                 </a:solidFill>
-                <a:latin typeface="Calibri"/>
+                <a:latin typeface="Arial"/>
               </a:rPr>
               <a:t>commit 041892c</a:t>
             </a:r>
@@ -9513,11 +9513,11 @@
           <a:p>
             <a:pPr algn="ctr"/>
             <a:r>
-              <a:rPr sz="1500" b="1">
+              <a:rPr sz="1500" b="1" dirty="0">
                 <a:solidFill>
                   <a:srgbClr val="FFFFFF"/>
                 </a:solidFill>
-                <a:latin typeface="Calibri"/>
+                <a:latin typeface="Arial"/>
               </a:rPr>
               <a:t>Final test</a:t>
             </a:r>
@@ -9525,11 +9525,11 @@
           <a:p>
             <a:pPr algn="ctr"/>
             <a:r>
-              <a:rPr sz="1200" b="0">
+              <a:rPr sz="1200" b="0" dirty="0">
                 <a:solidFill>
                   <a:srgbClr val="FFFFFF"/>
                 </a:solidFill>
-                <a:latin typeface="Calibri"/>
+                <a:latin typeface="Arial"/>
               </a:rPr>
               <a:t>seeds 0, 1, 2</a:t>
             </a:r>
@@ -9537,11 +9537,11 @@
           <a:p>
             <a:pPr algn="ctr"/>
             <a:r>
-              <a:rPr sz="1200" b="0">
+              <a:rPr sz="1200" b="0" dirty="0">
                 <a:solidFill>
                   <a:srgbClr val="FFFFFF"/>
                 </a:solidFill>
-                <a:latin typeface="Calibri"/>
+                <a:latin typeface="Arial"/>
               </a:rPr>
               <a:t>432 classifiers</a:t>
             </a:r>
@@ -9632,11 +9632,11 @@
           <a:p>
             <a:pPr algn="ctr"/>
             <a:r>
-              <a:rPr sz="1500" b="1">
+              <a:rPr sz="1500" b="1" dirty="0">
                 <a:solidFill>
                   <a:srgbClr val="FFFFFF"/>
                 </a:solidFill>
-                <a:latin typeface="Calibri"/>
+                <a:latin typeface="Arial"/>
               </a:rPr>
               <a:t>Tables, figures, report</a:t>
             </a:r>
@@ -9644,11 +9644,11 @@
           <a:p>
             <a:pPr algn="ctr"/>
             <a:r>
-              <a:rPr sz="1200" b="0">
+              <a:rPr sz="1200" b="0" dirty="0">
                 <a:solidFill>
                   <a:srgbClr val="FFFFFF"/>
                 </a:solidFill>
-                <a:latin typeface="Calibri"/>
+                <a:latin typeface="Arial"/>
               </a:rPr>
               <a:t>from results_test.csv</a:t>
             </a:r>
@@ -9683,11 +9683,11 @@
               </a:spcAft>
             </a:pPr>
             <a:r>
-              <a:rPr sz="1700" b="0">
+              <a:rPr sz="1700" b="0" dirty="0">
                 <a:solidFill>
                   <a:srgbClr val="555F6B"/>
                 </a:solidFill>
-                <a:latin typeface="Calibri"/>
+                <a:latin typeface="Arial"/>
               </a:rPr>
               <a:t>The test split is read only by scripts/04_final_test.py. Rows are never reordered; missing labels are never filled with 0.</a:t>
             </a:r>
@@ -9740,11 +9740,11 @@
               </a:spcAft>
             </a:pPr>
             <a:r>
-              <a:rPr sz="3000" b="1">
+              <a:rPr sz="3000" b="1" dirty="0">
                 <a:solidFill>
                   <a:srgbClr val="142B4D"/>
                 </a:solidFill>
-                <a:latin typeface="Calibri"/>
+                <a:latin typeface="Arial"/>
               </a:rPr>
               <a:t>Features: Morgan fingerprints and RDKit descriptors</a:t>
             </a:r>
@@ -9822,11 +9822,11 @@
               </a:spcAft>
             </a:pPr>
             <a:r>
-              <a:rPr sz="1000" b="0">
+              <a:rPr sz="1000" b="0" dirty="0">
                 <a:solidFill>
                   <a:srgbClr val="555F6B"/>
                 </a:solidFill>
-                <a:latin typeface="Calibri"/>
+                <a:latin typeface="Arial"/>
               </a:rPr>
               <a:t>Tox21 Phase 1  |  classical ML baseline</a:t>
             </a:r>
@@ -9861,11 +9861,11 @@
               </a:spcAft>
             </a:pPr>
             <a:r>
-              <a:rPr sz="1000" b="0">
+              <a:rPr sz="1000" b="0" dirty="0">
                 <a:solidFill>
                   <a:srgbClr val="555F6B"/>
                 </a:solidFill>
-                <a:latin typeface="Calibri"/>
+                <a:latin typeface="Arial"/>
               </a:rPr>
               <a:t>4</a:t>
             </a:r>
@@ -9913,11 +9913,11 @@
           <a:p>
             <a:pPr algn="ctr"/>
             <a:r>
-              <a:rPr sz="2200" b="1">
+              <a:rPr sz="2200" b="1" dirty="0">
                 <a:solidFill>
                   <a:srgbClr val="FFFFFF"/>
                 </a:solidFill>
-                <a:latin typeface="Calibri"/>
+                <a:latin typeface="Arial"/>
               </a:rPr>
               <a:t>morgan</a:t>
             </a:r>
@@ -9925,11 +9925,11 @@
           <a:p>
             <a:pPr algn="ctr"/>
             <a:r>
-              <a:rPr sz="1900" b="0">
+              <a:rPr sz="1900" b="0" dirty="0">
                 <a:solidFill>
                   <a:srgbClr val="FFFFFF"/>
                 </a:solidFill>
-                <a:latin typeface="Calibri"/>
+                <a:latin typeface="Arial"/>
               </a:rPr>
               <a:t>2,048 bits, radius 2</a:t>
             </a:r>
@@ -9977,11 +9977,11 @@
           <a:p>
             <a:pPr algn="ctr"/>
             <a:r>
-              <a:rPr sz="2200" b="1">
+              <a:rPr sz="2200" b="1" dirty="0">
                 <a:solidFill>
                   <a:srgbClr val="FFFFFF"/>
                 </a:solidFill>
-                <a:latin typeface="Calibri"/>
+                <a:latin typeface="Arial"/>
               </a:rPr>
               <a:t>morgan+desc</a:t>
             </a:r>
@@ -9989,11 +9989,11 @@
           <a:p>
             <a:pPr algn="ctr"/>
             <a:r>
-              <a:rPr sz="1900" b="0">
+              <a:rPr sz="1900" b="0" dirty="0">
                 <a:solidFill>
                   <a:srgbClr val="FFFFFF"/>
                 </a:solidFill>
-                <a:latin typeface="Calibri"/>
+                <a:latin typeface="Arial"/>
               </a:rPr>
               <a:t>2,261 columns = 2,048 + 213 descriptors</a:t>
             </a:r>
@@ -10028,11 +10028,11 @@
               </a:spcAft>
             </a:pPr>
             <a:r>
-              <a:rPr sz="1900" b="0">
+              <a:rPr sz="1900" b="0" dirty="0">
                 <a:solidFill>
                   <a:srgbClr val="142B4D"/>
                 </a:solidFill>
-                <a:latin typeface="Calibri"/>
+                <a:latin typeface="Arial"/>
               </a:rPr>
               <a:t>•  RDKit 2D descriptors: 217 raw, 213 retained (3 constant-zero and 1 near-constant descriptor dropped)</a:t>
             </a:r>
@@ -10044,11 +10044,11 @@
               </a:spcAft>
             </a:pPr>
             <a:r>
-              <a:rPr sz="1900" b="0">
+              <a:rPr sz="1900" b="0" dirty="0">
                 <a:solidFill>
                   <a:srgbClr val="142B4D"/>
                 </a:solidFill>
-                <a:latin typeface="Calibri"/>
+                <a:latin typeface="Arial"/>
               </a:rPr>
               <a:t>•  Raw descriptors had 1,224 NaN cells and 6 infinite cells across 107 compounds; these are handled before scaling</a:t>
             </a:r>
@@ -10060,11 +10060,11 @@
               </a:spcAft>
             </a:pPr>
             <a:r>
-              <a:rPr sz="1900" b="0">
+              <a:rPr sz="1900" b="0" dirty="0">
                 <a:solidFill>
                   <a:srgbClr val="142B4D"/>
                 </a:solidFill>
-                <a:latin typeface="Calibri"/>
+                <a:latin typeface="Arial"/>
               </a:rPr>
               <a:t>•  Cleaning and scaling are fit on the training rows only, inside load_features(): no leakage into validation or test</a:t>
             </a:r>
@@ -10076,11 +10076,11 @@
               </a:spcAft>
             </a:pPr>
             <a:r>
-              <a:rPr sz="1900" b="0">
+              <a:rPr sz="1900" b="0" dirty="0">
                 <a:solidFill>
                   <a:srgbClr val="142B4D"/>
                 </a:solidFill>
-                <a:latin typeface="Calibri"/>
+                <a:latin typeface="Arial"/>
               </a:rPr>
               <a:t>•  Morgan bits are binary substructure indicators; descriptors add bulk properties such as logP, polar surface area and molecular weight</a:t>
             </a:r>
@@ -10133,11 +10133,11 @@
               </a:spcAft>
             </a:pPr>
             <a:r>
-              <a:rPr sz="3000" b="1">
+              <a:rPr sz="3000" b="1" dirty="0">
                 <a:solidFill>
                   <a:srgbClr val="142B4D"/>
                 </a:solidFill>
-                <a:latin typeface="Calibri"/>
+                <a:latin typeface="Arial"/>
               </a:rPr>
               <a:t>Models and tuning protocol</a:t>
             </a:r>
@@ -10215,11 +10215,11 @@
               </a:spcAft>
             </a:pPr>
             <a:r>
-              <a:rPr sz="1000" b="0">
+              <a:rPr sz="1000" b="0" dirty="0">
                 <a:solidFill>
                   <a:srgbClr val="555F6B"/>
                 </a:solidFill>
-                <a:latin typeface="Calibri"/>
+                <a:latin typeface="Arial"/>
               </a:rPr>
               <a:t>Tox21 Phase 1  |  classical ML baseline</a:t>
             </a:r>
@@ -10254,11 +10254,11 @@
               </a:spcAft>
             </a:pPr>
             <a:r>
-              <a:rPr sz="1000" b="0">
+              <a:rPr sz="1000" b="0" dirty="0">
                 <a:solidFill>
                   <a:srgbClr val="555F6B"/>
                 </a:solidFill>
-                <a:latin typeface="Calibri"/>
+                <a:latin typeface="Arial"/>
               </a:rPr>
               <a:t>5</a:t>
             </a:r>
@@ -10296,11 +10296,11 @@
                     <a:p>
                       <a:pPr algn="l"/>
                       <a:r>
-                        <a:rPr sz="1300" b="1">
+                        <a:rPr sz="1300" b="1" dirty="0">
                           <a:solidFill>
                             <a:srgbClr val="FFFFFF"/>
                           </a:solidFill>
-                          <a:latin typeface="Calibri"/>
+                          <a:latin typeface="Arial"/>
                         </a:rPr>
                         <a:t>Model</a:t>
                       </a:r>
@@ -10319,11 +10319,11 @@
                     <a:p>
                       <a:pPr algn="ctr"/>
                       <a:r>
-                        <a:rPr sz="1300" b="1">
+                        <a:rPr sz="1300" b="1" dirty="0">
                           <a:solidFill>
                             <a:srgbClr val="FFFFFF"/>
                           </a:solidFill>
-                          <a:latin typeface="Calibri"/>
+                          <a:latin typeface="Arial"/>
                         </a:rPr>
                         <a:t>Features</a:t>
                       </a:r>
@@ -10342,11 +10342,11 @@
                     <a:p>
                       <a:pPr algn="ctr"/>
                       <a:r>
-                        <a:rPr sz="1300" b="1">
+                        <a:rPr sz="1300" b="1" dirty="0">
                           <a:solidFill>
                             <a:srgbClr val="FFFFFF"/>
                           </a:solidFill>
-                          <a:latin typeface="Calibri"/>
+                          <a:latin typeface="Arial"/>
                         </a:rPr>
                         <a:t>Chosen configuration (best_configs.json)</a:t>
                       </a:r>
@@ -10367,11 +10367,11 @@
                     <a:p>
                       <a:pPr algn="l"/>
                       <a:r>
-                        <a:rPr sz="1300" b="0">
-                          <a:solidFill>
-                            <a:srgbClr val="142B4D"/>
-                          </a:solidFill>
-                          <a:latin typeface="Calibri"/>
+                        <a:rPr sz="1300" b="0" dirty="0">
+                          <a:solidFill>
+                            <a:srgbClr val="142B4D"/>
+                          </a:solidFill>
+                          <a:latin typeface="Arial"/>
                         </a:rPr>
                         <a:t>Logistic Regression</a:t>
                       </a:r>
@@ -10390,11 +10390,11 @@
                     <a:p>
                       <a:pPr algn="ctr"/>
                       <a:r>
-                        <a:rPr sz="1300" b="0">
-                          <a:solidFill>
-                            <a:srgbClr val="142B4D"/>
-                          </a:solidFill>
-                          <a:latin typeface="Calibri"/>
+                        <a:rPr sz="1300" b="0" dirty="0">
+                          <a:solidFill>
+                            <a:srgbClr val="142B4D"/>
+                          </a:solidFill>
+                          <a:latin typeface="Arial"/>
                         </a:rPr>
                         <a:t>morgan</a:t>
                       </a:r>
@@ -10413,11 +10413,11 @@
                     <a:p>
                       <a:pPr algn="ctr"/>
                       <a:r>
-                        <a:rPr sz="1300" b="0">
-                          <a:solidFill>
-                            <a:srgbClr val="142B4D"/>
-                          </a:solidFill>
-                          <a:latin typeface="Calibri"/>
+                        <a:rPr sz="1300" b="0" dirty="0">
+                          <a:solidFill>
+                            <a:srgbClr val="142B4D"/>
+                          </a:solidFill>
+                          <a:latin typeface="Arial"/>
                         </a:rPr>
                         <a:t>C = 0.03, l1_ratio = 0.0 (L2 penalty)</a:t>
                       </a:r>
@@ -10438,11 +10438,11 @@
                     <a:p>
                       <a:pPr algn="l"/>
                       <a:r>
-                        <a:rPr sz="1300" b="0">
-                          <a:solidFill>
-                            <a:srgbClr val="142B4D"/>
-                          </a:solidFill>
-                          <a:latin typeface="Calibri"/>
+                        <a:rPr sz="1300" b="0" dirty="0">
+                          <a:solidFill>
+                            <a:srgbClr val="142B4D"/>
+                          </a:solidFill>
+                          <a:latin typeface="Arial"/>
                         </a:rPr>
                         <a:t>Logistic Regression</a:t>
                       </a:r>
@@ -10461,11 +10461,11 @@
                     <a:p>
                       <a:pPr algn="ctr"/>
                       <a:r>
-                        <a:rPr sz="1300" b="0">
-                          <a:solidFill>
-                            <a:srgbClr val="142B4D"/>
-                          </a:solidFill>
-                          <a:latin typeface="Calibri"/>
+                        <a:rPr sz="1300" b="0" dirty="0">
+                          <a:solidFill>
+                            <a:srgbClr val="142B4D"/>
+                          </a:solidFill>
+                          <a:latin typeface="Arial"/>
                         </a:rPr>
                         <a:t>morgan+desc</a:t>
                       </a:r>
@@ -10484,11 +10484,11 @@
                     <a:p>
                       <a:pPr algn="ctr"/>
                       <a:r>
-                        <a:rPr sz="1300" b="0">
-                          <a:solidFill>
-                            <a:srgbClr val="142B4D"/>
-                          </a:solidFill>
-                          <a:latin typeface="Calibri"/>
+                        <a:rPr sz="1300" b="0" dirty="0">
+                          <a:solidFill>
+                            <a:srgbClr val="142B4D"/>
+                          </a:solidFill>
+                          <a:latin typeface="Arial"/>
                         </a:rPr>
                         <a:t>C = 0.03, l1_ratio = 0.0 (L2 penalty)</a:t>
                       </a:r>
@@ -10509,11 +10509,11 @@
                     <a:p>
                       <a:pPr algn="l"/>
                       <a:r>
-                        <a:rPr sz="1300" b="0">
-                          <a:solidFill>
-                            <a:srgbClr val="142B4D"/>
-                          </a:solidFill>
-                          <a:latin typeface="Calibri"/>
+                        <a:rPr sz="1300" b="0" dirty="0">
+                          <a:solidFill>
+                            <a:srgbClr val="142B4D"/>
+                          </a:solidFill>
+                          <a:latin typeface="Arial"/>
                         </a:rPr>
                         <a:t>Random Forest</a:t>
                       </a:r>
@@ -10532,11 +10532,11 @@
                     <a:p>
                       <a:pPr algn="ctr"/>
                       <a:r>
-                        <a:rPr sz="1300" b="0">
-                          <a:solidFill>
-                            <a:srgbClr val="142B4D"/>
-                          </a:solidFill>
-                          <a:latin typeface="Calibri"/>
+                        <a:rPr sz="1300" b="0" dirty="0">
+                          <a:solidFill>
+                            <a:srgbClr val="142B4D"/>
+                          </a:solidFill>
+                          <a:latin typeface="Arial"/>
                         </a:rPr>
                         <a:t>morgan</a:t>
                       </a:r>
@@ -10555,11 +10555,11 @@
                     <a:p>
                       <a:pPr algn="ctr"/>
                       <a:r>
-                        <a:rPr sz="1300" b="0">
-                          <a:solidFill>
-                            <a:srgbClr val="142B4D"/>
-                          </a:solidFill>
-                          <a:latin typeface="Calibri"/>
+                        <a:rPr sz="1300" b="0" dirty="0">
+                          <a:solidFill>
+                            <a:srgbClr val="142B4D"/>
+                          </a:solidFill>
+                          <a:latin typeface="Arial"/>
                         </a:rPr>
                         <a:t>300 trees, max_depth = None, min_samples_leaf = 1</a:t>
                       </a:r>
@@ -10580,11 +10580,11 @@
                     <a:p>
                       <a:pPr algn="l"/>
                       <a:r>
-                        <a:rPr sz="1300" b="0">
-                          <a:solidFill>
-                            <a:srgbClr val="142B4D"/>
-                          </a:solidFill>
-                          <a:latin typeface="Calibri"/>
+                        <a:rPr sz="1300" b="0" dirty="0">
+                          <a:solidFill>
+                            <a:srgbClr val="142B4D"/>
+                          </a:solidFill>
+                          <a:latin typeface="Arial"/>
                         </a:rPr>
                         <a:t>Random Forest</a:t>
                       </a:r>
@@ -10603,11 +10603,11 @@
                     <a:p>
                       <a:pPr algn="ctr"/>
                       <a:r>
-                        <a:rPr sz="1300" b="0">
-                          <a:solidFill>
-                            <a:srgbClr val="142B4D"/>
-                          </a:solidFill>
-                          <a:latin typeface="Calibri"/>
+                        <a:rPr sz="1300" b="0" dirty="0">
+                          <a:solidFill>
+                            <a:srgbClr val="142B4D"/>
+                          </a:solidFill>
+                          <a:latin typeface="Arial"/>
                         </a:rPr>
                         <a:t>morgan+desc</a:t>
                       </a:r>
@@ -10626,11 +10626,11 @@
                     <a:p>
                       <a:pPr algn="ctr"/>
                       <a:r>
-                        <a:rPr sz="1300" b="0">
-                          <a:solidFill>
-                            <a:srgbClr val="142B4D"/>
-                          </a:solidFill>
-                          <a:latin typeface="Calibri"/>
+                        <a:rPr sz="1300" b="0" dirty="0">
+                          <a:solidFill>
+                            <a:srgbClr val="142B4D"/>
+                          </a:solidFill>
+                          <a:latin typeface="Arial"/>
                         </a:rPr>
                         <a:t>300 trees, max_depth = None, min_samples_leaf = 1</a:t>
                       </a:r>
@@ -10651,11 +10651,11 @@
                     <a:p>
                       <a:pPr algn="l"/>
                       <a:r>
-                        <a:rPr sz="1300" b="0">
-                          <a:solidFill>
-                            <a:srgbClr val="142B4D"/>
-                          </a:solidFill>
-                          <a:latin typeface="Calibri"/>
+                        <a:rPr sz="1300" b="0" dirty="0">
+                          <a:solidFill>
+                            <a:srgbClr val="142B4D"/>
+                          </a:solidFill>
+                          <a:latin typeface="Arial"/>
                         </a:rPr>
                         <a:t>XGBoost</a:t>
                       </a:r>
@@ -10674,11 +10674,11 @@
                     <a:p>
                       <a:pPr algn="ctr"/>
                       <a:r>
-                        <a:rPr sz="1300" b="0">
-                          <a:solidFill>
-                            <a:srgbClr val="142B4D"/>
-                          </a:solidFill>
-                          <a:latin typeface="Calibri"/>
+                        <a:rPr sz="1300" b="0" dirty="0">
+                          <a:solidFill>
+                            <a:srgbClr val="142B4D"/>
+                          </a:solidFill>
+                          <a:latin typeface="Arial"/>
                         </a:rPr>
                         <a:t>morgan</a:t>
                       </a:r>
@@ -10697,11 +10697,11 @@
                     <a:p>
                       <a:pPr algn="ctr"/>
                       <a:r>
-                        <a:rPr sz="1300" b="0">
-                          <a:solidFill>
-                            <a:srgbClr val="142B4D"/>
-                          </a:solidFill>
-                          <a:latin typeface="Calibri"/>
+                        <a:rPr sz="1300" b="0" dirty="0">
+                          <a:solidFill>
+                            <a:srgbClr val="142B4D"/>
+                          </a:solidFill>
+                          <a:latin typeface="Arial"/>
                         </a:rPr>
                         <a:t>max_depth = 6, learning_rate = 0.03, 600 trees</a:t>
                       </a:r>
@@ -10722,11 +10722,11 @@
                     <a:p>
                       <a:pPr algn="l"/>
                       <a:r>
-                        <a:rPr sz="1300" b="0">
-                          <a:solidFill>
-                            <a:srgbClr val="142B4D"/>
-                          </a:solidFill>
-                          <a:latin typeface="Calibri"/>
+                        <a:rPr sz="1300" b="0" dirty="0">
+                          <a:solidFill>
+                            <a:srgbClr val="142B4D"/>
+                          </a:solidFill>
+                          <a:latin typeface="Arial"/>
                         </a:rPr>
                         <a:t>XGBoost</a:t>
                       </a:r>
@@ -10745,11 +10745,11 @@
                     <a:p>
                       <a:pPr algn="ctr"/>
                       <a:r>
-                        <a:rPr sz="1300" b="0">
-                          <a:solidFill>
-                            <a:srgbClr val="142B4D"/>
-                          </a:solidFill>
-                          <a:latin typeface="Calibri"/>
+                        <a:rPr sz="1300" b="0" dirty="0">
+                          <a:solidFill>
+                            <a:srgbClr val="142B4D"/>
+                          </a:solidFill>
+                          <a:latin typeface="Arial"/>
                         </a:rPr>
                         <a:t>morgan+desc</a:t>
                       </a:r>
@@ -10768,11 +10768,11 @@
                     <a:p>
                       <a:pPr algn="ctr"/>
                       <a:r>
-                        <a:rPr sz="1300" b="0">
-                          <a:solidFill>
-                            <a:srgbClr val="142B4D"/>
-                          </a:solidFill>
-                          <a:latin typeface="Calibri"/>
+                        <a:rPr sz="1300" b="0" dirty="0">
+                          <a:solidFill>
+                            <a:srgbClr val="142B4D"/>
+                          </a:solidFill>
+                          <a:latin typeface="Arial"/>
                         </a:rPr>
                         <a:t>max_depth = 7, learning_rate = 0.05, 500 trees</a:t>
                       </a:r>
@@ -10817,11 +10817,11 @@
               </a:spcAft>
             </a:pPr>
             <a:r>
-              <a:rPr sz="1600" b="0">
+              <a:rPr sz="1600" b="0" dirty="0">
                 <a:solidFill>
                   <a:srgbClr val="142B4D"/>
                 </a:solidFill>
-                <a:latin typeface="Calibri"/>
+                <a:latin typeface="Arial"/>
               </a:rPr>
               <a:t>•  One classifier per endpoint, labeled training rows only</a:t>
             </a:r>
@@ -10833,11 +10833,11 @@
               </a:spcAft>
             </a:pPr>
             <a:r>
-              <a:rPr sz="1600" b="0">
+              <a:rPr sz="1600" b="0" dirty="0">
                 <a:solidFill>
                   <a:srgbClr val="142B4D"/>
                 </a:solidFill>
-                <a:latin typeface="Calibri"/>
+                <a:latin typeface="Arial"/>
               </a:rPr>
               <a:t>•  Imbalance: class weights (LR, RF), scale_pos_weight (XGBoost)</a:t>
             </a:r>
@@ -10849,11 +10849,11 @@
               </a:spcAft>
             </a:pPr>
             <a:r>
-              <a:rPr sz="1600" b="0">
+              <a:rPr sz="1600" b="0" dirty="0">
                 <a:solidFill>
                   <a:srgbClr val="142B4D"/>
                 </a:solidFill>
-                <a:latin typeface="Calibri"/>
+                <a:latin typeface="Arial"/>
               </a:rPr>
               <a:t>•  Tuning: 8 configs per model and feature set, mean validation PR AUC, seed 0, scaffold split</a:t>
             </a:r>
@@ -10933,11 +10933,11 @@
               </a:spcAft>
             </a:pPr>
             <a:r>
-              <a:rPr sz="2000" b="1">
+              <a:rPr sz="2000" b="1" dirty="0">
                 <a:solidFill>
                   <a:srgbClr val="B23A3A"/>
                 </a:solidFill>
-                <a:latin typeface="Calibri"/>
+                <a:latin typeface="Arial"/>
               </a:rPr>
               <a:t>Freeze proof</a:t>
             </a:r>
@@ -10949,11 +10949,11 @@
               </a:spcAft>
             </a:pPr>
             <a:r>
-              <a:rPr sz="1500" b="0">
+              <a:rPr sz="1500" b="0" dirty="0">
                 <a:solidFill>
                   <a:srgbClr val="142B4D"/>
                 </a:solidFill>
-                <a:latin typeface="Calibri"/>
+                <a:latin typeface="Arial"/>
               </a:rPr>
               <a:t>041892c  2026-10-25 19:41:39 +05:30
 freeze tuned configs before test run</a:t>
@@ -10966,11 +10966,11 @@
               </a:spcAft>
             </a:pPr>
             <a:r>
-              <a:rPr sz="1500" b="0">
+              <a:rPr sz="1500" b="0" dirty="0">
                 <a:solidFill>
                   <a:srgbClr val="555F6B"/>
                 </a:solidFill>
-                <a:latin typeface="Calibri"/>
+                <a:latin typeface="Arial"/>
               </a:rPr>
               <a:t>then</a:t>
             </a:r>
@@ -10982,11 +10982,11 @@
               </a:spcAft>
             </a:pPr>
             <a:r>
-              <a:rPr sz="1500" b="0">
+              <a:rPr sz="1500" b="0" dirty="0">
                 <a:solidFill>
                   <a:srgbClr val="142B4D"/>
                 </a:solidFill>
-                <a:latin typeface="Calibri"/>
+                <a:latin typeface="Arial"/>
               </a:rPr>
               <a:t>043c2ed  2026-10-25 19:52:52 +05:30
 final test results: 432 rows and 36 prediction files</a:t>
@@ -10999,11 +10999,11 @@
               </a:spcAft>
             </a:pPr>
             <a:r>
-              <a:rPr sz="1500" b="0">
+              <a:rPr sz="1500" b="0" dirty="0">
                 <a:solidFill>
                   <a:srgbClr val="142B4D"/>
                 </a:solidFill>
-                <a:latin typeface="Calibri"/>
+                <a:latin typeface="Arial"/>
               </a:rPr>
               <a:t>041892c is an ancestor of 043c2ed. The final-test script refuses to run unless best_configs.json is tracked, unmodified and in git history.</a:t>
             </a:r>
@@ -11056,11 +11056,11 @@
               </a:spcAft>
             </a:pPr>
             <a:r>
-              <a:rPr sz="3000" b="1">
+              <a:rPr sz="3000" b="1" dirty="0">
                 <a:solidFill>
                   <a:srgbClr val="142B4D"/>
                 </a:solidFill>
-                <a:latin typeface="Calibri"/>
+                <a:latin typeface="Arial"/>
               </a:rPr>
               <a:t>Evaluation protocol</a:t>
             </a:r>
@@ -11138,11 +11138,11 @@
               </a:spcAft>
             </a:pPr>
             <a:r>
-              <a:rPr sz="1000" b="0">
+              <a:rPr sz="1000" b="0" dirty="0">
                 <a:solidFill>
                   <a:srgbClr val="555F6B"/>
                 </a:solidFill>
-                <a:latin typeface="Calibri"/>
+                <a:latin typeface="Arial"/>
               </a:rPr>
               <a:t>Tox21 Phase 1  |  classical ML baseline</a:t>
             </a:r>
@@ -11177,11 +11177,11 @@
               </a:spcAft>
             </a:pPr>
             <a:r>
-              <a:rPr sz="1000" b="0">
+              <a:rPr sz="1000" b="0" dirty="0">
                 <a:solidFill>
                   <a:srgbClr val="555F6B"/>
                 </a:solidFill>
-                <a:latin typeface="Calibri"/>
+                <a:latin typeface="Arial"/>
               </a:rPr>
               <a:t>6</a:t>
             </a:r>
@@ -11216,11 +11216,11 @@
               </a:spcAft>
             </a:pPr>
             <a:r>
-              <a:rPr sz="1900" b="0">
+              <a:rPr sz="1900" b="0" dirty="0">
                 <a:solidFill>
                   <a:srgbClr val="142B4D"/>
                 </a:solidFill>
-                <a:latin typeface="Calibri"/>
+                <a:latin typeface="Arial"/>
               </a:rPr>
               <a:t>•  Masked metrics: ROC AUC and PR AUC per endpoint on labeled rows; NaN if an evaluation set has a single class</a:t>
             </a:r>
@@ -11232,11 +11232,11 @@
               </a:spcAft>
             </a:pPr>
             <a:r>
-              <a:rPr sz="1900" b="0">
+              <a:rPr sz="1900" b="0" dirty="0">
                 <a:solidFill>
                   <a:srgbClr val="142B4D"/>
                 </a:solidFill>
-                <a:latin typeface="Calibri"/>
+                <a:latin typeface="Arial"/>
               </a:rPr>
               <a:t>•  PR AUC is shown beside ROC AUC because positives are rare (a random model's PR AUC equals the positive rate)</a:t>
             </a:r>
@@ -11248,11 +11248,11 @@
               </a:spcAft>
             </a:pPr>
             <a:r>
-              <a:rPr sz="1900" b="0">
+              <a:rPr sz="1900" b="0" dirty="0">
                 <a:solidFill>
                   <a:srgbClr val="142B4D"/>
                 </a:solidFill>
-                <a:latin typeface="Calibri"/>
+                <a:latin typeface="Arial"/>
               </a:rPr>
               <a:t>•  Scaffold split (Bemis–Murcko): largest scaffold groups go to train; all 1,753 acyclic molecules are in train, so scaffold validation and test hold only ring systems</a:t>
             </a:r>
@@ -11264,11 +11264,11 @@
               </a:spcAft>
             </a:pPr>
             <a:r>
-              <a:rPr sz="1900" b="0">
+              <a:rPr sz="1900" b="0" dirty="0">
                 <a:solidFill>
                   <a:srgbClr val="142B4D"/>
                 </a:solidFill>
-                <a:latin typeface="Calibri"/>
+                <a:latin typeface="Arial"/>
               </a:rPr>
               <a:t>•  Random split also saved: 6,167 train / 771 validation / 771 test for both splits</a:t>
             </a:r>
@@ -11280,11 +11280,11 @@
               </a:spcAft>
             </a:pPr>
             <a:r>
-              <a:rPr sz="1900" b="0">
+              <a:rPr sz="1900" b="0" dirty="0">
                 <a:solidFill>
                   <a:srgbClr val="142B4D"/>
                 </a:solidFill>
-                <a:latin typeface="Calibri"/>
+                <a:latin typeface="Arial"/>
               </a:rPr>
               <a:t>•  Seeds 0, 1, 2 change model randomness only; the splits are fixed</a:t>
             </a:r>
@@ -11296,11 +11296,11 @@
               </a:spcAft>
             </a:pPr>
             <a:r>
-              <a:rPr sz="1900" b="0">
+              <a:rPr sz="1900" b="0" dirty="0">
                 <a:solidFill>
                   <a:srgbClr val="142B4D"/>
                 </a:solidFill>
-                <a:latin typeface="Calibri"/>
+                <a:latin typeface="Arial"/>
               </a:rPr>
               <a:t>•  432 final classifiers = 3 models × 2 feature sets × 2 splits × 3 seeds × 12 endpoints</a:t>
             </a:r>
@@ -11312,11 +11312,11 @@
               </a:spcAft>
             </a:pPr>
             <a:r>
-              <a:rPr sz="1900" b="0">
+              <a:rPr sz="1900" b="0" dirty="0">
                 <a:solidFill>
                   <a:srgbClr val="142B4D"/>
                 </a:solidFill>
-                <a:latin typeface="Calibri"/>
+                <a:latin typeface="Arial"/>
               </a:rPr>
               <a:t>•  Scaffold test has 20 (NR-AR-LBD) to 109 (SR-ARE) positives per endpoint, so endpoint scores are noisy</a:t>
             </a:r>
@@ -11369,11 +11369,11 @@
               </a:spcAft>
             </a:pPr>
             <a:r>
-              <a:rPr sz="3000" b="1">
+              <a:rPr sz="3000" b="1" dirty="0">
                 <a:solidFill>
                   <a:srgbClr val="142B4D"/>
                 </a:solidFill>
-                <a:latin typeface="Calibri"/>
+                <a:latin typeface="Arial"/>
               </a:rPr>
               <a:t>Results: scaffold test split</a:t>
             </a:r>
@@ -11451,11 +11451,11 @@
               </a:spcAft>
             </a:pPr>
             <a:r>
-              <a:rPr sz="1000" b="0">
+              <a:rPr sz="1000" b="0" dirty="0">
                 <a:solidFill>
                   <a:srgbClr val="555F6B"/>
                 </a:solidFill>
-                <a:latin typeface="Calibri"/>
+                <a:latin typeface="Arial"/>
               </a:rPr>
               <a:t>Tox21 Phase 1  |  classical ML baseline</a:t>
             </a:r>
@@ -11490,11 +11490,11 @@
               </a:spcAft>
             </a:pPr>
             <a:r>
-              <a:rPr sz="1000" b="0">
+              <a:rPr sz="1000" b="0" dirty="0">
                 <a:solidFill>
                   <a:srgbClr val="555F6B"/>
                 </a:solidFill>
-                <a:latin typeface="Calibri"/>
+                <a:latin typeface="Arial"/>
               </a:rPr>
               <a:t>7</a:t>
             </a:r>
@@ -11533,11 +11533,11 @@
                     <a:p>
                       <a:pPr algn="l"/>
                       <a:r>
-                        <a:rPr sz="1500" b="1">
+                        <a:rPr sz="1500" b="1" dirty="0">
                           <a:solidFill>
                             <a:srgbClr val="FFFFFF"/>
                           </a:solidFill>
-                          <a:latin typeface="Calibri"/>
+                          <a:latin typeface="Arial"/>
                         </a:rPr>
                         <a:t>Model</a:t>
                       </a:r>
@@ -11556,11 +11556,11 @@
                     <a:p>
                       <a:pPr algn="ctr"/>
                       <a:r>
-                        <a:rPr sz="1500" b="1">
+                        <a:rPr sz="1500" b="1" dirty="0">
                           <a:solidFill>
                             <a:srgbClr val="FFFFFF"/>
                           </a:solidFill>
-                          <a:latin typeface="Calibri"/>
+                          <a:latin typeface="Arial"/>
                         </a:rPr>
                         <a:t>Features</a:t>
                       </a:r>
@@ -11579,11 +11579,11 @@
                     <a:p>
                       <a:pPr algn="ctr"/>
                       <a:r>
-                        <a:rPr sz="1500" b="1">
+                        <a:rPr sz="1500" b="1" dirty="0">
                           <a:solidFill>
                             <a:srgbClr val="FFFFFF"/>
                           </a:solidFill>
-                          <a:latin typeface="Calibri"/>
+                          <a:latin typeface="Arial"/>
                         </a:rPr>
                         <a:t>ROC AUC</a:t>
                       </a:r>
@@ -11602,11 +11602,11 @@
                     <a:p>
                       <a:pPr algn="ctr"/>
                       <a:r>
-                        <a:rPr sz="1500" b="1">
+                        <a:rPr sz="1500" b="1" dirty="0">
                           <a:solidFill>
                             <a:srgbClr val="FFFFFF"/>
                           </a:solidFill>
-                          <a:latin typeface="Calibri"/>
+                          <a:latin typeface="Arial"/>
                         </a:rPr>
                         <a:t>PR AUC</a:t>
                       </a:r>
@@ -11627,11 +11627,11 @@
                     <a:p>
                       <a:pPr algn="l"/>
                       <a:r>
-                        <a:rPr sz="1500" b="0">
-                          <a:solidFill>
-                            <a:srgbClr val="142B4D"/>
-                          </a:solidFill>
-                          <a:latin typeface="Calibri"/>
+                        <a:rPr sz="1500" b="0" dirty="0">
+                          <a:solidFill>
+                            <a:srgbClr val="142B4D"/>
+                          </a:solidFill>
+                          <a:latin typeface="Arial"/>
                         </a:rPr>
                         <a:t>Logistic Regression</a:t>
                       </a:r>
@@ -11650,11 +11650,11 @@
                     <a:p>
                       <a:pPr algn="ctr"/>
                       <a:r>
-                        <a:rPr sz="1500" b="0">
-                          <a:solidFill>
-                            <a:srgbClr val="142B4D"/>
-                          </a:solidFill>
-                          <a:latin typeface="Calibri"/>
+                        <a:rPr sz="1500" b="0" dirty="0">
+                          <a:solidFill>
+                            <a:srgbClr val="142B4D"/>
+                          </a:solidFill>
+                          <a:latin typeface="Arial"/>
                         </a:rPr>
                         <a:t>Morgan Only</a:t>
                       </a:r>
@@ -11673,11 +11673,11 @@
                     <a:p>
                       <a:pPr algn="ctr"/>
                       <a:r>
-                        <a:rPr sz="1500" b="0">
-                          <a:solidFill>
-                            <a:srgbClr val="142B4D"/>
-                          </a:solidFill>
-                          <a:latin typeface="Calibri"/>
+                        <a:rPr sz="1500" b="0" dirty="0">
+                          <a:solidFill>
+                            <a:srgbClr val="142B4D"/>
+                          </a:solidFill>
+                          <a:latin typeface="Arial"/>
                         </a:rPr>
                         <a:t>0.7156 ± 0.0000</a:t>
                       </a:r>
@@ -11696,11 +11696,11 @@
                     <a:p>
                       <a:pPr algn="ctr"/>
                       <a:r>
-                        <a:rPr sz="1500" b="0">
-                          <a:solidFill>
-                            <a:srgbClr val="142B4D"/>
-                          </a:solidFill>
-                          <a:latin typeface="Calibri"/>
+                        <a:rPr sz="1500" b="0" dirty="0">
+                          <a:solidFill>
+                            <a:srgbClr val="142B4D"/>
+                          </a:solidFill>
+                          <a:latin typeface="Arial"/>
                         </a:rPr>
                         <a:t>0.3116 ± 0.0000</a:t>
                       </a:r>
@@ -11721,11 +11721,11 @@
                     <a:p>
                       <a:pPr algn="l"/>
                       <a:r>
-                        <a:rPr sz="1500" b="0">
-                          <a:solidFill>
-                            <a:srgbClr val="142B4D"/>
-                          </a:solidFill>
-                          <a:latin typeface="Calibri"/>
+                        <a:rPr sz="1500" b="0" dirty="0">
+                          <a:solidFill>
+                            <a:srgbClr val="142B4D"/>
+                          </a:solidFill>
+                          <a:latin typeface="Arial"/>
                         </a:rPr>
                         <a:t>Logistic Regression</a:t>
                       </a:r>
@@ -11744,11 +11744,11 @@
                     <a:p>
                       <a:pPr algn="ctr"/>
                       <a:r>
-                        <a:rPr sz="1500" b="0">
-                          <a:solidFill>
-                            <a:srgbClr val="142B4D"/>
-                          </a:solidFill>
-                          <a:latin typeface="Calibri"/>
+                        <a:rPr sz="1500" b="0" dirty="0">
+                          <a:solidFill>
+                            <a:srgbClr val="142B4D"/>
+                          </a:solidFill>
+                          <a:latin typeface="Arial"/>
                         </a:rPr>
                         <a:t>Morgan + Desc</a:t>
                       </a:r>
@@ -11767,11 +11767,11 @@
                     <a:p>
                       <a:pPr algn="ctr"/>
                       <a:r>
-                        <a:rPr sz="1500" b="0">
-                          <a:solidFill>
-                            <a:srgbClr val="142B4D"/>
-                          </a:solidFill>
-                          <a:latin typeface="Calibri"/>
+                        <a:rPr sz="1500" b="0" dirty="0">
+                          <a:solidFill>
+                            <a:srgbClr val="142B4D"/>
+                          </a:solidFill>
+                          <a:latin typeface="Arial"/>
                         </a:rPr>
                         <a:t>0.7317 ± 0.0000</a:t>
                       </a:r>
@@ -11790,11 +11790,11 @@
                     <a:p>
                       <a:pPr algn="ctr"/>
                       <a:r>
-                        <a:rPr sz="1500" b="0">
-                          <a:solidFill>
-                            <a:srgbClr val="142B4D"/>
-                          </a:solidFill>
-                          <a:latin typeface="Calibri"/>
+                        <a:rPr sz="1500" b="0" dirty="0">
+                          <a:solidFill>
+                            <a:srgbClr val="142B4D"/>
+                          </a:solidFill>
+                          <a:latin typeface="Arial"/>
                         </a:rPr>
                         <a:t>0.3122 ± 0.0000</a:t>
                       </a:r>
@@ -11815,11 +11815,11 @@
                     <a:p>
                       <a:pPr algn="l"/>
                       <a:r>
-                        <a:rPr sz="1500" b="0">
-                          <a:solidFill>
-                            <a:srgbClr val="142B4D"/>
-                          </a:solidFill>
-                          <a:latin typeface="Calibri"/>
+                        <a:rPr sz="1500" b="0" dirty="0">
+                          <a:solidFill>
+                            <a:srgbClr val="142B4D"/>
+                          </a:solidFill>
+                          <a:latin typeface="Arial"/>
                         </a:rPr>
                         <a:t>Random Forest</a:t>
                       </a:r>
@@ -11838,11 +11838,11 @@
                     <a:p>
                       <a:pPr algn="ctr"/>
                       <a:r>
-                        <a:rPr sz="1500" b="0">
-                          <a:solidFill>
-                            <a:srgbClr val="142B4D"/>
-                          </a:solidFill>
-                          <a:latin typeface="Calibri"/>
+                        <a:rPr sz="1500" b="0" dirty="0">
+                          <a:solidFill>
+                            <a:srgbClr val="142B4D"/>
+                          </a:solidFill>
+                          <a:latin typeface="Arial"/>
                         </a:rPr>
                         <a:t>Morgan Only</a:t>
                       </a:r>
@@ -11861,11 +11861,11 @@
                     <a:p>
                       <a:pPr algn="ctr"/>
                       <a:r>
-                        <a:rPr sz="1500" b="0">
-                          <a:solidFill>
-                            <a:srgbClr val="142B4D"/>
-                          </a:solidFill>
-                          <a:latin typeface="Calibri"/>
+                        <a:rPr sz="1500" b="0" dirty="0">
+                          <a:solidFill>
+                            <a:srgbClr val="142B4D"/>
+                          </a:solidFill>
+                          <a:latin typeface="Arial"/>
                         </a:rPr>
                         <a:t>0.7288 ± 0.0063</a:t>
                       </a:r>
@@ -11884,11 +11884,11 @@
                     <a:p>
                       <a:pPr algn="ctr"/>
                       <a:r>
-                        <a:rPr sz="1500" b="0">
-                          <a:solidFill>
-                            <a:srgbClr val="142B4D"/>
-                          </a:solidFill>
-                          <a:latin typeface="Calibri"/>
+                        <a:rPr sz="1500" b="0" dirty="0">
+                          <a:solidFill>
+                            <a:srgbClr val="142B4D"/>
+                          </a:solidFill>
+                          <a:latin typeface="Arial"/>
                         </a:rPr>
                         <a:t>0.3703 ± 0.0016</a:t>
                       </a:r>
@@ -11909,11 +11909,11 @@
                     <a:p>
                       <a:pPr algn="l"/>
                       <a:r>
-                        <a:rPr sz="1500" b="0">
-                          <a:solidFill>
-                            <a:srgbClr val="142B4D"/>
-                          </a:solidFill>
-                          <a:latin typeface="Calibri"/>
+                        <a:rPr sz="1500" b="0" dirty="0">
+                          <a:solidFill>
+                            <a:srgbClr val="142B4D"/>
+                          </a:solidFill>
+                          <a:latin typeface="Arial"/>
                         </a:rPr>
                         <a:t>Random Forest</a:t>
                       </a:r>
@@ -11932,11 +11932,11 @@
                     <a:p>
                       <a:pPr algn="ctr"/>
                       <a:r>
-                        <a:rPr sz="1500" b="0">
-                          <a:solidFill>
-                            <a:srgbClr val="142B4D"/>
-                          </a:solidFill>
-                          <a:latin typeface="Calibri"/>
+                        <a:rPr sz="1500" b="0" dirty="0">
+                          <a:solidFill>
+                            <a:srgbClr val="142B4D"/>
+                          </a:solidFill>
+                          <a:latin typeface="Arial"/>
                         </a:rPr>
                         <a:t>Morgan + Desc</a:t>
                       </a:r>
@@ -11955,11 +11955,11 @@
                     <a:p>
                       <a:pPr algn="ctr"/>
                       <a:r>
-                        <a:rPr sz="1500" b="1">
-                          <a:solidFill>
-                            <a:srgbClr val="142B4D"/>
-                          </a:solidFill>
-                          <a:latin typeface="Calibri"/>
+                        <a:rPr sz="1500" b="1" dirty="0">
+                          <a:solidFill>
+                            <a:srgbClr val="142B4D"/>
+                          </a:solidFill>
+                          <a:latin typeface="Arial"/>
                         </a:rPr>
                         <a:t>0.7762 ± 0.0020</a:t>
                       </a:r>
@@ -11967,22 +11967,22 @@
                   </a:txBody>
                   <a:tcPr marL="54864" marR="54864" marT="18288" marB="18288" anchor="ctr">
                     <a:solidFill>
-                      <a:srgbClr val="FFFFFF"/>
-                    </a:solidFill>
-                  </a:tcPr>
-                </a:tc>
-                <a:tc>
-                  <a:txBody>
-                    <a:bodyPr wrap="square"/>
-                    <a:lstStyle/>
-                    <a:p>
-                      <a:pPr algn="ctr"/>
-                      <a:r>
-                        <a:rPr sz="1500" b="1">
-                          <a:solidFill>
-                            <a:srgbClr val="142B4D"/>
-                          </a:solidFill>
-                          <a:latin typeface="Calibri"/>
+                      <a:srgbClr val="D8EFEA"/>
+                    </a:solidFill>
+                  </a:tcPr>
+                </a:tc>
+                <a:tc>
+                  <a:txBody>
+                    <a:bodyPr wrap="square"/>
+                    <a:lstStyle/>
+                    <a:p>
+                      <a:pPr algn="ctr"/>
+                      <a:r>
+                        <a:rPr sz="1500" b="1" dirty="0">
+                          <a:solidFill>
+                            <a:srgbClr val="142B4D"/>
+                          </a:solidFill>
+                          <a:latin typeface="Arial"/>
                         </a:rPr>
                         <a:t>0.4035 ± 0.0042</a:t>
                       </a:r>
@@ -11990,7 +11990,7 @@
                   </a:txBody>
                   <a:tcPr marL="54864" marR="54864" marT="18288" marB="18288" anchor="ctr">
                     <a:solidFill>
-                      <a:srgbClr val="FFFFFF"/>
+                      <a:srgbClr val="D8EFEA"/>
                     </a:solidFill>
                   </a:tcPr>
                 </a:tc>
@@ -12003,11 +12003,11 @@
                     <a:p>
                       <a:pPr algn="l"/>
                       <a:r>
-                        <a:rPr sz="1500" b="0">
-                          <a:solidFill>
-                            <a:srgbClr val="142B4D"/>
-                          </a:solidFill>
-                          <a:latin typeface="Calibri"/>
+                        <a:rPr sz="1500" b="0" dirty="0">
+                          <a:solidFill>
+                            <a:srgbClr val="142B4D"/>
+                          </a:solidFill>
+                          <a:latin typeface="Arial"/>
                         </a:rPr>
                         <a:t>XGBoost</a:t>
                       </a:r>
@@ -12026,11 +12026,11 @@
                     <a:p>
                       <a:pPr algn="ctr"/>
                       <a:r>
-                        <a:rPr sz="1500" b="0">
-                          <a:solidFill>
-                            <a:srgbClr val="142B4D"/>
-                          </a:solidFill>
-                          <a:latin typeface="Calibri"/>
+                        <a:rPr sz="1500" b="0" dirty="0">
+                          <a:solidFill>
+                            <a:srgbClr val="142B4D"/>
+                          </a:solidFill>
+                          <a:latin typeface="Arial"/>
                         </a:rPr>
                         <a:t>Morgan Only</a:t>
                       </a:r>
@@ -12049,11 +12049,11 @@
                     <a:p>
                       <a:pPr algn="ctr"/>
                       <a:r>
-                        <a:rPr sz="1500" b="0">
-                          <a:solidFill>
-                            <a:srgbClr val="142B4D"/>
-                          </a:solidFill>
-                          <a:latin typeface="Calibri"/>
+                        <a:rPr sz="1500" b="0" dirty="0">
+                          <a:solidFill>
+                            <a:srgbClr val="142B4D"/>
+                          </a:solidFill>
+                          <a:latin typeface="Arial"/>
                         </a:rPr>
                         <a:t>0.7020 ± 0.0025</a:t>
                       </a:r>
@@ -12072,11 +12072,11 @@
                     <a:p>
                       <a:pPr algn="ctr"/>
                       <a:r>
-                        <a:rPr sz="1500" b="0">
-                          <a:solidFill>
-                            <a:srgbClr val="142B4D"/>
-                          </a:solidFill>
-                          <a:latin typeface="Calibri"/>
+                        <a:rPr sz="1500" b="0" dirty="0">
+                          <a:solidFill>
+                            <a:srgbClr val="142B4D"/>
+                          </a:solidFill>
+                          <a:latin typeface="Arial"/>
                         </a:rPr>
                         <a:t>0.3180 ± 0.0020</a:t>
                       </a:r>
@@ -12097,11 +12097,11 @@
                     <a:p>
                       <a:pPr algn="l"/>
                       <a:r>
-                        <a:rPr sz="1500" b="0">
-                          <a:solidFill>
-                            <a:srgbClr val="142B4D"/>
-                          </a:solidFill>
-                          <a:latin typeface="Calibri"/>
+                        <a:rPr sz="1500" b="0" dirty="0">
+                          <a:solidFill>
+                            <a:srgbClr val="142B4D"/>
+                          </a:solidFill>
+                          <a:latin typeface="Arial"/>
                         </a:rPr>
                         <a:t>XGBoost</a:t>
                       </a:r>
@@ -12120,11 +12120,11 @@
                     <a:p>
                       <a:pPr algn="ctr"/>
                       <a:r>
-                        <a:rPr sz="1500" b="0">
-                          <a:solidFill>
-                            <a:srgbClr val="142B4D"/>
-                          </a:solidFill>
-                          <a:latin typeface="Calibri"/>
+                        <a:rPr sz="1500" b="0" dirty="0">
+                          <a:solidFill>
+                            <a:srgbClr val="142B4D"/>
+                          </a:solidFill>
+                          <a:latin typeface="Arial"/>
                         </a:rPr>
                         <a:t>Morgan + Desc</a:t>
                       </a:r>
@@ -12143,11 +12143,11 @@
                     <a:p>
                       <a:pPr algn="ctr"/>
                       <a:r>
-                        <a:rPr sz="1500" b="0">
-                          <a:solidFill>
-                            <a:srgbClr val="142B4D"/>
-                          </a:solidFill>
-                          <a:latin typeface="Calibri"/>
+                        <a:rPr sz="1500" b="0" dirty="0">
+                          <a:solidFill>
+                            <a:srgbClr val="142B4D"/>
+                          </a:solidFill>
+                          <a:latin typeface="Arial"/>
                         </a:rPr>
                         <a:t>0.7606 ± 0.0036</a:t>
                       </a:r>
@@ -12166,11 +12166,11 @@
                     <a:p>
                       <a:pPr algn="ctr"/>
                       <a:r>
-                        <a:rPr sz="1500" b="0">
-                          <a:solidFill>
-                            <a:srgbClr val="142B4D"/>
-                          </a:solidFill>
-                          <a:latin typeface="Calibri"/>
+                        <a:rPr sz="1500" b="0" dirty="0">
+                          <a:solidFill>
+                            <a:srgbClr val="142B4D"/>
+                          </a:solidFill>
+                          <a:latin typeface="Arial"/>
                         </a:rPr>
                         <a:t>0.4010 ± 0.0045</a:t>
                       </a:r>
@@ -12215,13 +12215,13 @@
               </a:spcAft>
             </a:pPr>
             <a:r>
-              <a:rPr sz="1400" b="0">
+              <a:rPr sz="1400" b="0" dirty="0">
                 <a:solidFill>
                   <a:srgbClr val="555F6B"/>
                 </a:solidFill>
-                <a:latin typeface="Calibri"/>
+                <a:latin typeface="Arial"/>
               </a:rPr>
-              <a:t>Scaffold test, mean over 12 endpoints, then mean ± sample sd over seeds 0, 1, 2. Bold = highest value in the column. LR is deterministic (sd 0.0000).</a:t>
+              <a:t>Scaffold test; mean over 12 endpoints, then mean ± sample sd over seeds 0, 1, 2. Bold + teal highlight marks the column best. LR is deterministic (sd 0.0000).</a:t>
             </a:r>
           </a:p>
         </p:txBody>
@@ -12254,11 +12254,11 @@
               </a:spcAft>
             </a:pPr>
             <a:r>
-              <a:rPr sz="1900" b="1">
+              <a:rPr sz="1900" b="1" dirty="0">
                 <a:solidFill>
                   <a:srgbClr val="142B4D"/>
                 </a:solidFill>
-                <a:latin typeface="Calibri"/>
+                <a:latin typeface="Arial"/>
               </a:rPr>
               <a:t>Reading the table</a:t>
             </a:r>
@@ -12270,11 +12270,11 @@
               </a:spcAft>
             </a:pPr>
             <a:r>
-              <a:rPr sz="1600" b="0">
+              <a:rPr sz="1600" b="0" dirty="0">
                 <a:solidFill>
                   <a:srgbClr val="142B4D"/>
                 </a:solidFill>
-                <a:latin typeface="Calibri"/>
+                <a:latin typeface="Arial"/>
               </a:rPr>
               <a:t>•  Random Forest + descriptors has the highest mean ROC (0.7762) and PR AUC (0.4035) in our runs</a:t>
             </a:r>
@@ -12286,11 +12286,11 @@
               </a:spcAft>
             </a:pPr>
             <a:r>
-              <a:rPr sz="1600" b="0">
+              <a:rPr sz="1600" b="0" dirty="0">
                 <a:solidFill>
                   <a:srgbClr val="142B4D"/>
                 </a:solidFill>
-                <a:latin typeface="Calibri"/>
+                <a:latin typeface="Arial"/>
               </a:rPr>
               <a:t>•  XGBoost + descriptors is close: 0.7606 / 0.4010. The PR gap (about 0.003) is below the seed sd (0.004–0.0045)</a:t>
             </a:r>
@@ -12302,11 +12302,11 @@
               </a:spcAft>
             </a:pPr>
             <a:r>
-              <a:rPr sz="1600" b="0">
+              <a:rPr sz="1600" b="0" dirty="0">
                 <a:solidFill>
                   <a:srgbClr val="142B4D"/>
                 </a:solidFill>
-                <a:latin typeface="Calibri"/>
+                <a:latin typeface="Arial"/>
               </a:rPr>
               <a:t>•  With Morgan only, XGBoost ROC (0.7020) is below Logistic Regression (0.7156)</a:t>
             </a:r>
@@ -12359,11 +12359,11 @@
               </a:spcAft>
             </a:pPr>
             <a:r>
-              <a:rPr sz="3000" b="1">
+              <a:rPr sz="3000" b="1" dirty="0">
                 <a:solidFill>
                   <a:srgbClr val="142B4D"/>
                 </a:solidFill>
-                <a:latin typeface="Calibri"/>
+                <a:latin typeface="Arial"/>
               </a:rPr>
               <a:t>Do descriptors help? Paired gain from adding them</a:t>
             </a:r>
@@ -12441,11 +12441,11 @@
               </a:spcAft>
             </a:pPr>
             <a:r>
-              <a:rPr sz="1000" b="0">
+              <a:rPr sz="1000" b="0" dirty="0">
                 <a:solidFill>
                   <a:srgbClr val="555F6B"/>
                 </a:solidFill>
-                <a:latin typeface="Calibri"/>
+                <a:latin typeface="Arial"/>
               </a:rPr>
               <a:t>Tox21 Phase 1  |  classical ML baseline</a:t>
             </a:r>
@@ -12480,11 +12480,11 @@
               </a:spcAft>
             </a:pPr>
             <a:r>
-              <a:rPr sz="1000" b="0">
+              <a:rPr sz="1000" b="0" dirty="0">
                 <a:solidFill>
                   <a:srgbClr val="555F6B"/>
                 </a:solidFill>
-                <a:latin typeface="Calibri"/>
+                <a:latin typeface="Arial"/>
               </a:rPr>
               <a:t>8</a:t>
             </a:r>
@@ -12522,11 +12522,11 @@
                     <a:p>
                       <a:pPr algn="l"/>
                       <a:r>
-                        <a:rPr sz="1600" b="1">
+                        <a:rPr sz="1600" b="1" dirty="0">
                           <a:solidFill>
                             <a:srgbClr val="FFFFFF"/>
                           </a:solidFill>
-                          <a:latin typeface="Calibri"/>
+                          <a:latin typeface="Arial"/>
                         </a:rPr>
                         <a:t>Model</a:t>
                       </a:r>
@@ -12545,11 +12545,11 @@
                     <a:p>
                       <a:pPr algn="ctr"/>
                       <a:r>
-                        <a:rPr sz="1600" b="1">
+                        <a:rPr sz="1600" b="1" dirty="0">
                           <a:solidFill>
                             <a:srgbClr val="FFFFFF"/>
                           </a:solidFill>
-                          <a:latin typeface="Calibri"/>
+                          <a:latin typeface="Arial"/>
                         </a:rPr>
                         <a:t>Δ ROC AUC (mean ± sd)</a:t>
                       </a:r>
@@ -12568,11 +12568,11 @@
                     <a:p>
                       <a:pPr algn="ctr"/>
                       <a:r>
-                        <a:rPr sz="1600" b="1">
+                        <a:rPr sz="1600" b="1" dirty="0">
                           <a:solidFill>
                             <a:srgbClr val="FFFFFF"/>
                           </a:solidFill>
-                          <a:latin typeface="Calibri"/>
+                          <a:latin typeface="Arial"/>
                         </a:rPr>
                         <a:t>Δ PR AUC (mean ± sd)</a:t>
                       </a:r>
@@ -12593,11 +12593,11 @@
                     <a:p>
                       <a:pPr algn="l"/>
                       <a:r>
-                        <a:rPr sz="1600" b="0">
-                          <a:solidFill>
-                            <a:srgbClr val="142B4D"/>
-                          </a:solidFill>
-                          <a:latin typeface="Calibri"/>
+                        <a:rPr sz="1600" b="0" dirty="0">
+                          <a:solidFill>
+                            <a:srgbClr val="142B4D"/>
+                          </a:solidFill>
+                          <a:latin typeface="Arial"/>
                         </a:rPr>
                         <a:t>Logistic Regression</a:t>
                       </a:r>
@@ -12616,11 +12616,11 @@
                     <a:p>
                       <a:pPr algn="ctr"/>
                       <a:r>
-                        <a:rPr sz="1600" b="0">
-                          <a:solidFill>
-                            <a:srgbClr val="142B4D"/>
-                          </a:solidFill>
-                          <a:latin typeface="Calibri"/>
+                        <a:rPr sz="1600" b="0" dirty="0">
+                          <a:solidFill>
+                            <a:srgbClr val="142B4D"/>
+                          </a:solidFill>
+                          <a:latin typeface="Arial"/>
                         </a:rPr>
                         <a:t>+0.0162 ± 0.0000</a:t>
                       </a:r>
@@ -12639,11 +12639,11 @@
                     <a:p>
                       <a:pPr algn="ctr"/>
                       <a:r>
-                        <a:rPr sz="1600" b="0">
-                          <a:solidFill>
-                            <a:srgbClr val="142B4D"/>
-                          </a:solidFill>
-                          <a:latin typeface="Calibri"/>
+                        <a:rPr sz="1600" b="0" dirty="0">
+                          <a:solidFill>
+                            <a:srgbClr val="142B4D"/>
+                          </a:solidFill>
+                          <a:latin typeface="Arial"/>
                         </a:rPr>
                         <a:t>+0.0006 ± 0.0000</a:t>
                       </a:r>
@@ -12664,11 +12664,11 @@
                     <a:p>
                       <a:pPr algn="l"/>
                       <a:r>
-                        <a:rPr sz="1600" b="0">
-                          <a:solidFill>
-                            <a:srgbClr val="142B4D"/>
-                          </a:solidFill>
-                          <a:latin typeface="Calibri"/>
+                        <a:rPr sz="1600" b="0" dirty="0">
+                          <a:solidFill>
+                            <a:srgbClr val="142B4D"/>
+                          </a:solidFill>
+                          <a:latin typeface="Arial"/>
                         </a:rPr>
                         <a:t>Random Forest</a:t>
                       </a:r>
@@ -12687,11 +12687,11 @@
                     <a:p>
                       <a:pPr algn="ctr"/>
                       <a:r>
-                        <a:rPr sz="1600" b="0">
-                          <a:solidFill>
-                            <a:srgbClr val="142B4D"/>
-                          </a:solidFill>
-                          <a:latin typeface="Calibri"/>
+                        <a:rPr sz="1600" b="0" dirty="0">
+                          <a:solidFill>
+                            <a:srgbClr val="142B4D"/>
+                          </a:solidFill>
+                          <a:latin typeface="Arial"/>
                         </a:rPr>
                         <a:t>+0.0474 ± 0.0074</a:t>
                       </a:r>
@@ -12710,11 +12710,11 @@
                     <a:p>
                       <a:pPr algn="ctr"/>
                       <a:r>
-                        <a:rPr sz="1600" b="0">
-                          <a:solidFill>
-                            <a:srgbClr val="142B4D"/>
-                          </a:solidFill>
-                          <a:latin typeface="Calibri"/>
+                        <a:rPr sz="1600" b="0" dirty="0">
+                          <a:solidFill>
+                            <a:srgbClr val="142B4D"/>
+                          </a:solidFill>
+                          <a:latin typeface="Arial"/>
                         </a:rPr>
                         <a:t>+0.0333 ± 0.0031</a:t>
                       </a:r>
@@ -12735,11 +12735,11 @@
                     <a:p>
                       <a:pPr algn="l"/>
                       <a:r>
-                        <a:rPr sz="1600" b="0">
-                          <a:solidFill>
-                            <a:srgbClr val="142B4D"/>
-                          </a:solidFill>
-                          <a:latin typeface="Calibri"/>
+                        <a:rPr sz="1600" b="0" dirty="0">
+                          <a:solidFill>
+                            <a:srgbClr val="142B4D"/>
+                          </a:solidFill>
+                          <a:latin typeface="Arial"/>
                         </a:rPr>
                         <a:t>XGBoost</a:t>
                       </a:r>
@@ -12758,11 +12758,11 @@
                     <a:p>
                       <a:pPr algn="ctr"/>
                       <a:r>
-                        <a:rPr sz="1600" b="0">
-                          <a:solidFill>
-                            <a:srgbClr val="142B4D"/>
-                          </a:solidFill>
-                          <a:latin typeface="Calibri"/>
+                        <a:rPr sz="1600" b="0" dirty="0">
+                          <a:solidFill>
+                            <a:srgbClr val="142B4D"/>
+                          </a:solidFill>
+                          <a:latin typeface="Arial"/>
                         </a:rPr>
                         <a:t>+0.0586 ± 0.0059</a:t>
                       </a:r>
@@ -12781,11 +12781,11 @@
                     <a:p>
                       <a:pPr algn="ctr"/>
                       <a:r>
-                        <a:rPr sz="1600" b="0">
-                          <a:solidFill>
-                            <a:srgbClr val="142B4D"/>
-                          </a:solidFill>
-                          <a:latin typeface="Calibri"/>
+                        <a:rPr sz="1600" b="0" dirty="0">
+                          <a:solidFill>
+                            <a:srgbClr val="142B4D"/>
+                          </a:solidFill>
+                          <a:latin typeface="Arial"/>
                         </a:rPr>
                         <a:t>+0.0829 ± 0.0025</a:t>
                       </a:r>
@@ -12830,11 +12830,11 @@
               </a:spcAft>
             </a:pPr>
             <a:r>
-              <a:rPr sz="1800" b="0">
+              <a:rPr sz="1800" b="0" dirty="0">
                 <a:solidFill>
                   <a:srgbClr val="142B4D"/>
                 </a:solidFill>
-                <a:latin typeface="Calibri"/>
+                <a:latin typeface="Arial"/>
               </a:rPr>
               <a:t>•  Logistic Regression: PR AUC gain is +0.0006, i.e. essentially none</a:t>
             </a:r>
@@ -12846,11 +12846,11 @@
               </a:spcAft>
             </a:pPr>
             <a:r>
-              <a:rPr sz="1800" b="0">
+              <a:rPr sz="1800" b="0" dirty="0">
                 <a:solidFill>
                   <a:srgbClr val="142B4D"/>
                 </a:solidFill>
-                <a:latin typeface="Calibri"/>
+                <a:latin typeface="Arial"/>
               </a:rPr>
               <a:t>•  Random Forest and XGBoost gain more: PR +0.0333 and +0.0829</a:t>
             </a:r>
@@ -12862,11 +12862,11 @@
               </a:spcAft>
             </a:pPr>
             <a:r>
-              <a:rPr sz="1800" b="0">
+              <a:rPr sz="1800" b="0" dirty="0">
                 <a:solidFill>
                   <a:srgbClr val="555F6B"/>
                 </a:solidFill>
-                <a:latin typeface="Calibri"/>
+                <a:latin typeface="Arial"/>
               </a:rPr>
               <a:t>•  Δ = morgan+desc minus morgan, scaffold test, paired by seed</a:t>
             </a:r>
@@ -12943,11 +12943,11 @@
               </a:spcAft>
             </a:pPr>
             <a:r>
-              <a:rPr sz="3000" b="1">
+              <a:rPr sz="3000" b="1" dirty="0">
                 <a:solidFill>
                   <a:srgbClr val="142B4D"/>
                 </a:solidFill>
-                <a:latin typeface="Calibri"/>
+                <a:latin typeface="Arial"/>
               </a:rPr>
               <a:t>Random vs scaffold split: the generalization gap</a:t>
             </a:r>
@@ -13025,11 +13025,11 @@
               </a:spcAft>
             </a:pPr>
             <a:r>
-              <a:rPr sz="1000" b="0">
+              <a:rPr sz="1000" b="0" dirty="0">
                 <a:solidFill>
                   <a:srgbClr val="555F6B"/>
                 </a:solidFill>
-                <a:latin typeface="Calibri"/>
+                <a:latin typeface="Arial"/>
               </a:rPr>
               <a:t>Tox21 Phase 1  |  classical ML baseline</a:t>
             </a:r>
@@ -13064,11 +13064,11 @@
               </a:spcAft>
             </a:pPr>
             <a:r>
-              <a:rPr sz="1000" b="0">
+              <a:rPr sz="1000" b="0" dirty="0">
                 <a:solidFill>
                   <a:srgbClr val="555F6B"/>
                 </a:solidFill>
-                <a:latin typeface="Calibri"/>
+                <a:latin typeface="Arial"/>
               </a:rPr>
               <a:t>9</a:t>
             </a:r>
@@ -13110,11 +13110,11 @@
                     <a:p>
                       <a:pPr algn="l"/>
                       <a:r>
-                        <a:rPr sz="1300" b="1">
+                        <a:rPr sz="1300" b="1" dirty="0">
                           <a:solidFill>
                             <a:srgbClr val="FFFFFF"/>
                           </a:solidFill>
-                          <a:latin typeface="Calibri"/>
+                          <a:latin typeface="Arial"/>
                         </a:rPr>
                         <a:t>Model</a:t>
                       </a:r>
@@ -13133,11 +13133,11 @@
                     <a:p>
                       <a:pPr algn="ctr"/>
                       <a:r>
-                        <a:rPr sz="1300" b="1">
+                        <a:rPr sz="1300" b="1" dirty="0">
                           <a:solidFill>
                             <a:srgbClr val="FFFFFF"/>
                           </a:solidFill>
-                          <a:latin typeface="Calibri"/>
+                          <a:latin typeface="Arial"/>
                         </a:rPr>
                         <a:t>Random
 ROC</a:t>
@@ -13157,11 +13157,11 @@
                     <a:p>
                       <a:pPr algn="ctr"/>
                       <a:r>
-                        <a:rPr sz="1300" b="1">
+                        <a:rPr sz="1300" b="1" dirty="0">
                           <a:solidFill>
                             <a:srgbClr val="FFFFFF"/>
                           </a:solidFill>
-                          <a:latin typeface="Calibri"/>
+                          <a:latin typeface="Arial"/>
                         </a:rPr>
                         <a:t>Scaffold
 ROC</a:t>
@@ -13181,11 +13181,11 @@
                     <a:p>
                       <a:pPr algn="ctr"/>
                       <a:r>
-                        <a:rPr sz="1300" b="1">
+                        <a:rPr sz="1300" b="1" dirty="0">
                           <a:solidFill>
                             <a:srgbClr val="FFFFFF"/>
                           </a:solidFill>
-                          <a:latin typeface="Calibri"/>
+                          <a:latin typeface="Arial"/>
                         </a:rPr>
                         <a:t>Δ ROC</a:t>
                       </a:r>
@@ -13204,11 +13204,11 @@
                     <a:p>
                       <a:pPr algn="ctr"/>
                       <a:r>
-                        <a:rPr sz="1300" b="1">
+                        <a:rPr sz="1300" b="1" dirty="0">
                           <a:solidFill>
                             <a:srgbClr val="FFFFFF"/>
                           </a:solidFill>
-                          <a:latin typeface="Calibri"/>
+                          <a:latin typeface="Arial"/>
                         </a:rPr>
                         <a:t>Random
 PR</a:t>
@@ -13228,11 +13228,11 @@
                     <a:p>
                       <a:pPr algn="ctr"/>
                       <a:r>
-                        <a:rPr sz="1300" b="1">
+                        <a:rPr sz="1300" b="1" dirty="0">
                           <a:solidFill>
                             <a:srgbClr val="FFFFFF"/>
                           </a:solidFill>
-                          <a:latin typeface="Calibri"/>
+                          <a:latin typeface="Arial"/>
                         </a:rPr>
                         <a:t>Scaffold
 PR</a:t>
@@ -13252,11 +13252,11 @@
                     <a:p>
                       <a:pPr algn="ctr"/>
                       <a:r>
-                        <a:rPr sz="1300" b="1">
+                        <a:rPr sz="1300" b="1" dirty="0">
                           <a:solidFill>
                             <a:srgbClr val="FFFFFF"/>
                           </a:solidFill>
-                          <a:latin typeface="Calibri"/>
+                          <a:latin typeface="Arial"/>
                         </a:rPr>
                         <a:t>Δ PR</a:t>
                       </a:r>
@@ -13277,11 +13277,11 @@
                     <a:p>
                       <a:pPr algn="l"/>
                       <a:r>
-                        <a:rPr sz="1300" b="0">
-                          <a:solidFill>
-                            <a:srgbClr val="142B4D"/>
-                          </a:solidFill>
-                          <a:latin typeface="Calibri"/>
+                        <a:rPr sz="1300" b="0" dirty="0">
+                          <a:solidFill>
+                            <a:srgbClr val="142B4D"/>
+                          </a:solidFill>
+                          <a:latin typeface="Arial"/>
                         </a:rPr>
                         <a:t>Logistic Regression</a:t>
                       </a:r>
@@ -13300,11 +13300,11 @@
                     <a:p>
                       <a:pPr algn="ctr"/>
                       <a:r>
-                        <a:rPr sz="1300" b="0">
-                          <a:solidFill>
-                            <a:srgbClr val="142B4D"/>
-                          </a:solidFill>
-                          <a:latin typeface="Calibri"/>
+                        <a:rPr sz="1300" b="0" dirty="0">
+                          <a:solidFill>
+                            <a:srgbClr val="142B4D"/>
+                          </a:solidFill>
+                          <a:latin typeface="Arial"/>
                         </a:rPr>
                         <a:t>0.8405</a:t>
                       </a:r>
@@ -13323,11 +13323,11 @@
                     <a:p>
                       <a:pPr algn="ctr"/>
                       <a:r>
-                        <a:rPr sz="1300" b="0">
-                          <a:solidFill>
-                            <a:srgbClr val="142B4D"/>
-                          </a:solidFill>
-                          <a:latin typeface="Calibri"/>
+                        <a:rPr sz="1300" b="0" dirty="0">
+                          <a:solidFill>
+                            <a:srgbClr val="142B4D"/>
+                          </a:solidFill>
+                          <a:latin typeface="Arial"/>
                         </a:rPr>
                         <a:t>0.7317</a:t>
                       </a:r>
@@ -13346,11 +13346,11 @@
                     <a:p>
                       <a:pPr algn="ctr"/>
                       <a:r>
-                        <a:rPr sz="1300" b="0">
-                          <a:solidFill>
-                            <a:srgbClr val="142B4D"/>
-                          </a:solidFill>
-                          <a:latin typeface="Calibri"/>
+                        <a:rPr sz="1300" b="0" dirty="0">
+                          <a:solidFill>
+                            <a:srgbClr val="142B4D"/>
+                          </a:solidFill>
+                          <a:latin typeface="Arial"/>
                         </a:rPr>
                         <a:t>-0.1088</a:t>
                       </a:r>
@@ -13369,11 +13369,11 @@
                     <a:p>
                       <a:pPr algn="ctr"/>
                       <a:r>
-                        <a:rPr sz="1300" b="0">
-                          <a:solidFill>
-                            <a:srgbClr val="142B4D"/>
-                          </a:solidFill>
-                          <a:latin typeface="Calibri"/>
+                        <a:rPr sz="1300" b="0" dirty="0">
+                          <a:solidFill>
+                            <a:srgbClr val="142B4D"/>
+                          </a:solidFill>
+                          <a:latin typeface="Arial"/>
                         </a:rPr>
                         <a:t>0.4818</a:t>
                       </a:r>
@@ -13392,11 +13392,11 @@
                     <a:p>
                       <a:pPr algn="ctr"/>
                       <a:r>
-                        <a:rPr sz="1300" b="0">
-                          <a:solidFill>
-                            <a:srgbClr val="142B4D"/>
-                          </a:solidFill>
-                          <a:latin typeface="Calibri"/>
+                        <a:rPr sz="1300" b="0" dirty="0">
+                          <a:solidFill>
+                            <a:srgbClr val="142B4D"/>
+                          </a:solidFill>
+                          <a:latin typeface="Arial"/>
                         </a:rPr>
                         <a:t>0.3122</a:t>
                       </a:r>
@@ -13415,11 +13415,11 @@
                     <a:p>
                       <a:pPr algn="ctr"/>
                       <a:r>
-                        <a:rPr sz="1300" b="0">
-                          <a:solidFill>
-                            <a:srgbClr val="142B4D"/>
-                          </a:solidFill>
-                          <a:latin typeface="Calibri"/>
+                        <a:rPr sz="1300" b="0" dirty="0">
+                          <a:solidFill>
+                            <a:srgbClr val="142B4D"/>
+                          </a:solidFill>
+                          <a:latin typeface="Arial"/>
                         </a:rPr>
                         <a:t>-0.1695</a:t>
                       </a:r>
@@ -13440,11 +13440,11 @@
                     <a:p>
                       <a:pPr algn="l"/>
                       <a:r>
-                        <a:rPr sz="1300" b="0">
-                          <a:solidFill>
-                            <a:srgbClr val="142B4D"/>
-                          </a:solidFill>
-                          <a:latin typeface="Calibri"/>
+                        <a:rPr sz="1300" b="0" dirty="0">
+                          <a:solidFill>
+                            <a:srgbClr val="142B4D"/>
+                          </a:solidFill>
+                          <a:latin typeface="Arial"/>
                         </a:rPr>
                         <a:t>Random Forest</a:t>
                       </a:r>
@@ -13463,11 +13463,11 @@
                     <a:p>
                       <a:pPr algn="ctr"/>
                       <a:r>
-                        <a:rPr sz="1300" b="0">
-                          <a:solidFill>
-                            <a:srgbClr val="142B4D"/>
-                          </a:solidFill>
-                          <a:latin typeface="Calibri"/>
+                        <a:rPr sz="1300" b="0" dirty="0">
+                          <a:solidFill>
+                            <a:srgbClr val="142B4D"/>
+                          </a:solidFill>
+                          <a:latin typeface="Arial"/>
                         </a:rPr>
                         <a:t>0.8607</a:t>
                       </a:r>
@@ -13486,11 +13486,11 @@
                     <a:p>
                       <a:pPr algn="ctr"/>
                       <a:r>
-                        <a:rPr sz="1300" b="0">
-                          <a:solidFill>
-                            <a:srgbClr val="142B4D"/>
-                          </a:solidFill>
-                          <a:latin typeface="Calibri"/>
+                        <a:rPr sz="1300" b="0" dirty="0">
+                          <a:solidFill>
+                            <a:srgbClr val="142B4D"/>
+                          </a:solidFill>
+                          <a:latin typeface="Arial"/>
                         </a:rPr>
                         <a:t>0.7762</a:t>
                       </a:r>
@@ -13509,11 +13509,11 @@
                     <a:p>
                       <a:pPr algn="ctr"/>
                       <a:r>
-                        <a:rPr sz="1300" b="0">
-                          <a:solidFill>
-                            <a:srgbClr val="142B4D"/>
-                          </a:solidFill>
-                          <a:latin typeface="Calibri"/>
+                        <a:rPr sz="1300" b="0" dirty="0">
+                          <a:solidFill>
+                            <a:srgbClr val="142B4D"/>
+                          </a:solidFill>
+                          <a:latin typeface="Arial"/>
                         </a:rPr>
                         <a:t>-0.0845</a:t>
                       </a:r>
@@ -13532,11 +13532,11 @@
                     <a:p>
                       <a:pPr algn="ctr"/>
                       <a:r>
-                        <a:rPr sz="1300" b="0">
-                          <a:solidFill>
-                            <a:srgbClr val="142B4D"/>
-                          </a:solidFill>
-                          <a:latin typeface="Calibri"/>
+                        <a:rPr sz="1300" b="0" dirty="0">
+                          <a:solidFill>
+                            <a:srgbClr val="142B4D"/>
+                          </a:solidFill>
+                          <a:latin typeface="Arial"/>
                         </a:rPr>
                         <a:t>0.5456</a:t>
                       </a:r>
@@ -13555,11 +13555,11 @@
                     <a:p>
                       <a:pPr algn="ctr"/>
                       <a:r>
-                        <a:rPr sz="1300" b="0">
-                          <a:solidFill>
-                            <a:srgbClr val="142B4D"/>
-                          </a:solidFill>
-                          <a:latin typeface="Calibri"/>
+                        <a:rPr sz="1300" b="0" dirty="0">
+                          <a:solidFill>
+                            <a:srgbClr val="142B4D"/>
+                          </a:solidFill>
+                          <a:latin typeface="Arial"/>
                         </a:rPr>
                         <a:t>0.4035</a:t>
                       </a:r>
@@ -13578,11 +13578,11 @@
                     <a:p>
                       <a:pPr algn="ctr"/>
                       <a:r>
-                        <a:rPr sz="1300" b="0">
-                          <a:solidFill>
-                            <a:srgbClr val="142B4D"/>
-                          </a:solidFill>
-                          <a:latin typeface="Calibri"/>
+                        <a:rPr sz="1300" b="0" dirty="0">
+                          <a:solidFill>
+                            <a:srgbClr val="142B4D"/>
+                          </a:solidFill>
+                          <a:latin typeface="Arial"/>
                         </a:rPr>
                         <a:t>-0.1421</a:t>
                       </a:r>
@@ -13603,11 +13603,11 @@
                     <a:p>
                       <a:pPr algn="l"/>
                       <a:r>
-                        <a:rPr sz="1300" b="0">
-                          <a:solidFill>
-                            <a:srgbClr val="142B4D"/>
-                          </a:solidFill>
-                          <a:latin typeface="Calibri"/>
+                        <a:rPr sz="1300" b="0" dirty="0">
+                          <a:solidFill>
+                            <a:srgbClr val="142B4D"/>
+                          </a:solidFill>
+                          <a:latin typeface="Arial"/>
                         </a:rPr>
                         <a:t>XGBoost</a:t>
                       </a:r>
@@ -13626,11 +13626,11 @@
                     <a:p>
                       <a:pPr algn="ctr"/>
                       <a:r>
-                        <a:rPr sz="1300" b="0">
-                          <a:solidFill>
-                            <a:srgbClr val="142B4D"/>
-                          </a:solidFill>
-                          <a:latin typeface="Calibri"/>
+                        <a:rPr sz="1300" b="0" dirty="0">
+                          <a:solidFill>
+                            <a:srgbClr val="142B4D"/>
+                          </a:solidFill>
+                          <a:latin typeface="Arial"/>
                         </a:rPr>
                         <a:t>0.8621</a:t>
                       </a:r>
@@ -13649,11 +13649,11 @@
                     <a:p>
                       <a:pPr algn="ctr"/>
                       <a:r>
-                        <a:rPr sz="1300" b="0">
-                          <a:solidFill>
-                            <a:srgbClr val="142B4D"/>
-                          </a:solidFill>
-                          <a:latin typeface="Calibri"/>
+                        <a:rPr sz="1300" b="0" dirty="0">
+                          <a:solidFill>
+                            <a:srgbClr val="142B4D"/>
+                          </a:solidFill>
+                          <a:latin typeface="Arial"/>
                         </a:rPr>
                         <a:t>0.7606</a:t>
                       </a:r>
@@ -13672,11 +13672,11 @@
                     <a:p>
                       <a:pPr algn="ctr"/>
                       <a:r>
-                        <a:rPr sz="1300" b="0">
-                          <a:solidFill>
-                            <a:srgbClr val="142B4D"/>
-                          </a:solidFill>
-                          <a:latin typeface="Calibri"/>
+                        <a:rPr sz="1300" b="0" dirty="0">
+                          <a:solidFill>
+                            <a:srgbClr val="142B4D"/>
+                          </a:solidFill>
+                          <a:latin typeface="Arial"/>
                         </a:rPr>
                         <a:t>-0.1015</a:t>
                       </a:r>
@@ -13695,11 +13695,11 @@
                     <a:p>
                       <a:pPr algn="ctr"/>
                       <a:r>
-                        <a:rPr sz="1300" b="0">
-                          <a:solidFill>
-                            <a:srgbClr val="142B4D"/>
-                          </a:solidFill>
-                          <a:latin typeface="Calibri"/>
+                        <a:rPr sz="1300" b="0" dirty="0">
+                          <a:solidFill>
+                            <a:srgbClr val="142B4D"/>
+                          </a:solidFill>
+                          <a:latin typeface="Arial"/>
                         </a:rPr>
                         <a:t>0.5647</a:t>
                       </a:r>
@@ -13718,11 +13718,11 @@
                     <a:p>
                       <a:pPr algn="ctr"/>
                       <a:r>
-                        <a:rPr sz="1300" b="0">
-                          <a:solidFill>
-                            <a:srgbClr val="142B4D"/>
-                          </a:solidFill>
-                          <a:latin typeface="Calibri"/>
+                        <a:rPr sz="1300" b="0" dirty="0">
+                          <a:solidFill>
+                            <a:srgbClr val="142B4D"/>
+                          </a:solidFill>
+                          <a:latin typeface="Arial"/>
                         </a:rPr>
                         <a:t>0.4010</a:t>
                       </a:r>
@@ -13741,11 +13741,11 @@
                     <a:p>
                       <a:pPr algn="ctr"/>
                       <a:r>
-                        <a:rPr sz="1300" b="0">
-                          <a:solidFill>
-                            <a:srgbClr val="142B4D"/>
-                          </a:solidFill>
-                          <a:latin typeface="Calibri"/>
+                        <a:rPr sz="1300" b="0" dirty="0">
+                          <a:solidFill>
+                            <a:srgbClr val="142B4D"/>
+                          </a:solidFill>
+                          <a:latin typeface="Arial"/>
                         </a:rPr>
                         <a:t>-0.1637</a:t>
                       </a:r>
@@ -13790,11 +13790,11 @@
               </a:spcAft>
             </a:pPr>
             <a:r>
-              <a:rPr sz="1400" b="0">
+              <a:rPr sz="1400" b="0" dirty="0">
                 <a:solidFill>
                   <a:srgbClr val="555F6B"/>
                 </a:solidFill>
-                <a:latin typeface="Calibri"/>
+                <a:latin typeface="Arial"/>
               </a:rPr>
               <a:t>Morgan+Desc, mean over 12 endpoints and 3 seeds</a:t>
             </a:r>
@@ -13806,11 +13806,11 @@
               </a:spcAft>
             </a:pPr>
             <a:r>
-              <a:rPr sz="1700" b="0">
+              <a:rPr sz="1700" b="0" dirty="0">
                 <a:solidFill>
                   <a:srgbClr val="142B4D"/>
                 </a:solidFill>
-                <a:latin typeface="Calibri"/>
+                <a:latin typeface="Arial"/>
               </a:rPr>
               <a:t>•  All three models score lower on the scaffold split: ROC drops 0.0845 to 0.1088, PR AUC drops 0.1421 to 0.1695</a:t>
             </a:r>
@@ -13822,11 +13822,11 @@
               </a:spcAft>
             </a:pPr>
             <a:r>
-              <a:rPr sz="1700" b="0">
+              <a:rPr sz="1700" b="0" dirty="0">
                 <a:solidFill>
                   <a:srgbClr val="142B4D"/>
                 </a:solidFill>
-                <a:latin typeface="Calibri"/>
+                <a:latin typeface="Arial"/>
               </a:rPr>
               <a:t>•  Caveat: the two test sets contain different molecules and positive counts, so this is not a controlled leakage measurement. No significance test was run</a:t>
             </a:r>
@@ -13870,34 +13870,34 @@
   <a:themeElements>
     <a:clrScheme name="Office">
       <a:dk1>
-        <a:sysClr val="windowText" lastClr="000000"/>
+        <a:srgbClr val="142B4D"/>
       </a:dk1>
       <a:lt1>
-        <a:sysClr val="window" lastClr="FFFFFF"/>
+        <a:srgbClr val="FFFFFF"/>
       </a:lt1>
       <a:dk2>
-        <a:srgbClr val="1F497D"/>
+        <a:srgbClr val="142B4D"/>
       </a:dk2>
       <a:lt2>
-        <a:srgbClr val="EEECE1"/>
+        <a:srgbClr val="EAF3F5"/>
       </a:lt2>
       <a:accent1>
-        <a:srgbClr val="4F81BD"/>
+        <a:srgbClr val="1B7F8C"/>
       </a:accent1>
       <a:accent2>
-        <a:srgbClr val="C0504D"/>
+        <a:srgbClr val="B23A3A"/>
       </a:accent2>
       <a:accent3>
-        <a:srgbClr val="9BBB59"/>
+        <a:srgbClr val="555F6B"/>
       </a:accent3>
       <a:accent4>
-        <a:srgbClr val="8064A2"/>
+        <a:srgbClr val="BFE3E8"/>
       </a:accent4>
       <a:accent5>
-        <a:srgbClr val="4BACC6"/>
+        <a:srgbClr val="88B8BD"/>
       </a:accent5>
       <a:accent6>
-        <a:srgbClr val="F79646"/>
+        <a:srgbClr val="F2C9C4"/>
       </a:accent6>
       <a:hlink>
         <a:srgbClr val="0000FF"/>
@@ -13908,7 +13908,7 @@
     </a:clrScheme>
     <a:fontScheme name="Office">
       <a:majorFont>
-        <a:latin typeface="Calibri"/>
+        <a:latin typeface="Arial"/>
         <a:ea typeface=""/>
         <a:cs typeface=""/>
         <a:font script="Jpan" typeface="ＭＳ Ｐゴシック"/>
@@ -13943,7 +13943,7 @@
         <a:font script="Geor" typeface="Sylfaen"/>
       </a:majorFont>
       <a:minorFont>
-        <a:latin typeface="Calibri"/>
+        <a:latin typeface="Arial"/>
         <a:ea typeface=""/>
         <a:cs typeface=""/>
         <a:font script="Jpan" typeface="ＭＳ Ｐゴシック"/>

--- a/tox21-phase1/slides/tox21_phase1.pptx
+++ b/tox21-phase1/slides/tox21_phase1.pptx
@@ -514,7 +514,7 @@
           <a:lstStyle/>
           <a:p>
             <a:r>
-              <a:t>Opening. We predict the outcome of 12 Tox21 toxicity assays from a molecule's structure. Phase 1 is the classical machine learning baseline and the evaluation machinery; the graph neural network is Phase 2. Team: Raghav (data, splits, Logistic Regression), Ranajeet (features, Random Forest), Parrv (repository, evaluation harness, XGBoost, tuning and final test), Abhijeet (report and analysis); Malhar is Member 5 (QA and verification); the role is assigned and the QA tasks were completed by Parrv. Source: README team table.</a:t>
+              <a:t>Opening. We predict the outcome of 12 Tox21 toxicity assays from a molecule's structure. Phase 1 is the classical machine learning baseline and the evaluation machinery; the graph neural network is Phase 2. Team: Raghav (data, splits, Logistic Regression), Ranajeet (features, Random Forest), Parrv (repository, evaluation harness, XGBoost, tuning and final test), Abhijeet (report and analysis); Malhar is Member 5 (QA and verification); the QA report documents the verification results. Source: README team table.</a:t>
             </a:r>
           </a:p>
         </p:txBody>
@@ -794,7 +794,7 @@
           <a:lstStyle/>
           <a:p>
             <a:r>
-              <a:t>Roles follow the Phase 1 team handbook and the README. Raghav: data cleaning, deduplication, EDA, splits, Logistic Regression. Ranajeet: Morgan fingerprints, RDKit descriptors, leak-free preprocessing, Random Forest. Parrv: repository structure and contract, evaluation harness, XGBoost, tuning and final-test scripts, reproducibility. Abhijeet: literature review, theory, results analysis, Tanimoto study, report. Malhar is Member 5. The team presentation lists README and slide polish, tests, and viva preparation; the README describes the role as QA and verification. The committed QA report says the 200-molecule smoke test and final-result reproduction were completed by Parrv, while the viva drill remains unrun. Known QA item: 01_eda.ipynb fails as committed because it expects a Google Colab path; the report proposes a portable-path fix. Phase 2 is a graph neural network evaluated on the same splits and protocol. Reproducibility: the QA report records that make final-test reproduced all 432 result rows to 1e-9.</a:t>
+              <a:t>Roles follow the Phase 1 team handbook and the README. Raghav: data cleaning, deduplication, EDA, splits, Logistic Regression. Ranajeet: Morgan fingerprints, RDKit descriptors, leak-free preprocessing, Random Forest. Parrv: repository structure and contract, evaluation harness, XGBoost, tuning and final-test scripts, reproducibility. Abhijeet: literature review, theory, results analysis, Tanimoto study, report. Malhar is Member 5. The team presentation lists README and slide polish, tests, and viva preparation; the README describes the role as QA and verification. The committed QA report documents the 200-molecule smoke test and final-result reproduction, while the viva drill remains unrun. Known QA item: 01_eda.ipynb fails as committed because it expects a Google Colab path; the report proposes a portable-path fix. Phase 2 is a graph neural network evaluated on the same splits and protocol. Reproducibility: the QA report records that make final-test reproduced all 432 result rows to 1e-9.</a:t>
             </a:r>
           </a:p>
         </p:txBody>
@@ -8209,7 +8209,7 @@
                 </a:solidFill>
                 <a:latin typeface="Arial"/>
               </a:rPr>
-              <a:t>Smoke test and 432-row reproduction documented by Parrv</a:t>
+              <a:t>Smoke test and 432-row reproduction documented in the QA report</a:t>
             </a:r>
           </a:p>
         </p:txBody>
